--- a/docs/복지AI_소개_수정본.pptx
+++ b/docs/복지AI_소개_수정본.pptx
@@ -17,9 +17,11 @@
     <p:sldId id="265" r:id="rId11"/>
     <p:sldId id="266" r:id="rId12"/>
     <p:sldId id="267" r:id="rId13"/>
+    <p:sldId id="268" r:id="rId14"/>
+    <p:sldId id="269" r:id="rId15"/>
   </p:sldIdLst>
   <p:notesMasterIdLst>
-    <p:notesMasterId r:id="rId14"/>
+    <p:notesMasterId r:id="rId16"/>
   </p:notesMasterIdLst>
   <p:sldSz cx="12191695" cy="6858000"/>
   <p:notesSz cx="6858000" cy="12191695"/>
@@ -116,6 +118,234 @@
     </a:lvl9pPr>
   </p:defaultTextStyle>
 </p:presentation>
+</file>
+
+<file path=ppt/charts/chart1.xml><?xml version="1.0" encoding="utf-8"?>
+<c:chartSpace xmlns:c="http://schemas.openxmlformats.org/drawingml/2006/chart" xmlns:a="http://schemas.openxmlformats.org/drawingml/2006/main" xmlns:r="http://schemas.openxmlformats.org/officeDocument/2006/relationships">
+  <c:date1904 val="0"/>
+  <c:roundedCorners val="1"/>
+  <c:chart>
+    <c:autoTitleDeleted val="1"/>
+    <c:plotArea>
+      <c:layout/>
+      <c:doughnutChart>
+        <c:varyColors val="1"/>
+        <c:ser>
+          <c:idx val="0"/>
+          <c:order val="0"/>
+          <c:tx>
+            <c:strRef>
+              <c:f>Sheet1!$B$1</c:f>
+              <c:strCache>
+                <c:ptCount val="1"/>
+                <c:pt idx="0">
+                  <c:v>수집 분포</c:v>
+                </c:pt>
+              </c:strCache>
+            </c:strRef>
+          </c:tx>
+          <c:spPr>
+            <a:solidFill>
+              <a:schemeClr val="accent1"/>
+            </a:solidFill>
+            <a:ln w="9525" cap="flat">
+              <a:solidFill>
+                <a:srgbClr val="F9F9F9"/>
+              </a:solidFill>
+              <a:prstDash val="solid"/>
+              <a:round/>
+            </a:ln>
+            <a:effectLst/>
+          </c:spPr>
+          <c:dPt>
+            <c:idx val="0"/>
+            <c:bubble3D val="0"/>
+            <c:spPr>
+              <a:solidFill>
+                <a:srgbClr val="18A058"/>
+              </a:solidFill>
+              <a:effectLst/>
+            </c:spPr>
+          </c:dPt>
+          <c:dPt>
+            <c:idx val="1"/>
+            <c:bubble3D val="0"/>
+            <c:spPr>
+              <a:solidFill>
+                <a:srgbClr val="5FB88A"/>
+              </a:solidFill>
+              <a:effectLst/>
+            </c:spPr>
+          </c:dPt>
+          <c:dPt>
+            <c:idx val="2"/>
+            <c:bubble3D val="0"/>
+            <c:spPr>
+              <a:solidFill>
+                <a:srgbClr val="A9D9BF"/>
+              </a:solidFill>
+              <a:effectLst/>
+            </c:spPr>
+          </c:dPt>
+          <c:dLbls>
+            <c:dLbl>
+              <c:idx val="0"/>
+              <c:numFmt formatCode="0%" sourceLinked="0"/>
+              <c:spPr/>
+              <c:txPr>
+                <a:bodyPr/>
+                <a:lstStyle/>
+                <a:p>
+                  <a:pPr>
+                    <a:defRPr sz="1300" b="1" i="0" u="none" strike="noStrike">
+                      <a:solidFill>
+                        <a:srgbClr val="FFFFFF"/>
+                      </a:solidFill>
+                      <a:latin typeface="맑은 고딕"/>
+                    </a:defRPr>
+                  </a:pPr>
+                </a:p>
+              </c:txPr>
+              <c:showLegendKey val="0"/>
+              <c:showVal val="0"/>
+              <c:showCatName val="0"/>
+              <c:showSerName val="0"/>
+              <c:showPercent val="1"/>
+              <c:showBubbleSize val="0"/>
+            </c:dLbl>
+            <c:dLbl>
+              <c:idx val="1"/>
+              <c:numFmt formatCode="0%" sourceLinked="0"/>
+              <c:spPr/>
+              <c:txPr>
+                <a:bodyPr/>
+                <a:lstStyle/>
+                <a:p>
+                  <a:pPr>
+                    <a:defRPr sz="1300" b="1" i="0" u="none" strike="noStrike">
+                      <a:solidFill>
+                        <a:srgbClr val="FFFFFF"/>
+                      </a:solidFill>
+                      <a:latin typeface="맑은 고딕"/>
+                    </a:defRPr>
+                  </a:pPr>
+                </a:p>
+              </c:txPr>
+              <c:showLegendKey val="0"/>
+              <c:showVal val="0"/>
+              <c:showCatName val="0"/>
+              <c:showSerName val="0"/>
+              <c:showPercent val="1"/>
+              <c:showBubbleSize val="0"/>
+            </c:dLbl>
+            <c:dLbl>
+              <c:idx val="2"/>
+              <c:numFmt formatCode="0%" sourceLinked="0"/>
+              <c:spPr/>
+              <c:txPr>
+                <a:bodyPr/>
+                <a:lstStyle/>
+                <a:p>
+                  <a:pPr>
+                    <a:defRPr sz="1300" b="1" i="0" u="none" strike="noStrike">
+                      <a:solidFill>
+                        <a:srgbClr val="FFFFFF"/>
+                      </a:solidFill>
+                      <a:latin typeface="맑은 고딕"/>
+                    </a:defRPr>
+                  </a:pPr>
+                </a:p>
+              </c:txPr>
+              <c:showLegendKey val="0"/>
+              <c:showVal val="0"/>
+              <c:showCatName val="0"/>
+              <c:showSerName val="0"/>
+              <c:showPercent val="1"/>
+              <c:showBubbleSize val="0"/>
+            </c:dLbl>
+            <c:numFmt formatCode="0%" sourceLinked="0"/>
+            <c:txPr>
+              <a:bodyPr/>
+              <a:lstStyle/>
+              <a:p>
+                <a:pPr>
+                  <a:defRPr sz="1800" b="1" i="0" u="none" strike="noStrike">
+                    <a:solidFill>
+                      <a:srgbClr val="000000"/>
+                    </a:solidFill>
+                    <a:latin typeface="Arial"/>
+                  </a:defRPr>
+                </a:pPr>
+              </a:p>
+            </c:txPr>
+            <c:showLegendKey val="0"/>
+            <c:showVal val="0"/>
+            <c:showCatName val="1"/>
+            <c:showSerName val="0"/>
+            <c:showPercent val="1"/>
+            <c:showBubbleSize val="0"/>
+            <c:showLeaderLines val="0"/>
+          </c:dLbls>
+          <c:cat>
+            <c:strRef>
+              <c:f>Sheet1!$A$2:$A$4</c:f>
+              <c:strCache>
+                <c:ptCount val="3"/>
+                <c:pt idx="0">
+                  <c:v>정부24 공공서비스</c:v>
+                </c:pt>
+                <c:pt idx="1">
+                  <c:v>복지로 지자체</c:v>
+                </c:pt>
+                <c:pt idx="2">
+                  <c:v>복지로 중앙부처</c:v>
+                </c:pt>
+              </c:strCache>
+            </c:strRef>
+          </c:cat>
+          <c:val>
+            <c:numRef>
+              <c:f>Sheet1!$B$2:$B$4</c:f>
+              <c:numCache>
+                <c:ptCount val="3"/>
+                <c:pt idx="0">
+                  <c:v>10962</c:v>
+                </c:pt>
+                <c:pt idx="1">
+                  <c:v>4561</c:v>
+                </c:pt>
+                <c:pt idx="2">
+                  <c:v>448</c:v>
+                </c:pt>
+              </c:numCache>
+            </c:numRef>
+          </c:val>
+        </c:ser>
+        <c:firstSliceAng val="0"/>
+        <c:holeSize val="55"/>
+      </c:doughnutChart>
+      <c:spPr>
+        <a:noFill/>
+        <a:ln>
+          <a:noFill/>
+        </a:ln>
+        <a:effectLst/>
+      </c:spPr>
+    </c:plotArea>
+    <c:plotVisOnly val="1"/>
+    <c:dispBlanksAs val="span"/>
+  </c:chart>
+  <c:spPr>
+    <a:noFill/>
+    <a:ln>
+      <a:noFill/>
+    </a:ln>
+    <a:effectLst/>
+  </c:spPr>
+  <c:externalData r:id="rId1">
+    <c:autoUpdate val="0"/>
+  </c:externalData>
+</c:chartSpace>
 </file>
 
 <file path=ppt/notesMasters/notesMaster1.xml><?xml version="1.0" encoding="utf-8"?>
@@ -801,6 +1031,182 @@
             <a:fld id="{F7021451-1387-4CA6-816F-3879F97B5CBC}" type="slidenum">
               <a:rPr lang="en-US"/>
               <a:t>12</a:t>
+            </a:fld>
+            <a:endParaRPr lang="en-US"/>
+          </a:p>
+        </p:txBody>
+      </p:sp>
+    </p:spTree>
+    <p:extLst>
+      <p:ext uri="{BB962C8B-B14F-4D97-AF65-F5344CB8AC3E}">
+        <p14:creationId xmlns:p14="http://schemas.microsoft.com/office/powerpoint/2010/main" val="1024086991"/>
+      </p:ext>
+    </p:extLst>
+  </p:cSld>
+  <p:clrMapOvr>
+    <a:masterClrMapping/>
+  </p:clrMapOvr>
+</p:notes>
+</file>
+
+<file path=ppt/notesSlides/notesSlide13.xml><?xml version="1.0" encoding="utf-8"?>
+<p:notes xmlns:a="http://schemas.openxmlformats.org/drawingml/2006/main" xmlns:r="http://schemas.openxmlformats.org/officeDocument/2006/relationships" xmlns:p="http://schemas.openxmlformats.org/presentationml/2006/main">
+  <p:cSld>
+    <p:spTree>
+      <p:nvGrpSpPr>
+        <p:cNvPr id="1" name=""/>
+        <p:cNvGrpSpPr/>
+        <p:nvPr/>
+      </p:nvGrpSpPr>
+      <p:grpSpPr>
+        <a:xfrm>
+          <a:off x="0" y="0"/>
+          <a:ext cx="0" cy="0"/>
+          <a:chOff x="0" y="0"/>
+          <a:chExt cx="0" cy="0"/>
+        </a:xfrm>
+      </p:grpSpPr>
+      <p:sp>
+        <p:nvSpPr>
+          <p:cNvPr id="2" name="Slide Image Placeholder 1"/>
+          <p:cNvSpPr>
+            <a:spLocks noGrp="1" noRot="1" noChangeAspect="1"/>
+          </p:cNvSpPr>
+          <p:nvPr>
+            <p:ph type="sldImg"/>
+          </p:nvPr>
+        </p:nvSpPr>
+        <p:spPr/>
+      </p:sp>
+      <p:sp>
+        <p:nvSpPr>
+          <p:cNvPr id="3" name="Notes Placeholder 2"/>
+          <p:cNvSpPr>
+            <a:spLocks noGrp="1"/>
+          </p:cNvSpPr>
+          <p:nvPr>
+            <p:ph type="body" idx="1"/>
+          </p:nvPr>
+        </p:nvSpPr>
+        <p:spPr/>
+        <p:txBody>
+          <a:bodyPr/>
+          <a:lstStyle/>
+          <a:p>
+            <a:r>
+              <a:rPr lang="en-US" dirty="0"/>
+              <a:t/>
+            </a:r>
+            <a:endParaRPr lang="en-US" dirty="0"/>
+          </a:p>
+        </p:txBody>
+      </p:sp>
+      <p:sp>
+        <p:nvSpPr>
+          <p:cNvPr id="4" name="Slide Number Placeholder 3"/>
+          <p:cNvSpPr>
+            <a:spLocks noGrp="1"/>
+          </p:cNvSpPr>
+          <p:nvPr>
+            <p:ph type="sldNum" sz="quarter" idx="10"/>
+          </p:nvPr>
+        </p:nvSpPr>
+        <p:spPr/>
+        <p:txBody>
+          <a:bodyPr/>
+          <a:lstStyle/>
+          <a:p>
+            <a:fld id="{F7021451-1387-4CA6-816F-3879F97B5CBC}" type="slidenum">
+              <a:rPr lang="en-US"/>
+              <a:t>13</a:t>
+            </a:fld>
+            <a:endParaRPr lang="en-US"/>
+          </a:p>
+        </p:txBody>
+      </p:sp>
+    </p:spTree>
+    <p:extLst>
+      <p:ext uri="{BB962C8B-B14F-4D97-AF65-F5344CB8AC3E}">
+        <p14:creationId xmlns:p14="http://schemas.microsoft.com/office/powerpoint/2010/main" val="1024086991"/>
+      </p:ext>
+    </p:extLst>
+  </p:cSld>
+  <p:clrMapOvr>
+    <a:masterClrMapping/>
+  </p:clrMapOvr>
+</p:notes>
+</file>
+
+<file path=ppt/notesSlides/notesSlide14.xml><?xml version="1.0" encoding="utf-8"?>
+<p:notes xmlns:a="http://schemas.openxmlformats.org/drawingml/2006/main" xmlns:r="http://schemas.openxmlformats.org/officeDocument/2006/relationships" xmlns:p="http://schemas.openxmlformats.org/presentationml/2006/main">
+  <p:cSld>
+    <p:spTree>
+      <p:nvGrpSpPr>
+        <p:cNvPr id="1" name=""/>
+        <p:cNvGrpSpPr/>
+        <p:nvPr/>
+      </p:nvGrpSpPr>
+      <p:grpSpPr>
+        <a:xfrm>
+          <a:off x="0" y="0"/>
+          <a:ext cx="0" cy="0"/>
+          <a:chOff x="0" y="0"/>
+          <a:chExt cx="0" cy="0"/>
+        </a:xfrm>
+      </p:grpSpPr>
+      <p:sp>
+        <p:nvSpPr>
+          <p:cNvPr id="2" name="Slide Image Placeholder 1"/>
+          <p:cNvSpPr>
+            <a:spLocks noGrp="1" noRot="1" noChangeAspect="1"/>
+          </p:cNvSpPr>
+          <p:nvPr>
+            <p:ph type="sldImg"/>
+          </p:nvPr>
+        </p:nvSpPr>
+        <p:spPr/>
+      </p:sp>
+      <p:sp>
+        <p:nvSpPr>
+          <p:cNvPr id="3" name="Notes Placeholder 2"/>
+          <p:cNvSpPr>
+            <a:spLocks noGrp="1"/>
+          </p:cNvSpPr>
+          <p:nvPr>
+            <p:ph type="body" idx="1"/>
+          </p:nvPr>
+        </p:nvSpPr>
+        <p:spPr/>
+        <p:txBody>
+          <a:bodyPr/>
+          <a:lstStyle/>
+          <a:p>
+            <a:r>
+              <a:rPr lang="en-US" dirty="0"/>
+              <a:t/>
+            </a:r>
+            <a:endParaRPr lang="en-US" dirty="0"/>
+          </a:p>
+        </p:txBody>
+      </p:sp>
+      <p:sp>
+        <p:nvSpPr>
+          <p:cNvPr id="4" name="Slide Number Placeholder 3"/>
+          <p:cNvSpPr>
+            <a:spLocks noGrp="1"/>
+          </p:cNvSpPr>
+          <p:nvPr>
+            <p:ph type="sldNum" sz="quarter" idx="10"/>
+          </p:nvPr>
+        </p:nvSpPr>
+        <p:spPr/>
+        <p:txBody>
+          <a:bodyPr/>
+          <a:lstStyle/>
+          <a:p>
+            <a:fld id="{F7021451-1387-4CA6-816F-3879F97B5CBC}" type="slidenum">
+              <a:rPr lang="en-US"/>
+              <a:t>14</a:t>
             </a:fld>
             <a:endParaRPr lang="en-US"/>
           </a:p>
@@ -2193,7 +2599,7 @@
         <p:spPr>
           <a:xfrm>
             <a:off x="502920" y="457200"/>
-            <a:ext cx="10972800" cy="640080"/>
+            <a:ext cx="11155680" cy="640080"/>
           </a:xfrm>
           <a:prstGeom prst="rect">
             <a:avLst/>
@@ -2217,7 +2623,7 @@
                 <a:ea typeface="맑은 고딕" pitchFamily="34" charset="-122"/>
                 <a:cs typeface="맑은 고딕" pitchFamily="34" charset="-120"/>
               </a:rPr>
-              <a:t>지속 가능한 복지 생태계를 위한 수익화 모델</a:t>
+              <a:t>검색 지연 없는 실시간 하이브리드 RAG</a:t>
             </a:r>
             <a:endParaRPr lang="en-US" sz="3000" dirty="0"/>
           </a:p>
@@ -2232,38 +2638,11 @@
         <p:spPr>
           <a:xfrm>
             <a:off x="502920" y="1554480"/>
-            <a:ext cx="3584448" cy="4206240"/>
+            <a:ext cx="4023360" cy="4206240"/>
           </a:xfrm>
           <a:prstGeom prst="roundRect">
             <a:avLst>
-              <a:gd name="adj" fmla="val 3061"/>
-            </a:avLst>
-          </a:prstGeom>
-          <a:solidFill>
-            <a:srgbClr val="FFFFFF"/>
-          </a:solidFill>
-          <a:ln w="12700">
-            <a:solidFill>
-              <a:srgbClr val="DCE4DC"/>
-            </a:solidFill>
-            <a:prstDash val="solid"/>
-          </a:ln>
-        </p:spPr>
-      </p:sp>
-      <p:sp>
-        <p:nvSpPr>
-          <p:cNvPr id="4" name="Shape 2"/>
-          <p:cNvSpPr/>
-          <p:nvPr/>
-        </p:nvSpPr>
-        <p:spPr>
-          <a:xfrm>
-            <a:off x="502920" y="1554480"/>
-            <a:ext cx="3584448" cy="822960"/>
-          </a:xfrm>
-          <a:prstGeom prst="roundRect">
-            <a:avLst>
-              <a:gd name="adj" fmla="val 13333"/>
+              <a:gd name="adj" fmla="val 2727"/>
             </a:avLst>
           </a:prstGeom>
           <a:solidFill>
@@ -2274,40 +2653,102 @@
       </p:sp>
       <p:sp>
         <p:nvSpPr>
+          <p:cNvPr id="4" name="Text 2"/>
+          <p:cNvSpPr/>
+          <p:nvPr/>
+        </p:nvSpPr>
+        <p:spPr>
+          <a:xfrm>
+            <a:off x="640080" y="2194560"/>
+            <a:ext cx="3749040" cy="1097280"/>
+          </a:xfrm>
+          <a:prstGeom prst="rect">
+            <a:avLst/>
+          </a:prstGeom>
+          <a:noFill/>
+          <a:ln/>
+        </p:spPr>
+        <p:txBody>
+          <a:bodyPr wrap="square" rtlCol="0" anchor="ctr"/>
+          <a:lstStyle/>
+          <a:p>
+            <a:pPr algn="ctr" indent="0" marL="0">
+              <a:buNone/>
+            </a:pPr>
+            <a:r>
+              <a:rPr lang="en-US" sz="5600" b="1" dirty="0">
+                <a:solidFill>
+                  <a:srgbClr val="FFFFFF"/>
+                </a:solidFill>
+                <a:latin typeface="맑은 고딕" pitchFamily="34" charset="0"/>
+                <a:ea typeface="맑은 고딕" pitchFamily="34" charset="-122"/>
+                <a:cs typeface="맑은 고딕" pitchFamily="34" charset="-120"/>
+              </a:rPr>
+              <a:t>15,981</a:t>
+            </a:r>
+            <a:endParaRPr lang="en-US" sz="5600" dirty="0"/>
+          </a:p>
+        </p:txBody>
+      </p:sp>
+      <p:sp>
+        <p:nvSpPr>
           <p:cNvPr id="5" name="Text 3"/>
           <p:cNvSpPr/>
           <p:nvPr/>
         </p:nvSpPr>
         <p:spPr>
           <a:xfrm>
-            <a:off x="777240" y="1554480"/>
-            <a:ext cx="3017520" cy="822960"/>
-          </a:xfrm>
-          <a:prstGeom prst="rect">
-            <a:avLst/>
-          </a:prstGeom>
-          <a:noFill/>
-          <a:ln/>
-        </p:spPr>
-        <p:txBody>
-          <a:bodyPr wrap="square" rtlCol="0" anchor="ctr"/>
-          <a:lstStyle/>
-          <a:p>
-            <a:pPr indent="0" marL="0">
-              <a:buNone/>
-            </a:pPr>
-            <a:r>
-              <a:rPr lang="en-US" sz="2200" b="1" dirty="0">
-                <a:solidFill>
-                  <a:srgbClr val="FFFFFF"/>
-                </a:solidFill>
-                <a:latin typeface="맑은 고딕" pitchFamily="34" charset="0"/>
-                <a:ea typeface="맑은 고딕" pitchFamily="34" charset="-122"/>
-                <a:cs typeface="맑은 고딕" pitchFamily="34" charset="-120"/>
-              </a:rPr>
-              <a:t>B2G</a:t>
-            </a:r>
-            <a:endParaRPr lang="en-US" sz="2200" dirty="0"/>
+            <a:off x="640080" y="3383280"/>
+            <a:ext cx="3749040" cy="914400"/>
+          </a:xfrm>
+          <a:prstGeom prst="rect">
+            <a:avLst/>
+          </a:prstGeom>
+          <a:noFill/>
+          <a:ln/>
+        </p:spPr>
+        <p:txBody>
+          <a:bodyPr wrap="square" rtlCol="0" anchor="ctr"/>
+          <a:lstStyle/>
+          <a:p>
+            <a:pPr algn="ctr" indent="0" marL="0">
+              <a:lnSpc>
+                <a:spcPct val="120000"/>
+              </a:lnSpc>
+              <a:buNone/>
+            </a:pPr>
+            <a:r>
+              <a:rPr lang="en-US" sz="1400" dirty="0">
+                <a:solidFill>
+                  <a:srgbClr val="E8F5EC"/>
+                </a:solidFill>
+                <a:latin typeface="맑은 고딕" pitchFamily="34" charset="0"/>
+                <a:ea typeface="맑은 고딕" pitchFamily="34" charset="-122"/>
+                <a:cs typeface="맑은 고딕" pitchFamily="34" charset="-120"/>
+              </a:rPr>
+              <a:t>수집·정규화·임베딩 완료된 혜택 수</a:t>
+            </a:r>
+            <a:endParaRPr lang="en-US" sz="1400" dirty="0"/>
+          </a:p>
+          <a:p>
+            <a:pPr algn="ctr" indent="0" marL="0">
+              <a:lnSpc>
+                <a:spcPct val="120000"/>
+              </a:lnSpc>
+              <a:buNone/>
+            </a:pPr>
+            <a:r>
+              <a:rPr lang="en-US" sz="1400" dirty="0">
+                <a:solidFill>
+                  <a:srgbClr val="E8F5EC"/>
+                </a:solidFill>
+                <a:latin typeface="맑은 고딕" pitchFamily="34" charset="0"/>
+                <a:ea typeface="맑은 고딕" pitchFamily="34" charset="-122"/>
+                <a:cs typeface="맑은 고딕" pitchFamily="34" charset="-120"/>
+              </a:rPr>
+              <a:t>(벡터 임베딩 100% 적재)</a:t>
+            </a:r>
+            <a:endParaRPr lang="en-US" sz="1400" dirty="0"/>
           </a:p>
         </p:txBody>
       </p:sp>
@@ -2319,70 +2760,27 @@
         </p:nvSpPr>
         <p:spPr>
           <a:xfrm>
-            <a:off x="777240" y="2560320"/>
-            <a:ext cx="3108960" cy="457200"/>
-          </a:xfrm>
-          <a:prstGeom prst="rect">
-            <a:avLst/>
-          </a:prstGeom>
-          <a:noFill/>
-          <a:ln/>
-        </p:spPr>
-        <p:txBody>
-          <a:bodyPr wrap="square" rtlCol="0" anchor="ctr"/>
-          <a:lstStyle/>
-          <a:p>
-            <a:pPr indent="0" marL="0">
-              <a:buNone/>
-            </a:pPr>
-            <a:r>
-              <a:rPr lang="en-US" sz="1500" b="1" dirty="0">
-                <a:solidFill>
-                  <a:srgbClr val="0F6B3A"/>
-                </a:solidFill>
-                <a:latin typeface="맑은 고딕" pitchFamily="34" charset="0"/>
-                <a:ea typeface="맑은 고딕" pitchFamily="34" charset="-122"/>
-                <a:cs typeface="맑은 고딕" pitchFamily="34" charset="-120"/>
-              </a:rPr>
-              <a:t>지자체 협업 모델</a:t>
-            </a:r>
-            <a:endParaRPr lang="en-US" sz="1500" dirty="0"/>
-          </a:p>
-        </p:txBody>
-      </p:sp>
-      <p:sp>
-        <p:nvSpPr>
-          <p:cNvPr id="7" name="Text 5"/>
-          <p:cNvSpPr/>
-          <p:nvPr/>
-        </p:nvSpPr>
-        <p:spPr>
-          <a:xfrm>
-            <a:off x="777240" y="3108960"/>
-            <a:ext cx="3108960" cy="2468880"/>
-          </a:xfrm>
-          <a:prstGeom prst="rect">
-            <a:avLst/>
-          </a:prstGeom>
-          <a:noFill/>
-          <a:ln/>
-        </p:spPr>
-        <p:txBody>
-          <a:bodyPr wrap="square" rtlCol="0" anchor="ctr"/>
-          <a:lstStyle/>
-          <a:p>
-            <a:pPr marL="177800" indent="-177800">
+            <a:off x="4846320" y="1600200"/>
+            <a:ext cx="6858000" cy="1554480"/>
+          </a:xfrm>
+          <a:prstGeom prst="rect">
+            <a:avLst/>
+          </a:prstGeom>
+          <a:noFill/>
+          <a:ln/>
+        </p:spPr>
+        <p:txBody>
+          <a:bodyPr wrap="square" rtlCol="0" anchor="ctr"/>
+          <a:lstStyle/>
+          <a:p>
+            <a:pPr indent="0" marL="0">
               <a:lnSpc>
                 <a:spcPct val="130000"/>
               </a:lnSpc>
-              <a:spcAft>
-                <a:spcPts val="800"/>
-              </a:spcAft>
-              <a:buSzPct val="100000"/>
-              <a:buChar char="•"/>
-            </a:pPr>
-            <a:r>
-              <a:rPr lang="en-US" sz="1250" dirty="0">
+              <a:buNone/>
+            </a:pPr>
+            <a:r>
+              <a:rPr lang="en-US" sz="1500" dirty="0">
                 <a:solidFill>
                   <a:srgbClr val="6A6F76"/>
                 </a:solidFill>
@@ -2390,23 +2788,78 @@
                 <a:ea typeface="맑은 고딕" pitchFamily="34" charset="-122"/>
                 <a:cs typeface="맑은 고딕" pitchFamily="34" charset="-120"/>
               </a:rPr>
-              <a:t>행정 효율화 및 자동 안내 발송</a:t>
-            </a:r>
-            <a:endParaRPr lang="en-US" sz="1250" dirty="0"/>
-          </a:p>
-          <a:p>
-            <a:pPr marL="177800" indent="-177800">
+              <a:t>사용자 입력 시점에 느린 외부 공공 API를 매번 호출하지 않습니다. 매일 새벽 자동 동기화·전처리된 통합 DB 내부에서 pgvector 하이브리드 인덱싱으로 즉시 조회하여, 수 초 내에 정확한 상황 해석 상담 결과를 출력합니다.</a:t>
+            </a:r>
+            <a:endParaRPr lang="en-US" sz="1500" dirty="0"/>
+          </a:p>
+        </p:txBody>
+      </p:sp>
+      <p:sp>
+        <p:nvSpPr>
+          <p:cNvPr id="7" name="Shape 5"/>
+          <p:cNvSpPr/>
+          <p:nvPr/>
+        </p:nvSpPr>
+        <p:spPr>
+          <a:xfrm>
+            <a:off x="4846320" y="3429000"/>
+            <a:ext cx="164592" cy="164592"/>
+          </a:xfrm>
+          <a:prstGeom prst="ellipse">
+            <a:avLst/>
+          </a:prstGeom>
+          <a:solidFill>
+            <a:srgbClr val="18A058"/>
+          </a:solidFill>
+          <a:ln/>
+        </p:spPr>
+      </p:sp>
+      <p:sp>
+        <p:nvSpPr>
+          <p:cNvPr id="8" name="Text 6"/>
+          <p:cNvSpPr/>
+          <p:nvPr/>
+        </p:nvSpPr>
+        <p:spPr>
+          <a:xfrm>
+            <a:off x="5166360" y="3383280"/>
+            <a:ext cx="6492240" cy="731520"/>
+          </a:xfrm>
+          <a:prstGeom prst="rect">
+            <a:avLst/>
+          </a:prstGeom>
+          <a:noFill/>
+          <a:ln/>
+        </p:spPr>
+        <p:txBody>
+          <a:bodyPr wrap="square" rtlCol="0" anchor="ctr"/>
+          <a:lstStyle/>
+          <a:p>
+            <a:pPr indent="0" marL="0">
               <a:lnSpc>
-                <a:spcPct val="130000"/>
+                <a:spcPct val="110000"/>
               </a:lnSpc>
-              <a:spcAft>
-                <a:spcPts val="800"/>
-              </a:spcAft>
-              <a:buSzPct val="100000"/>
-              <a:buChar char="•"/>
-            </a:pPr>
-            <a:r>
-              <a:rPr lang="en-US" sz="1250" dirty="0">
+              <a:buNone/>
+            </a:pPr>
+            <a:r>
+              <a:rPr lang="en-US" sz="1350" b="1" dirty="0">
+                <a:solidFill>
+                  <a:srgbClr val="1B1C1E"/>
+                </a:solidFill>
+                <a:latin typeface="맑은 고딕" pitchFamily="34" charset="0"/>
+                <a:ea typeface="맑은 고딕" pitchFamily="34" charset="-122"/>
+                <a:cs typeface="맑은 고딕" pitchFamily="34" charset="-120"/>
+              </a:rPr>
+              <a:t>키워드 + 벡터 하이브리드(RRF)  </a:t>
+            </a:r>
+            <a:pPr indent="0" marL="0">
+              <a:lnSpc>
+                <a:spcPct val="110000"/>
+              </a:lnSpc>
+              <a:buNone/>
+            </a:pPr>
+            <a:r>
+              <a:rPr lang="en-US" sz="1350" dirty="0">
                 <a:solidFill>
                   <a:srgbClr val="6A6F76"/>
                 </a:solidFill>
@@ -2414,23 +2867,78 @@
                 <a:ea typeface="맑은 고딕" pitchFamily="34" charset="-122"/>
                 <a:cs typeface="맑은 고딕" pitchFamily="34" charset="-120"/>
               </a:rPr>
-              <a:t>API 연동료 기반 구독 매출</a:t>
-            </a:r>
-            <a:endParaRPr lang="en-US" sz="1250" dirty="0"/>
-          </a:p>
-          <a:p>
-            <a:pPr marL="177800" indent="-177800">
+              <a:t>정확 일치와 의미 검색을 결합해 사전에 없는 일상어도 매칭</a:t>
+            </a:r>
+            <a:endParaRPr lang="en-US" sz="1350" dirty="0"/>
+          </a:p>
+        </p:txBody>
+      </p:sp>
+      <p:sp>
+        <p:nvSpPr>
+          <p:cNvPr id="9" name="Shape 7"/>
+          <p:cNvSpPr/>
+          <p:nvPr/>
+        </p:nvSpPr>
+        <p:spPr>
+          <a:xfrm>
+            <a:off x="4846320" y="4251960"/>
+            <a:ext cx="164592" cy="164592"/>
+          </a:xfrm>
+          <a:prstGeom prst="ellipse">
+            <a:avLst/>
+          </a:prstGeom>
+          <a:solidFill>
+            <a:srgbClr val="18A058"/>
+          </a:solidFill>
+          <a:ln/>
+        </p:spPr>
+      </p:sp>
+      <p:sp>
+        <p:nvSpPr>
+          <p:cNvPr id="10" name="Text 8"/>
+          <p:cNvSpPr/>
+          <p:nvPr/>
+        </p:nvSpPr>
+        <p:spPr>
+          <a:xfrm>
+            <a:off x="5166360" y="4206240"/>
+            <a:ext cx="6492240" cy="731520"/>
+          </a:xfrm>
+          <a:prstGeom prst="rect">
+            <a:avLst/>
+          </a:prstGeom>
+          <a:noFill/>
+          <a:ln/>
+        </p:spPr>
+        <p:txBody>
+          <a:bodyPr wrap="square" rtlCol="0" anchor="ctr"/>
+          <a:lstStyle/>
+          <a:p>
+            <a:pPr indent="0" marL="0">
               <a:lnSpc>
-                <a:spcPct val="130000"/>
+                <a:spcPct val="110000"/>
               </a:lnSpc>
-              <a:spcAft>
-                <a:spcPts val="800"/>
-              </a:spcAft>
-              <a:buSzPct val="100000"/>
-              <a:buChar char="•"/>
-            </a:pPr>
-            <a:r>
-              <a:rPr lang="en-US" sz="1250" dirty="0">
+              <a:buNone/>
+            </a:pPr>
+            <a:r>
+              <a:rPr lang="en-US" sz="1350" b="1" dirty="0">
+                <a:solidFill>
+                  <a:srgbClr val="1B1C1E"/>
+                </a:solidFill>
+                <a:latin typeface="맑은 고딕" pitchFamily="34" charset="0"/>
+                <a:ea typeface="맑은 고딕" pitchFamily="34" charset="-122"/>
+                <a:cs typeface="맑은 고딕" pitchFamily="34" charset="-120"/>
+              </a:rPr>
+              <a:t>매일 자동 갱신 · 무료 운영  </a:t>
+            </a:r>
+            <a:pPr indent="0" marL="0">
+              <a:lnSpc>
+                <a:spcPct val="110000"/>
+              </a:lnSpc>
+              <a:buNone/>
+            </a:pPr>
+            <a:r>
+              <a:rPr lang="en-US" sz="1350" dirty="0">
                 <a:solidFill>
                   <a:srgbClr val="6A6F76"/>
                 </a:solidFill>
@@ -2438,138 +2946,31 @@
                 <a:ea typeface="맑은 고딕" pitchFamily="34" charset="-122"/>
                 <a:cs typeface="맑은 고딕" pitchFamily="34" charset="-120"/>
               </a:rPr>
-              <a:t>공공 데이터 기반 맞춤 행정 지원</a:t>
-            </a:r>
-            <a:endParaRPr lang="en-US" sz="1250" dirty="0"/>
-          </a:p>
-        </p:txBody>
-      </p:sp>
-      <p:sp>
-        <p:nvSpPr>
-          <p:cNvPr id="8" name="Shape 6"/>
-          <p:cNvSpPr/>
-          <p:nvPr/>
-        </p:nvSpPr>
-        <p:spPr>
-          <a:xfrm>
-            <a:off x="4306824" y="1554480"/>
-            <a:ext cx="3584448" cy="4206240"/>
-          </a:xfrm>
-          <a:prstGeom prst="roundRect">
-            <a:avLst>
-              <a:gd name="adj" fmla="val 3061"/>
-            </a:avLst>
+              <a:t>GitHub Actions로 매일 새벽 수집 + 임베딩을 자동 실행</a:t>
+            </a:r>
+            <a:endParaRPr lang="en-US" sz="1350" dirty="0"/>
+          </a:p>
+        </p:txBody>
+      </p:sp>
+      <p:sp>
+        <p:nvSpPr>
+          <p:cNvPr id="11" name="Shape 9"/>
+          <p:cNvSpPr/>
+          <p:nvPr/>
+        </p:nvSpPr>
+        <p:spPr>
+          <a:xfrm>
+            <a:off x="4846320" y="5074920"/>
+            <a:ext cx="164592" cy="164592"/>
+          </a:xfrm>
+          <a:prstGeom prst="ellipse">
+            <a:avLst/>
           </a:prstGeom>
           <a:solidFill>
-            <a:srgbClr val="FFFFFF"/>
+            <a:srgbClr val="18A058"/>
           </a:solidFill>
-          <a:ln w="12700">
-            <a:solidFill>
-              <a:srgbClr val="DCE4DC"/>
-            </a:solidFill>
-            <a:prstDash val="solid"/>
-          </a:ln>
-        </p:spPr>
-      </p:sp>
-      <p:sp>
-        <p:nvSpPr>
-          <p:cNvPr id="9" name="Shape 7"/>
-          <p:cNvSpPr/>
-          <p:nvPr/>
-        </p:nvSpPr>
-        <p:spPr>
-          <a:xfrm>
-            <a:off x="4306824" y="1554480"/>
-            <a:ext cx="3584448" cy="822960"/>
-          </a:xfrm>
-          <a:prstGeom prst="roundRect">
-            <a:avLst>
-              <a:gd name="adj" fmla="val 13333"/>
-            </a:avLst>
-          </a:prstGeom>
-          <a:solidFill>
-            <a:srgbClr val="0F6B3A"/>
-          </a:solidFill>
-          <a:ln/>
-        </p:spPr>
-      </p:sp>
-      <p:sp>
-        <p:nvSpPr>
-          <p:cNvPr id="10" name="Text 8"/>
-          <p:cNvSpPr/>
-          <p:nvPr/>
-        </p:nvSpPr>
-        <p:spPr>
-          <a:xfrm>
-            <a:off x="4581144" y="1554480"/>
-            <a:ext cx="3017520" cy="822960"/>
-          </a:xfrm>
-          <a:prstGeom prst="rect">
-            <a:avLst/>
-          </a:prstGeom>
-          <a:noFill/>
-          <a:ln/>
-        </p:spPr>
-        <p:txBody>
-          <a:bodyPr wrap="square" rtlCol="0" anchor="ctr"/>
-          <a:lstStyle/>
-          <a:p>
-            <a:pPr indent="0" marL="0">
-              <a:buNone/>
-            </a:pPr>
-            <a:r>
-              <a:rPr lang="en-US" sz="2200" b="1" dirty="0">
-                <a:solidFill>
-                  <a:srgbClr val="FFFFFF"/>
-                </a:solidFill>
-                <a:latin typeface="맑은 고딕" pitchFamily="34" charset="0"/>
-                <a:ea typeface="맑은 고딕" pitchFamily="34" charset="-122"/>
-                <a:cs typeface="맑은 고딕" pitchFamily="34" charset="-120"/>
-              </a:rPr>
-              <a:t>B2B</a:t>
-            </a:r>
-            <a:endParaRPr lang="en-US" sz="2200" dirty="0"/>
-          </a:p>
-        </p:txBody>
-      </p:sp>
-      <p:sp>
-        <p:nvSpPr>
-          <p:cNvPr id="11" name="Text 9"/>
-          <p:cNvSpPr/>
-          <p:nvPr/>
-        </p:nvSpPr>
-        <p:spPr>
-          <a:xfrm>
-            <a:off x="4581144" y="2560320"/>
-            <a:ext cx="3108960" cy="457200"/>
-          </a:xfrm>
-          <a:prstGeom prst="rect">
-            <a:avLst/>
-          </a:prstGeom>
-          <a:noFill/>
-          <a:ln/>
-        </p:spPr>
-        <p:txBody>
-          <a:bodyPr wrap="square" rtlCol="0" anchor="ctr"/>
-          <a:lstStyle/>
-          <a:p>
-            <a:pPr indent="0" marL="0">
-              <a:buNone/>
-            </a:pPr>
-            <a:r>
-              <a:rPr lang="en-US" sz="1500" b="1" dirty="0">
-                <a:solidFill>
-                  <a:srgbClr val="0F6B3A"/>
-                </a:solidFill>
-                <a:latin typeface="맑은 고딕" pitchFamily="34" charset="0"/>
-                <a:ea typeface="맑은 고딕" pitchFamily="34" charset="-122"/>
-                <a:cs typeface="맑은 고딕" pitchFamily="34" charset="-120"/>
-              </a:rPr>
-              <a:t>기업 EAP 패키지</a:t>
-            </a:r>
-            <a:endParaRPr lang="en-US" sz="1500" dirty="0"/>
-          </a:p>
-        </p:txBody>
+          <a:ln/>
+        </p:spPr>
       </p:sp>
       <p:sp>
         <p:nvSpPr>
@@ -2579,31 +2980,44 @@
         </p:nvSpPr>
         <p:spPr>
           <a:xfrm>
-            <a:off x="4581144" y="3108960"/>
-            <a:ext cx="3108960" cy="2468880"/>
-          </a:xfrm>
-          <a:prstGeom prst="rect">
-            <a:avLst/>
-          </a:prstGeom>
-          <a:noFill/>
-          <a:ln/>
-        </p:spPr>
-        <p:txBody>
-          <a:bodyPr wrap="square" rtlCol="0" anchor="ctr"/>
-          <a:lstStyle/>
-          <a:p>
-            <a:pPr marL="177800" indent="-177800">
+            <a:off x="5166360" y="5029200"/>
+            <a:ext cx="6492240" cy="731520"/>
+          </a:xfrm>
+          <a:prstGeom prst="rect">
+            <a:avLst/>
+          </a:prstGeom>
+          <a:noFill/>
+          <a:ln/>
+        </p:spPr>
+        <p:txBody>
+          <a:bodyPr wrap="square" rtlCol="0" anchor="ctr"/>
+          <a:lstStyle/>
+          <a:p>
+            <a:pPr indent="0" marL="0">
               <a:lnSpc>
-                <a:spcPct val="130000"/>
+                <a:spcPct val="110000"/>
               </a:lnSpc>
-              <a:spcAft>
-                <a:spcPts val="800"/>
-              </a:spcAft>
-              <a:buSzPct val="100000"/>
-              <a:buChar char="•"/>
-            </a:pPr>
-            <a:r>
-              <a:rPr lang="en-US" sz="1250" dirty="0">
+              <a:buNone/>
+            </a:pPr>
+            <a:r>
+              <a:rPr lang="en-US" sz="1350" b="1" dirty="0">
+                <a:solidFill>
+                  <a:srgbClr val="1B1C1E"/>
+                </a:solidFill>
+                <a:latin typeface="맑은 고딕" pitchFamily="34" charset="0"/>
+                <a:ea typeface="맑은 고딕" pitchFamily="34" charset="-122"/>
+                <a:cs typeface="맑은 고딕" pitchFamily="34" charset="-120"/>
+              </a:rPr>
+              <a:t>로그인 없는 다중 사용자  </a:t>
+            </a:r>
+            <a:pPr indent="0" marL="0">
+              <a:lnSpc>
+                <a:spcPct val="110000"/>
+              </a:lnSpc>
+              <a:buNone/>
+            </a:pPr>
+            <a:r>
+              <a:rPr lang="en-US" sz="1350" dirty="0">
                 <a:solidFill>
                   <a:srgbClr val="6A6F76"/>
                 </a:solidFill>
@@ -2611,284 +3025,15 @@
                 <a:ea typeface="맑은 고딕" pitchFamily="34" charset="-122"/>
                 <a:cs typeface="맑은 고딕" pitchFamily="34" charset="-120"/>
               </a:rPr>
-              <a:t>주거·돌봄·교육 복지 원스톱 매칭</a:t>
-            </a:r>
-            <a:endParaRPr lang="en-US" sz="1250" dirty="0"/>
-          </a:p>
-          <a:p>
-            <a:pPr marL="177800" indent="-177800">
-              <a:lnSpc>
-                <a:spcPct val="130000"/>
-              </a:lnSpc>
-              <a:spcAft>
-                <a:spcPts val="800"/>
-              </a:spcAft>
-              <a:buSzPct val="100000"/>
-              <a:buChar char="•"/>
-            </a:pPr>
-            <a:r>
-              <a:rPr lang="en-US" sz="1250" dirty="0">
-                <a:solidFill>
-                  <a:srgbClr val="6A6F76"/>
-                </a:solidFill>
-                <a:latin typeface="맑은 고딕" pitchFamily="34" charset="0"/>
-                <a:ea typeface="맑은 고딕" pitchFamily="34" charset="-122"/>
-                <a:cs typeface="맑은 고딕" pitchFamily="34" charset="-120"/>
-              </a:rPr>
-              <a:t>실시간 혜택 확인 및 신청 연동</a:t>
-            </a:r>
-            <a:endParaRPr lang="en-US" sz="1250" dirty="0"/>
-          </a:p>
-          <a:p>
-            <a:pPr marL="177800" indent="-177800">
-              <a:lnSpc>
-                <a:spcPct val="130000"/>
-              </a:lnSpc>
-              <a:spcAft>
-                <a:spcPts val="800"/>
-              </a:spcAft>
-              <a:buSzPct val="100000"/>
-              <a:buChar char="•"/>
-            </a:pPr>
-            <a:r>
-              <a:rPr lang="en-US" sz="1250" dirty="0">
-                <a:solidFill>
-                  <a:srgbClr val="6A6F76"/>
-                </a:solidFill>
-                <a:latin typeface="맑은 고딕" pitchFamily="34" charset="0"/>
-                <a:ea typeface="맑은 고딕" pitchFamily="34" charset="-122"/>
-                <a:cs typeface="맑은 고딕" pitchFamily="34" charset="-120"/>
-              </a:rPr>
-              <a:t>기업별 맞춤 임직원 복지 큐레이션</a:t>
-            </a:r>
-            <a:endParaRPr lang="en-US" sz="1250" dirty="0"/>
-          </a:p>
-        </p:txBody>
-      </p:sp>
-      <p:sp>
-        <p:nvSpPr>
-          <p:cNvPr id="13" name="Shape 11"/>
-          <p:cNvSpPr/>
-          <p:nvPr/>
-        </p:nvSpPr>
-        <p:spPr>
-          <a:xfrm>
-            <a:off x="8110728" y="1554480"/>
-            <a:ext cx="3584448" cy="4206240"/>
-          </a:xfrm>
-          <a:prstGeom prst="roundRect">
-            <a:avLst>
-              <a:gd name="adj" fmla="val 3061"/>
-            </a:avLst>
-          </a:prstGeom>
-          <a:solidFill>
-            <a:srgbClr val="FFFFFF"/>
-          </a:solidFill>
-          <a:ln w="12700">
-            <a:solidFill>
-              <a:srgbClr val="DCE4DC"/>
-            </a:solidFill>
-            <a:prstDash val="solid"/>
-          </a:ln>
-        </p:spPr>
-      </p:sp>
-      <p:sp>
-        <p:nvSpPr>
-          <p:cNvPr id="14" name="Shape 12"/>
-          <p:cNvSpPr/>
-          <p:nvPr/>
-        </p:nvSpPr>
-        <p:spPr>
-          <a:xfrm>
-            <a:off x="8110728" y="1554480"/>
-            <a:ext cx="3584448" cy="822960"/>
-          </a:xfrm>
-          <a:prstGeom prst="roundRect">
-            <a:avLst>
-              <a:gd name="adj" fmla="val 13333"/>
-            </a:avLst>
-          </a:prstGeom>
-          <a:solidFill>
-            <a:srgbClr val="0F6B3A"/>
-          </a:solidFill>
-          <a:ln/>
-        </p:spPr>
-      </p:sp>
-      <p:sp>
-        <p:nvSpPr>
-          <p:cNvPr id="15" name="Text 13"/>
-          <p:cNvSpPr/>
-          <p:nvPr/>
-        </p:nvSpPr>
-        <p:spPr>
-          <a:xfrm>
-            <a:off x="8385048" y="1554480"/>
-            <a:ext cx="3017520" cy="822960"/>
-          </a:xfrm>
-          <a:prstGeom prst="rect">
-            <a:avLst/>
-          </a:prstGeom>
-          <a:noFill/>
-          <a:ln/>
-        </p:spPr>
-        <p:txBody>
-          <a:bodyPr wrap="square" rtlCol="0" anchor="ctr"/>
-          <a:lstStyle/>
-          <a:p>
-            <a:pPr indent="0" marL="0">
-              <a:buNone/>
-            </a:pPr>
-            <a:r>
-              <a:rPr lang="en-US" sz="2200" b="1" dirty="0">
-                <a:solidFill>
-                  <a:srgbClr val="FFFFFF"/>
-                </a:solidFill>
-                <a:latin typeface="맑은 고딕" pitchFamily="34" charset="0"/>
-                <a:ea typeface="맑은 고딕" pitchFamily="34" charset="-122"/>
-                <a:cs typeface="맑은 고딕" pitchFamily="34" charset="-120"/>
-              </a:rPr>
-              <a:t>B2C</a:t>
-            </a:r>
-            <a:endParaRPr lang="en-US" sz="2200" dirty="0"/>
-          </a:p>
-        </p:txBody>
-      </p:sp>
-      <p:sp>
-        <p:nvSpPr>
-          <p:cNvPr id="16" name="Text 14"/>
-          <p:cNvSpPr/>
-          <p:nvPr/>
-        </p:nvSpPr>
-        <p:spPr>
-          <a:xfrm>
-            <a:off x="8385048" y="2560320"/>
-            <a:ext cx="3108960" cy="457200"/>
-          </a:xfrm>
-          <a:prstGeom prst="rect">
-            <a:avLst/>
-          </a:prstGeom>
-          <a:noFill/>
-          <a:ln/>
-        </p:spPr>
-        <p:txBody>
-          <a:bodyPr wrap="square" rtlCol="0" anchor="ctr"/>
-          <a:lstStyle/>
-          <a:p>
-            <a:pPr indent="0" marL="0">
-              <a:buNone/>
-            </a:pPr>
-            <a:r>
-              <a:rPr lang="en-US" sz="1500" b="1" dirty="0">
-                <a:solidFill>
-                  <a:srgbClr val="0F6B3A"/>
-                </a:solidFill>
-                <a:latin typeface="맑은 고딕" pitchFamily="34" charset="0"/>
-                <a:ea typeface="맑은 고딕" pitchFamily="34" charset="-122"/>
-                <a:cs typeface="맑은 고딕" pitchFamily="34" charset="-120"/>
-              </a:rPr>
-              <a:t>프리미엄 부가 서비스</a:t>
-            </a:r>
-            <a:endParaRPr lang="en-US" sz="1500" dirty="0"/>
-          </a:p>
-        </p:txBody>
-      </p:sp>
-      <p:sp>
-        <p:nvSpPr>
-          <p:cNvPr id="17" name="Text 15"/>
-          <p:cNvSpPr/>
-          <p:nvPr/>
-        </p:nvSpPr>
-        <p:spPr>
-          <a:xfrm>
-            <a:off x="8385048" y="3108960"/>
-            <a:ext cx="3108960" cy="2468880"/>
-          </a:xfrm>
-          <a:prstGeom prst="rect">
-            <a:avLst/>
-          </a:prstGeom>
-          <a:noFill/>
-          <a:ln/>
-        </p:spPr>
-        <p:txBody>
-          <a:bodyPr wrap="square" rtlCol="0" anchor="ctr"/>
-          <a:lstStyle/>
-          <a:p>
-            <a:pPr marL="177800" indent="-177800">
-              <a:lnSpc>
-                <a:spcPct val="130000"/>
-              </a:lnSpc>
-              <a:spcAft>
-                <a:spcPts val="800"/>
-              </a:spcAft>
-              <a:buSzPct val="100000"/>
-              <a:buChar char="•"/>
-            </a:pPr>
-            <a:r>
-              <a:rPr lang="en-US" sz="1250" dirty="0">
-                <a:solidFill>
-                  <a:srgbClr val="6A6F76"/>
-                </a:solidFill>
-                <a:latin typeface="맑은 고딕" pitchFamily="34" charset="0"/>
-                <a:ea typeface="맑은 고딕" pitchFamily="34" charset="-122"/>
-                <a:cs typeface="맑은 고딕" pitchFamily="34" charset="-120"/>
-              </a:rPr>
-              <a:t>증빙 서류 원클릭 준비 대행</a:t>
-            </a:r>
-            <a:endParaRPr lang="en-US" sz="1250" dirty="0"/>
-          </a:p>
-          <a:p>
-            <a:pPr marL="177800" indent="-177800">
-              <a:lnSpc>
-                <a:spcPct val="130000"/>
-              </a:lnSpc>
-              <a:spcAft>
-                <a:spcPts val="800"/>
-              </a:spcAft>
-              <a:buSzPct val="100000"/>
-              <a:buChar char="•"/>
-            </a:pPr>
-            <a:r>
-              <a:rPr lang="en-US" sz="1250" dirty="0">
-                <a:solidFill>
-                  <a:srgbClr val="6A6F76"/>
-                </a:solidFill>
-                <a:latin typeface="맑은 고딕" pitchFamily="34" charset="0"/>
-                <a:ea typeface="맑은 고딕" pitchFamily="34" charset="-122"/>
-                <a:cs typeface="맑은 고딕" pitchFamily="34" charset="-120"/>
-              </a:rPr>
-              <a:t>전문 사회복지사 1:1 상담 매칭</a:t>
-            </a:r>
-            <a:endParaRPr lang="en-US" sz="1250" dirty="0"/>
-          </a:p>
-          <a:p>
-            <a:pPr marL="177800" indent="-177800">
-              <a:lnSpc>
-                <a:spcPct val="130000"/>
-              </a:lnSpc>
-              <a:spcAft>
-                <a:spcPts val="800"/>
-              </a:spcAft>
-              <a:buSzPct val="100000"/>
-              <a:buChar char="•"/>
-            </a:pPr>
-            <a:r>
-              <a:rPr lang="en-US" sz="1250" dirty="0">
-                <a:solidFill>
-                  <a:srgbClr val="6A6F76"/>
-                </a:solidFill>
-                <a:latin typeface="맑은 고딕" pitchFamily="34" charset="0"/>
-                <a:ea typeface="맑은 고딕" pitchFamily="34" charset="-122"/>
-                <a:cs typeface="맑은 고딕" pitchFamily="34" charset="-120"/>
-              </a:rPr>
-              <a:t>마이데이터 기반 자격 자동 파싱</a:t>
-            </a:r>
-            <a:endParaRPr lang="en-US" sz="1250" dirty="0"/>
-          </a:p>
-        </p:txBody>
-      </p:sp>
-      <p:sp>
-        <p:nvSpPr>
-          <p:cNvPr id="18" name="Text 16"/>
+              <a:t>기기별 계정으로 여러 사용자가 동시에 각자 데이터 사용(Supabase)</a:t>
+            </a:r>
+            <a:endParaRPr lang="en-US" sz="1350" dirty="0"/>
+          </a:p>
+        </p:txBody>
+      </p:sp>
+      <p:sp>
+        <p:nvSpPr>
+          <p:cNvPr id="13" name="Text 11"/>
           <p:cNvSpPr/>
           <p:nvPr/>
         </p:nvSpPr>
@@ -2907,7 +3052,7 @@
           <a:bodyPr wrap="square" rtlCol="0" anchor="ctr"/>
           <a:lstStyle/>
           <a:p>
-            <a:pPr algn="l" indent="0" marL="0">
+            <a:pPr indent="0" marL="0">
               <a:buNone/>
             </a:pPr>
             <a:r>
@@ -2919,7 +3064,7 @@
                 <a:ea typeface="맑은 고딕" pitchFamily="34" charset="-122"/>
                 <a:cs typeface="맑은 고딕" pitchFamily="34" charset="-120"/>
               </a:rPr>
-              <a:t>10 / 12 · 비즈니스 모델 및 수익화</a:t>
+              <a:t>10 / 14 · 기술 경쟁력 및 고도화</a:t>
             </a:r>
             <a:endParaRPr lang="en-US" sz="900" dirty="0"/>
           </a:p>
@@ -2927,7 +3072,7 @@
       </p:sp>
       <p:sp>
         <p:nvSpPr>
-          <p:cNvPr id="19" name="Text 17"/>
+          <p:cNvPr id="14" name="Text 12"/>
           <p:cNvSpPr/>
           <p:nvPr/>
         </p:nvSpPr>
@@ -3005,7 +3150,7 @@
         <p:spPr>
           <a:xfrm>
             <a:off x="502920" y="457200"/>
-            <a:ext cx="10972800" cy="640080"/>
+            <a:ext cx="11155680" cy="640080"/>
           </a:xfrm>
           <a:prstGeom prst="rect">
             <a:avLst/>
@@ -3029,7 +3174,7 @@
                 <a:ea typeface="맑은 고딕" pitchFamily="34" charset="-122"/>
                 <a:cs typeface="맑은 고딕" pitchFamily="34" charset="-120"/>
               </a:rPr>
-              <a:t>정보 소외 없는 전방위 유저 획득 및 마케팅</a:t>
+              <a:t>지속 가능한 복지 생태계를 위한 수익화 모델</a:t>
             </a:r>
             <a:endParaRPr lang="en-US" sz="3000" dirty="0"/>
           </a:p>
@@ -3044,11 +3189,11 @@
         <p:spPr>
           <a:xfrm>
             <a:off x="502920" y="1554480"/>
-            <a:ext cx="5532120" cy="3108960"/>
+            <a:ext cx="3584448" cy="4206240"/>
           </a:xfrm>
           <a:prstGeom prst="roundRect">
             <a:avLst>
-              <a:gd name="adj" fmla="val 3529"/>
+              <a:gd name="adj" fmla="val 3061"/>
             </a:avLst>
           </a:prstGeom>
           <a:solidFill>
@@ -3064,42 +3209,25 @@
       </p:sp>
       <p:sp>
         <p:nvSpPr>
-          <p:cNvPr id="4" name="Text 2"/>
-          <p:cNvSpPr/>
-          <p:nvPr/>
-        </p:nvSpPr>
-        <p:spPr>
-          <a:xfrm>
-            <a:off x="822960" y="1783080"/>
-            <a:ext cx="4937760" cy="365760"/>
-          </a:xfrm>
-          <a:prstGeom prst="rect">
-            <a:avLst/>
-          </a:prstGeom>
-          <a:noFill/>
-          <a:ln/>
-        </p:spPr>
-        <p:txBody>
-          <a:bodyPr wrap="square" rtlCol="0" anchor="ctr"/>
-          <a:lstStyle/>
-          <a:p>
-            <a:pPr indent="0" marL="0">
-              <a:buNone/>
-            </a:pPr>
-            <a:r>
-              <a:rPr lang="en-US" sz="1300" b="1" dirty="0">
-                <a:solidFill>
-                  <a:srgbClr val="18A058"/>
-                </a:solidFill>
-                <a:latin typeface="맑은 고딕" pitchFamily="34" charset="0"/>
-                <a:ea typeface="맑은 고딕" pitchFamily="34" charset="-122"/>
-                <a:cs typeface="맑은 고딕" pitchFamily="34" charset="-120"/>
-              </a:rPr>
-              <a:t>오프라인 연계</a:t>
-            </a:r>
-            <a:endParaRPr lang="en-US" sz="1300" dirty="0"/>
-          </a:p>
-        </p:txBody>
+          <p:cNvPr id="4" name="Shape 2"/>
+          <p:cNvSpPr/>
+          <p:nvPr/>
+        </p:nvSpPr>
+        <p:spPr>
+          <a:xfrm>
+            <a:off x="502920" y="1554480"/>
+            <a:ext cx="3584448" cy="822960"/>
+          </a:xfrm>
+          <a:prstGeom prst="roundRect">
+            <a:avLst>
+              <a:gd name="adj" fmla="val 13333"/>
+            </a:avLst>
+          </a:prstGeom>
+          <a:solidFill>
+            <a:srgbClr val="0F6B3A"/>
+          </a:solidFill>
+          <a:ln/>
+        </p:spPr>
       </p:sp>
       <p:sp>
         <p:nvSpPr>
@@ -3109,34 +3237,34 @@
         </p:nvSpPr>
         <p:spPr>
           <a:xfrm>
-            <a:off x="822960" y="2148840"/>
-            <a:ext cx="4937760" cy="457200"/>
-          </a:xfrm>
-          <a:prstGeom prst="rect">
-            <a:avLst/>
-          </a:prstGeom>
-          <a:noFill/>
-          <a:ln/>
-        </p:spPr>
-        <p:txBody>
-          <a:bodyPr wrap="square" rtlCol="0" anchor="ctr"/>
-          <a:lstStyle/>
-          <a:p>
-            <a:pPr indent="0" marL="0">
-              <a:buNone/>
-            </a:pPr>
-            <a:r>
-              <a:rPr lang="en-US" sz="1700" b="1" dirty="0">
-                <a:solidFill>
-                  <a:srgbClr val="1B1C1E"/>
-                </a:solidFill>
-                <a:latin typeface="맑은 고딕" pitchFamily="34" charset="0"/>
-                <a:ea typeface="맑은 고딕" pitchFamily="34" charset="-122"/>
-                <a:cs typeface="맑은 고딕" pitchFamily="34" charset="-120"/>
-              </a:rPr>
-              <a:t>신뢰 기반 오프라인 기관 연계</a:t>
-            </a:r>
-            <a:endParaRPr lang="en-US" sz="1700" dirty="0"/>
+            <a:off x="777240" y="1554480"/>
+            <a:ext cx="3017520" cy="822960"/>
+          </a:xfrm>
+          <a:prstGeom prst="rect">
+            <a:avLst/>
+          </a:prstGeom>
+          <a:noFill/>
+          <a:ln/>
+        </p:spPr>
+        <p:txBody>
+          <a:bodyPr wrap="square" rtlCol="0" anchor="ctr"/>
+          <a:lstStyle/>
+          <a:p>
+            <a:pPr indent="0" marL="0">
+              <a:buNone/>
+            </a:pPr>
+            <a:r>
+              <a:rPr lang="en-US" sz="2200" b="1" dirty="0">
+                <a:solidFill>
+                  <a:srgbClr val="FFFFFF"/>
+                </a:solidFill>
+                <a:latin typeface="맑은 고딕" pitchFamily="34" charset="0"/>
+                <a:ea typeface="맑은 고딕" pitchFamily="34" charset="-122"/>
+                <a:cs typeface="맑은 고딕" pitchFamily="34" charset="-120"/>
+              </a:rPr>
+              <a:t>B2G</a:t>
+            </a:r>
+            <a:endParaRPr lang="en-US" sz="2200" dirty="0"/>
           </a:p>
         </p:txBody>
       </p:sp>
@@ -3148,8 +3276,47 @@
         </p:nvSpPr>
         <p:spPr>
           <a:xfrm>
-            <a:off x="822960" y="2697480"/>
-            <a:ext cx="4937760" cy="1828800"/>
+            <a:off x="777240" y="2560320"/>
+            <a:ext cx="3108960" cy="457200"/>
+          </a:xfrm>
+          <a:prstGeom prst="rect">
+            <a:avLst/>
+          </a:prstGeom>
+          <a:noFill/>
+          <a:ln/>
+        </p:spPr>
+        <p:txBody>
+          <a:bodyPr wrap="square" rtlCol="0" anchor="ctr"/>
+          <a:lstStyle/>
+          <a:p>
+            <a:pPr indent="0" marL="0">
+              <a:buNone/>
+            </a:pPr>
+            <a:r>
+              <a:rPr lang="en-US" sz="1500" b="1" dirty="0">
+                <a:solidFill>
+                  <a:srgbClr val="0F6B3A"/>
+                </a:solidFill>
+                <a:latin typeface="맑은 고딕" pitchFamily="34" charset="0"/>
+                <a:ea typeface="맑은 고딕" pitchFamily="34" charset="-122"/>
+                <a:cs typeface="맑은 고딕" pitchFamily="34" charset="-120"/>
+              </a:rPr>
+              <a:t>지자체 협업 모델</a:t>
+            </a:r>
+            <a:endParaRPr lang="en-US" sz="1500" dirty="0"/>
+          </a:p>
+        </p:txBody>
+      </p:sp>
+      <p:sp>
+        <p:nvSpPr>
+          <p:cNvPr id="7" name="Text 5"/>
+          <p:cNvSpPr/>
+          <p:nvPr/>
+        </p:nvSpPr>
+        <p:spPr>
+          <a:xfrm>
+            <a:off x="777240" y="3108960"/>
+            <a:ext cx="3108960" cy="2468880"/>
           </a:xfrm>
           <a:prstGeom prst="rect">
             <a:avLst/>
@@ -3163,16 +3330,16 @@
           <a:p>
             <a:pPr marL="177800" indent="-177800">
               <a:lnSpc>
-                <a:spcPct val="125000"/>
+                <a:spcPct val="130000"/>
               </a:lnSpc>
               <a:spcAft>
-                <a:spcPts val="700"/>
+                <a:spcPts val="800"/>
               </a:spcAft>
               <a:buSzPct val="100000"/>
               <a:buChar char="•"/>
             </a:pPr>
             <a:r>
-              <a:rPr lang="en-US" sz="1300" dirty="0">
+              <a:rPr lang="en-US" sz="1250" dirty="0">
                 <a:solidFill>
                   <a:srgbClr val="6A6F76"/>
                 </a:solidFill>
@@ -3180,23 +3347,23 @@
                 <a:ea typeface="맑은 고딕" pitchFamily="34" charset="-122"/>
                 <a:cs typeface="맑은 고딕" pitchFamily="34" charset="-120"/>
               </a:rPr>
-              <a:t>전국 복지관·시·구청·주민센터 QR 리플렛 비치</a:t>
-            </a:r>
-            <a:endParaRPr lang="en-US" sz="1300" dirty="0"/>
+              <a:t>행정 효율화 및 자동 안내 발송</a:t>
+            </a:r>
+            <a:endParaRPr lang="en-US" sz="1250" dirty="0"/>
           </a:p>
           <a:p>
             <a:pPr marL="177800" indent="-177800">
               <a:lnSpc>
-                <a:spcPct val="125000"/>
+                <a:spcPct val="130000"/>
               </a:lnSpc>
               <a:spcAft>
-                <a:spcPts val="700"/>
+                <a:spcPts val="800"/>
               </a:spcAft>
               <a:buSzPct val="100000"/>
               <a:buChar char="•"/>
             </a:pPr>
             <a:r>
-              <a:rPr lang="en-US" sz="1300" dirty="0">
+              <a:rPr lang="en-US" sz="1250" dirty="0">
                 <a:solidFill>
                   <a:srgbClr val="6A6F76"/>
                 </a:solidFill>
@@ -3204,23 +3371,23 @@
                 <a:ea typeface="맑은 고딕" pitchFamily="34" charset="-122"/>
                 <a:cs typeface="맑은 고딕" pitchFamily="34" charset="-120"/>
               </a:rPr>
-              <a:t>일선 복지사 대상 전용 상담 도구 무상 지원</a:t>
-            </a:r>
-            <a:endParaRPr lang="en-US" sz="1300" dirty="0"/>
+              <a:t>API 연동료 기반 구독 매출</a:t>
+            </a:r>
+            <a:endParaRPr lang="en-US" sz="1250" dirty="0"/>
           </a:p>
           <a:p>
             <a:pPr marL="177800" indent="-177800">
               <a:lnSpc>
-                <a:spcPct val="125000"/>
+                <a:spcPct val="130000"/>
               </a:lnSpc>
               <a:spcAft>
-                <a:spcPts val="700"/>
+                <a:spcPts val="800"/>
               </a:spcAft>
               <a:buSzPct val="100000"/>
               <a:buChar char="•"/>
             </a:pPr>
             <a:r>
-              <a:rPr lang="en-US" sz="1300" dirty="0">
+              <a:rPr lang="en-US" sz="1250" dirty="0">
                 <a:solidFill>
                   <a:srgbClr val="6A6F76"/>
                 </a:solidFill>
@@ -3228,26 +3395,26 @@
                 <a:ea typeface="맑은 고딕" pitchFamily="34" charset="-122"/>
                 <a:cs typeface="맑은 고딕" pitchFamily="34" charset="-120"/>
               </a:rPr>
-              <a:t>취약계층 밀착형 신뢰 네트워크 구축</a:t>
-            </a:r>
-            <a:endParaRPr lang="en-US" sz="1300" dirty="0"/>
-          </a:p>
-        </p:txBody>
-      </p:sp>
-      <p:sp>
-        <p:nvSpPr>
-          <p:cNvPr id="7" name="Shape 5"/>
-          <p:cNvSpPr/>
-          <p:nvPr/>
-        </p:nvSpPr>
-        <p:spPr>
-          <a:xfrm>
-            <a:off x="6245352" y="1554480"/>
-            <a:ext cx="5532120" cy="3108960"/>
+              <a:t>공공 데이터 기반 맞춤 행정 지원</a:t>
+            </a:r>
+            <a:endParaRPr lang="en-US" sz="1250" dirty="0"/>
+          </a:p>
+        </p:txBody>
+      </p:sp>
+      <p:sp>
+        <p:nvSpPr>
+          <p:cNvPr id="8" name="Shape 6"/>
+          <p:cNvSpPr/>
+          <p:nvPr/>
+        </p:nvSpPr>
+        <p:spPr>
+          <a:xfrm>
+            <a:off x="4306824" y="1554480"/>
+            <a:ext cx="3584448" cy="4206240"/>
           </a:xfrm>
           <a:prstGeom prst="roundRect">
             <a:avLst>
-              <a:gd name="adj" fmla="val 3529"/>
+              <a:gd name="adj" fmla="val 3061"/>
             </a:avLst>
           </a:prstGeom>
           <a:solidFill>
@@ -3263,81 +3430,25 @@
       </p:sp>
       <p:sp>
         <p:nvSpPr>
-          <p:cNvPr id="8" name="Text 6"/>
-          <p:cNvSpPr/>
-          <p:nvPr/>
-        </p:nvSpPr>
-        <p:spPr>
-          <a:xfrm>
-            <a:off x="6565392" y="1783080"/>
-            <a:ext cx="4937760" cy="365760"/>
-          </a:xfrm>
-          <a:prstGeom prst="rect">
-            <a:avLst/>
-          </a:prstGeom>
-          <a:noFill/>
-          <a:ln/>
-        </p:spPr>
-        <p:txBody>
-          <a:bodyPr wrap="square" rtlCol="0" anchor="ctr"/>
-          <a:lstStyle/>
-          <a:p>
-            <a:pPr indent="0" marL="0">
-              <a:buNone/>
-            </a:pPr>
-            <a:r>
-              <a:rPr lang="en-US" sz="1300" b="1" dirty="0">
-                <a:solidFill>
-                  <a:srgbClr val="18A058"/>
-                </a:solidFill>
-                <a:latin typeface="맑은 고딕" pitchFamily="34" charset="0"/>
-                <a:ea typeface="맑은 고딕" pitchFamily="34" charset="-122"/>
-                <a:cs typeface="맑은 고딕" pitchFamily="34" charset="-120"/>
-              </a:rPr>
-              <a:t>온라인 SEO</a:t>
-            </a:r>
-            <a:endParaRPr lang="en-US" sz="1300" dirty="0"/>
-          </a:p>
-        </p:txBody>
-      </p:sp>
-      <p:sp>
-        <p:nvSpPr>
-          <p:cNvPr id="9" name="Text 7"/>
-          <p:cNvSpPr/>
-          <p:nvPr/>
-        </p:nvSpPr>
-        <p:spPr>
-          <a:xfrm>
-            <a:off x="6565392" y="2148840"/>
-            <a:ext cx="4937760" cy="457200"/>
-          </a:xfrm>
-          <a:prstGeom prst="rect">
-            <a:avLst/>
-          </a:prstGeom>
-          <a:noFill/>
-          <a:ln/>
-        </p:spPr>
-        <p:txBody>
-          <a:bodyPr wrap="square" rtlCol="0" anchor="ctr"/>
-          <a:lstStyle/>
-          <a:p>
-            <a:pPr indent="0" marL="0">
-              <a:buNone/>
-            </a:pPr>
-            <a:r>
-              <a:rPr lang="en-US" sz="1700" b="1" dirty="0">
-                <a:solidFill>
-                  <a:srgbClr val="1B1C1E"/>
-                </a:solidFill>
-                <a:latin typeface="맑은 고딕" pitchFamily="34" charset="0"/>
-                <a:ea typeface="맑은 고딕" pitchFamily="34" charset="-122"/>
-                <a:cs typeface="맑은 고딕" pitchFamily="34" charset="-120"/>
-              </a:rPr>
-              <a:t>RAG 기반 자연어 키워드 마케팅</a:t>
-            </a:r>
-            <a:endParaRPr lang="en-US" sz="1700" dirty="0"/>
-          </a:p>
-        </p:txBody>
+          <p:cNvPr id="9" name="Shape 7"/>
+          <p:cNvSpPr/>
+          <p:nvPr/>
+        </p:nvSpPr>
+        <p:spPr>
+          <a:xfrm>
+            <a:off x="4306824" y="1554480"/>
+            <a:ext cx="3584448" cy="822960"/>
+          </a:xfrm>
+          <a:prstGeom prst="roundRect">
+            <a:avLst>
+              <a:gd name="adj" fmla="val 13333"/>
+            </a:avLst>
+          </a:prstGeom>
+          <a:solidFill>
+            <a:srgbClr val="0F6B3A"/>
+          </a:solidFill>
+          <a:ln/>
+        </p:spPr>
       </p:sp>
       <p:sp>
         <p:nvSpPr>
@@ -3347,8 +3458,86 @@
         </p:nvSpPr>
         <p:spPr>
           <a:xfrm>
-            <a:off x="6565392" y="2697480"/>
-            <a:ext cx="4937760" cy="1828800"/>
+            <a:off x="4581144" y="1554480"/>
+            <a:ext cx="3017520" cy="822960"/>
+          </a:xfrm>
+          <a:prstGeom prst="rect">
+            <a:avLst/>
+          </a:prstGeom>
+          <a:noFill/>
+          <a:ln/>
+        </p:spPr>
+        <p:txBody>
+          <a:bodyPr wrap="square" rtlCol="0" anchor="ctr"/>
+          <a:lstStyle/>
+          <a:p>
+            <a:pPr indent="0" marL="0">
+              <a:buNone/>
+            </a:pPr>
+            <a:r>
+              <a:rPr lang="en-US" sz="2200" b="1" dirty="0">
+                <a:solidFill>
+                  <a:srgbClr val="FFFFFF"/>
+                </a:solidFill>
+                <a:latin typeface="맑은 고딕" pitchFamily="34" charset="0"/>
+                <a:ea typeface="맑은 고딕" pitchFamily="34" charset="-122"/>
+                <a:cs typeface="맑은 고딕" pitchFamily="34" charset="-120"/>
+              </a:rPr>
+              <a:t>B2B</a:t>
+            </a:r>
+            <a:endParaRPr lang="en-US" sz="2200" dirty="0"/>
+          </a:p>
+        </p:txBody>
+      </p:sp>
+      <p:sp>
+        <p:nvSpPr>
+          <p:cNvPr id="11" name="Text 9"/>
+          <p:cNvSpPr/>
+          <p:nvPr/>
+        </p:nvSpPr>
+        <p:spPr>
+          <a:xfrm>
+            <a:off x="4581144" y="2560320"/>
+            <a:ext cx="3108960" cy="457200"/>
+          </a:xfrm>
+          <a:prstGeom prst="rect">
+            <a:avLst/>
+          </a:prstGeom>
+          <a:noFill/>
+          <a:ln/>
+        </p:spPr>
+        <p:txBody>
+          <a:bodyPr wrap="square" rtlCol="0" anchor="ctr"/>
+          <a:lstStyle/>
+          <a:p>
+            <a:pPr indent="0" marL="0">
+              <a:buNone/>
+            </a:pPr>
+            <a:r>
+              <a:rPr lang="en-US" sz="1500" b="1" dirty="0">
+                <a:solidFill>
+                  <a:srgbClr val="0F6B3A"/>
+                </a:solidFill>
+                <a:latin typeface="맑은 고딕" pitchFamily="34" charset="0"/>
+                <a:ea typeface="맑은 고딕" pitchFamily="34" charset="-122"/>
+                <a:cs typeface="맑은 고딕" pitchFamily="34" charset="-120"/>
+              </a:rPr>
+              <a:t>기업 EAP 패키지</a:t>
+            </a:r>
+            <a:endParaRPr lang="en-US" sz="1500" dirty="0"/>
+          </a:p>
+        </p:txBody>
+      </p:sp>
+      <p:sp>
+        <p:nvSpPr>
+          <p:cNvPr id="12" name="Text 10"/>
+          <p:cNvSpPr/>
+          <p:nvPr/>
+        </p:nvSpPr>
+        <p:spPr>
+          <a:xfrm>
+            <a:off x="4581144" y="3108960"/>
+            <a:ext cx="3108960" cy="2468880"/>
           </a:xfrm>
           <a:prstGeom prst="rect">
             <a:avLst/>
@@ -3362,16 +3551,16 @@
           <a:p>
             <a:pPr marL="177800" indent="-177800">
               <a:lnSpc>
-                <a:spcPct val="125000"/>
+                <a:spcPct val="130000"/>
               </a:lnSpc>
               <a:spcAft>
-                <a:spcPts val="700"/>
+                <a:spcPts val="800"/>
               </a:spcAft>
               <a:buSzPct val="100000"/>
               <a:buChar char="•"/>
             </a:pPr>
             <a:r>
-              <a:rPr lang="en-US" sz="1300" dirty="0">
+              <a:rPr lang="en-US" sz="1250" dirty="0">
                 <a:solidFill>
                   <a:srgbClr val="6A6F76"/>
                 </a:solidFill>
@@ -3379,23 +3568,23 @@
                 <a:ea typeface="맑은 고딕" pitchFamily="34" charset="-122"/>
                 <a:cs typeface="맑은 고딕" pitchFamily="34" charset="-120"/>
               </a:rPr>
-              <a:t>“퇴사 실업급여 조건”, “청년 월세” 등 검색 의도 공략</a:t>
-            </a:r>
-            <a:endParaRPr lang="en-US" sz="1300" dirty="0"/>
+              <a:t>주거·돌봄·교육 복지 원스톱 매칭</a:t>
+            </a:r>
+            <a:endParaRPr lang="en-US" sz="1250" dirty="0"/>
           </a:p>
           <a:p>
             <a:pPr marL="177800" indent="-177800">
               <a:lnSpc>
-                <a:spcPct val="125000"/>
+                <a:spcPct val="130000"/>
               </a:lnSpc>
               <a:spcAft>
-                <a:spcPts val="700"/>
+                <a:spcPts val="800"/>
               </a:spcAft>
               <a:buSzPct val="100000"/>
               <a:buChar char="•"/>
             </a:pPr>
             <a:r>
-              <a:rPr lang="en-US" sz="1300" dirty="0">
+              <a:rPr lang="en-US" sz="1250" dirty="0">
                 <a:solidFill>
                   <a:srgbClr val="6A6F76"/>
                 </a:solidFill>
@@ -3403,23 +3592,23 @@
                 <a:ea typeface="맑은 고딕" pitchFamily="34" charset="-122"/>
                 <a:cs typeface="맑은 고딕" pitchFamily="34" charset="-120"/>
               </a:rPr>
-              <a:t>‘쉬운 말 요약’ 콘텐츠의 검색 상단 노출</a:t>
-            </a:r>
-            <a:endParaRPr lang="en-US" sz="1300" dirty="0"/>
+              <a:t>실시간 혜택 확인 및 신청 연동</a:t>
+            </a:r>
+            <a:endParaRPr lang="en-US" sz="1250" dirty="0"/>
           </a:p>
           <a:p>
             <a:pPr marL="177800" indent="-177800">
               <a:lnSpc>
-                <a:spcPct val="125000"/>
+                <a:spcPct val="130000"/>
               </a:lnSpc>
               <a:spcAft>
-                <a:spcPts val="700"/>
+                <a:spcPts val="800"/>
               </a:spcAft>
               <a:buSzPct val="100000"/>
               <a:buChar char="•"/>
             </a:pPr>
             <a:r>
-              <a:rPr lang="en-US" sz="1300" dirty="0">
+              <a:rPr lang="en-US" sz="1250" dirty="0">
                 <a:solidFill>
                   <a:srgbClr val="6A6F76"/>
                 </a:solidFill>
@@ -3427,44 +3616,110 @@
                 <a:ea typeface="맑은 고딕" pitchFamily="34" charset="-122"/>
                 <a:cs typeface="맑은 고딕" pitchFamily="34" charset="-120"/>
               </a:rPr>
-              <a:t>개인화 답변으로 유기적 트래픽 확보</a:t>
-            </a:r>
-            <a:endParaRPr lang="en-US" sz="1300" dirty="0"/>
-          </a:p>
-        </p:txBody>
-      </p:sp>
-      <p:sp>
-        <p:nvSpPr>
-          <p:cNvPr id="11" name="Shape 9"/>
-          <p:cNvSpPr/>
-          <p:nvPr/>
-        </p:nvSpPr>
-        <p:spPr>
-          <a:xfrm>
-            <a:off x="502920" y="4892040"/>
-            <a:ext cx="11183112" cy="868680"/>
+              <a:t>기업별 맞춤 임직원 복지 큐레이션</a:t>
+            </a:r>
+            <a:endParaRPr lang="en-US" sz="1250" dirty="0"/>
+          </a:p>
+        </p:txBody>
+      </p:sp>
+      <p:sp>
+        <p:nvSpPr>
+          <p:cNvPr id="13" name="Shape 11"/>
+          <p:cNvSpPr/>
+          <p:nvPr/>
+        </p:nvSpPr>
+        <p:spPr>
+          <a:xfrm>
+            <a:off x="8110728" y="1554480"/>
+            <a:ext cx="3584448" cy="4206240"/>
           </a:xfrm>
           <a:prstGeom prst="roundRect">
             <a:avLst>
-              <a:gd name="adj" fmla="val 12632"/>
+              <a:gd name="adj" fmla="val 3061"/>
             </a:avLst>
           </a:prstGeom>
           <a:solidFill>
-            <a:srgbClr val="E8F5EC"/>
+            <a:srgbClr val="FFFFFF"/>
           </a:solidFill>
-          <a:ln/>
-        </p:spPr>
-      </p:sp>
-      <p:sp>
-        <p:nvSpPr>
-          <p:cNvPr id="12" name="Text 10"/>
-          <p:cNvSpPr/>
-          <p:nvPr/>
-        </p:nvSpPr>
-        <p:spPr>
-          <a:xfrm>
-            <a:off x="822960" y="4892040"/>
-            <a:ext cx="10515600" cy="868680"/>
+          <a:ln w="12700">
+            <a:solidFill>
+              <a:srgbClr val="DCE4DC"/>
+            </a:solidFill>
+            <a:prstDash val="solid"/>
+          </a:ln>
+        </p:spPr>
+      </p:sp>
+      <p:sp>
+        <p:nvSpPr>
+          <p:cNvPr id="14" name="Shape 12"/>
+          <p:cNvSpPr/>
+          <p:nvPr/>
+        </p:nvSpPr>
+        <p:spPr>
+          <a:xfrm>
+            <a:off x="8110728" y="1554480"/>
+            <a:ext cx="3584448" cy="822960"/>
+          </a:xfrm>
+          <a:prstGeom prst="roundRect">
+            <a:avLst>
+              <a:gd name="adj" fmla="val 13333"/>
+            </a:avLst>
+          </a:prstGeom>
+          <a:solidFill>
+            <a:srgbClr val="0F6B3A"/>
+          </a:solidFill>
+          <a:ln/>
+        </p:spPr>
+      </p:sp>
+      <p:sp>
+        <p:nvSpPr>
+          <p:cNvPr id="15" name="Text 13"/>
+          <p:cNvSpPr/>
+          <p:nvPr/>
+        </p:nvSpPr>
+        <p:spPr>
+          <a:xfrm>
+            <a:off x="8385048" y="1554480"/>
+            <a:ext cx="3017520" cy="822960"/>
+          </a:xfrm>
+          <a:prstGeom prst="rect">
+            <a:avLst/>
+          </a:prstGeom>
+          <a:noFill/>
+          <a:ln/>
+        </p:spPr>
+        <p:txBody>
+          <a:bodyPr wrap="square" rtlCol="0" anchor="ctr"/>
+          <a:lstStyle/>
+          <a:p>
+            <a:pPr indent="0" marL="0">
+              <a:buNone/>
+            </a:pPr>
+            <a:r>
+              <a:rPr lang="en-US" sz="2200" b="1" dirty="0">
+                <a:solidFill>
+                  <a:srgbClr val="FFFFFF"/>
+                </a:solidFill>
+                <a:latin typeface="맑은 고딕" pitchFamily="34" charset="0"/>
+                <a:ea typeface="맑은 고딕" pitchFamily="34" charset="-122"/>
+                <a:cs typeface="맑은 고딕" pitchFamily="34" charset="-120"/>
+              </a:rPr>
+              <a:t>B2C</a:t>
+            </a:r>
+            <a:endParaRPr lang="en-US" sz="2200" dirty="0"/>
+          </a:p>
+        </p:txBody>
+      </p:sp>
+      <p:sp>
+        <p:nvSpPr>
+          <p:cNvPr id="16" name="Text 14"/>
+          <p:cNvSpPr/>
+          <p:nvPr/>
+        </p:nvSpPr>
+        <p:spPr>
+          <a:xfrm>
+            <a:off x="8385048" y="2560320"/>
+            <a:ext cx="3108960" cy="457200"/>
           </a:xfrm>
           <a:prstGeom prst="rect">
             <a:avLst/>
@@ -3488,21 +3743,7 @@
                 <a:ea typeface="맑은 고딕" pitchFamily="34" charset="-122"/>
                 <a:cs typeface="맑은 고딕" pitchFamily="34" charset="-120"/>
               </a:rPr>
-              <a:t>Organic Growth Loop   </a:t>
-            </a:r>
-            <a:pPr indent="0" marL="0">
-              <a:buNone/>
-            </a:pPr>
-            <a:r>
-              <a:rPr lang="en-US" sz="1500" dirty="0">
-                <a:solidFill>
-                  <a:srgbClr val="3A5A47"/>
-                </a:solidFill>
-                <a:latin typeface="맑은 고딕" pitchFamily="34" charset="0"/>
-                <a:ea typeface="맑은 고딕" pitchFamily="34" charset="-122"/>
-                <a:cs typeface="맑은 고딕" pitchFamily="34" charset="-120"/>
-              </a:rPr>
-              <a:t>사용자 검색 → 쉬운 요약 콘텐츠 발견 → 서비스 유입 → 리텐션 강화</a:t>
+              <a:t>프리미엄 부가 서비스</a:t>
             </a:r>
             <a:endParaRPr lang="en-US" sz="1500" dirty="0"/>
           </a:p>
@@ -3510,7 +3751,101 @@
       </p:sp>
       <p:sp>
         <p:nvSpPr>
-          <p:cNvPr id="13" name="Text 11"/>
+          <p:cNvPr id="17" name="Text 15"/>
+          <p:cNvSpPr/>
+          <p:nvPr/>
+        </p:nvSpPr>
+        <p:spPr>
+          <a:xfrm>
+            <a:off x="8385048" y="3108960"/>
+            <a:ext cx="3108960" cy="2468880"/>
+          </a:xfrm>
+          <a:prstGeom prst="rect">
+            <a:avLst/>
+          </a:prstGeom>
+          <a:noFill/>
+          <a:ln/>
+        </p:spPr>
+        <p:txBody>
+          <a:bodyPr wrap="square" rtlCol="0" anchor="ctr"/>
+          <a:lstStyle/>
+          <a:p>
+            <a:pPr marL="177800" indent="-177800">
+              <a:lnSpc>
+                <a:spcPct val="130000"/>
+              </a:lnSpc>
+              <a:spcAft>
+                <a:spcPts val="800"/>
+              </a:spcAft>
+              <a:buSzPct val="100000"/>
+              <a:buChar char="•"/>
+            </a:pPr>
+            <a:r>
+              <a:rPr lang="en-US" sz="1250" dirty="0">
+                <a:solidFill>
+                  <a:srgbClr val="6A6F76"/>
+                </a:solidFill>
+                <a:latin typeface="맑은 고딕" pitchFamily="34" charset="0"/>
+                <a:ea typeface="맑은 고딕" pitchFamily="34" charset="-122"/>
+                <a:cs typeface="맑은 고딕" pitchFamily="34" charset="-120"/>
+              </a:rPr>
+              <a:t>증빙 서류 원클릭 준비 대행</a:t>
+            </a:r>
+            <a:endParaRPr lang="en-US" sz="1250" dirty="0"/>
+          </a:p>
+          <a:p>
+            <a:pPr marL="177800" indent="-177800">
+              <a:lnSpc>
+                <a:spcPct val="130000"/>
+              </a:lnSpc>
+              <a:spcAft>
+                <a:spcPts val="800"/>
+              </a:spcAft>
+              <a:buSzPct val="100000"/>
+              <a:buChar char="•"/>
+            </a:pPr>
+            <a:r>
+              <a:rPr lang="en-US" sz="1250" dirty="0">
+                <a:solidFill>
+                  <a:srgbClr val="6A6F76"/>
+                </a:solidFill>
+                <a:latin typeface="맑은 고딕" pitchFamily="34" charset="0"/>
+                <a:ea typeface="맑은 고딕" pitchFamily="34" charset="-122"/>
+                <a:cs typeface="맑은 고딕" pitchFamily="34" charset="-120"/>
+              </a:rPr>
+              <a:t>전문 사회복지사 1:1 상담 매칭</a:t>
+            </a:r>
+            <a:endParaRPr lang="en-US" sz="1250" dirty="0"/>
+          </a:p>
+          <a:p>
+            <a:pPr marL="177800" indent="-177800">
+              <a:lnSpc>
+                <a:spcPct val="130000"/>
+              </a:lnSpc>
+              <a:spcAft>
+                <a:spcPts val="800"/>
+              </a:spcAft>
+              <a:buSzPct val="100000"/>
+              <a:buChar char="•"/>
+            </a:pPr>
+            <a:r>
+              <a:rPr lang="en-US" sz="1250" dirty="0">
+                <a:solidFill>
+                  <a:srgbClr val="6A6F76"/>
+                </a:solidFill>
+                <a:latin typeface="맑은 고딕" pitchFamily="34" charset="0"/>
+                <a:ea typeface="맑은 고딕" pitchFamily="34" charset="-122"/>
+                <a:cs typeface="맑은 고딕" pitchFamily="34" charset="-120"/>
+              </a:rPr>
+              <a:t>마이데이터 기반 자격 자동 파싱</a:t>
+            </a:r>
+            <a:endParaRPr lang="en-US" sz="1250" dirty="0"/>
+          </a:p>
+        </p:txBody>
+      </p:sp>
+      <p:sp>
+        <p:nvSpPr>
+          <p:cNvPr id="18" name="Text 16"/>
           <p:cNvSpPr/>
           <p:nvPr/>
         </p:nvSpPr>
@@ -3529,7 +3864,7 @@
           <a:bodyPr wrap="square" rtlCol="0" anchor="ctr"/>
           <a:lstStyle/>
           <a:p>
-            <a:pPr algn="l" indent="0" marL="0">
+            <a:pPr indent="0" marL="0">
               <a:buNone/>
             </a:pPr>
             <a:r>
@@ -3541,7 +3876,7 @@
                 <a:ea typeface="맑은 고딕" pitchFamily="34" charset="-122"/>
                 <a:cs typeface="맑은 고딕" pitchFamily="34" charset="-120"/>
               </a:rPr>
-              <a:t>11 / 12 · 유저 획득 및 마케팅 전략</a:t>
+              <a:t>11 / 14 · 비즈니스 모델 및 수익화</a:t>
             </a:r>
             <a:endParaRPr lang="en-US" sz="900" dirty="0"/>
           </a:p>
@@ -3549,7 +3884,7 @@
       </p:sp>
       <p:sp>
         <p:nvSpPr>
-          <p:cNvPr id="14" name="Text 12"/>
+          <p:cNvPr id="19" name="Text 17"/>
           <p:cNvSpPr/>
           <p:nvPr/>
         </p:nvSpPr>
@@ -3597,6 +3932,628 @@
 <file path=ppt/slides/slide12.xml><?xml version="1.0" encoding="utf-8"?>
 <p:sld xmlns:a="http://schemas.openxmlformats.org/drawingml/2006/main" xmlns:r="http://schemas.openxmlformats.org/officeDocument/2006/relationships" xmlns:p="http://schemas.openxmlformats.org/presentationml/2006/main">
   <p:cSld name="Slide 12">
+    <p:bg>
+      <p:bgPr>
+        <a:solidFill>
+          <a:srgbClr val="FFFFFF"/>
+        </a:solidFill>
+      </p:bgPr>
+    </p:bg>
+    <p:spTree>
+      <p:nvGrpSpPr>
+        <p:cNvPr id="1" name=""/>
+        <p:cNvGrpSpPr/>
+        <p:nvPr/>
+      </p:nvGrpSpPr>
+      <p:grpSpPr>
+        <a:xfrm>
+          <a:off x="0" y="0"/>
+          <a:ext cx="0" cy="0"/>
+          <a:chOff x="0" y="0"/>
+          <a:chExt cx="0" cy="0"/>
+        </a:xfrm>
+      </p:grpSpPr>
+      <p:sp>
+        <p:nvSpPr>
+          <p:cNvPr id="2" name="Text 0"/>
+          <p:cNvSpPr/>
+          <p:nvPr/>
+        </p:nvSpPr>
+        <p:spPr>
+          <a:xfrm>
+            <a:off x="502920" y="457200"/>
+            <a:ext cx="11155680" cy="640080"/>
+          </a:xfrm>
+          <a:prstGeom prst="rect">
+            <a:avLst/>
+          </a:prstGeom>
+          <a:noFill/>
+          <a:ln/>
+        </p:spPr>
+        <p:txBody>
+          <a:bodyPr wrap="square" rtlCol="0" anchor="ctr"/>
+          <a:lstStyle/>
+          <a:p>
+            <a:pPr indent="0" marL="0">
+              <a:buNone/>
+            </a:pPr>
+            <a:r>
+              <a:rPr lang="en-US" sz="3000" b="1" dirty="0">
+                <a:solidFill>
+                  <a:srgbClr val="1B1C1E"/>
+                </a:solidFill>
+                <a:latin typeface="맑은 고딕" pitchFamily="34" charset="0"/>
+                <a:ea typeface="맑은 고딕" pitchFamily="34" charset="-122"/>
+                <a:cs typeface="맑은 고딕" pitchFamily="34" charset="-120"/>
+              </a:rPr>
+              <a:t>정보 소외 없는 전방위 유저 획득 및 마케팅</a:t>
+            </a:r>
+            <a:endParaRPr lang="en-US" sz="3000" dirty="0"/>
+          </a:p>
+        </p:txBody>
+      </p:sp>
+      <p:sp>
+        <p:nvSpPr>
+          <p:cNvPr id="3" name="Shape 1"/>
+          <p:cNvSpPr/>
+          <p:nvPr/>
+        </p:nvSpPr>
+        <p:spPr>
+          <a:xfrm>
+            <a:off x="502920" y="1554480"/>
+            <a:ext cx="5532120" cy="3108960"/>
+          </a:xfrm>
+          <a:prstGeom prst="roundRect">
+            <a:avLst>
+              <a:gd name="adj" fmla="val 3529"/>
+            </a:avLst>
+          </a:prstGeom>
+          <a:solidFill>
+            <a:srgbClr val="FFFFFF"/>
+          </a:solidFill>
+          <a:ln w="12700">
+            <a:solidFill>
+              <a:srgbClr val="DCE4DC"/>
+            </a:solidFill>
+            <a:prstDash val="solid"/>
+          </a:ln>
+        </p:spPr>
+      </p:sp>
+      <p:sp>
+        <p:nvSpPr>
+          <p:cNvPr id="4" name="Text 2"/>
+          <p:cNvSpPr/>
+          <p:nvPr/>
+        </p:nvSpPr>
+        <p:spPr>
+          <a:xfrm>
+            <a:off x="822960" y="1783080"/>
+            <a:ext cx="4937760" cy="365760"/>
+          </a:xfrm>
+          <a:prstGeom prst="rect">
+            <a:avLst/>
+          </a:prstGeom>
+          <a:noFill/>
+          <a:ln/>
+        </p:spPr>
+        <p:txBody>
+          <a:bodyPr wrap="square" rtlCol="0" anchor="ctr"/>
+          <a:lstStyle/>
+          <a:p>
+            <a:pPr indent="0" marL="0">
+              <a:buNone/>
+            </a:pPr>
+            <a:r>
+              <a:rPr lang="en-US" sz="1300" b="1" dirty="0">
+                <a:solidFill>
+                  <a:srgbClr val="18A058"/>
+                </a:solidFill>
+                <a:latin typeface="맑은 고딕" pitchFamily="34" charset="0"/>
+                <a:ea typeface="맑은 고딕" pitchFamily="34" charset="-122"/>
+                <a:cs typeface="맑은 고딕" pitchFamily="34" charset="-120"/>
+              </a:rPr>
+              <a:t>오프라인 연계</a:t>
+            </a:r>
+            <a:endParaRPr lang="en-US" sz="1300" dirty="0"/>
+          </a:p>
+        </p:txBody>
+      </p:sp>
+      <p:sp>
+        <p:nvSpPr>
+          <p:cNvPr id="5" name="Text 3"/>
+          <p:cNvSpPr/>
+          <p:nvPr/>
+        </p:nvSpPr>
+        <p:spPr>
+          <a:xfrm>
+            <a:off x="822960" y="2148840"/>
+            <a:ext cx="4937760" cy="457200"/>
+          </a:xfrm>
+          <a:prstGeom prst="rect">
+            <a:avLst/>
+          </a:prstGeom>
+          <a:noFill/>
+          <a:ln/>
+        </p:spPr>
+        <p:txBody>
+          <a:bodyPr wrap="square" rtlCol="0" anchor="ctr"/>
+          <a:lstStyle/>
+          <a:p>
+            <a:pPr indent="0" marL="0">
+              <a:buNone/>
+            </a:pPr>
+            <a:r>
+              <a:rPr lang="en-US" sz="1700" b="1" dirty="0">
+                <a:solidFill>
+                  <a:srgbClr val="1B1C1E"/>
+                </a:solidFill>
+                <a:latin typeface="맑은 고딕" pitchFamily="34" charset="0"/>
+                <a:ea typeface="맑은 고딕" pitchFamily="34" charset="-122"/>
+                <a:cs typeface="맑은 고딕" pitchFamily="34" charset="-120"/>
+              </a:rPr>
+              <a:t>신뢰 기반 오프라인 기관 연계</a:t>
+            </a:r>
+            <a:endParaRPr lang="en-US" sz="1700" dirty="0"/>
+          </a:p>
+        </p:txBody>
+      </p:sp>
+      <p:sp>
+        <p:nvSpPr>
+          <p:cNvPr id="6" name="Text 4"/>
+          <p:cNvSpPr/>
+          <p:nvPr/>
+        </p:nvSpPr>
+        <p:spPr>
+          <a:xfrm>
+            <a:off x="822960" y="2697480"/>
+            <a:ext cx="4937760" cy="1828800"/>
+          </a:xfrm>
+          <a:prstGeom prst="rect">
+            <a:avLst/>
+          </a:prstGeom>
+          <a:noFill/>
+          <a:ln/>
+        </p:spPr>
+        <p:txBody>
+          <a:bodyPr wrap="square" rtlCol="0" anchor="ctr"/>
+          <a:lstStyle/>
+          <a:p>
+            <a:pPr marL="177800" indent="-177800">
+              <a:lnSpc>
+                <a:spcPct val="125000"/>
+              </a:lnSpc>
+              <a:spcAft>
+                <a:spcPts val="700"/>
+              </a:spcAft>
+              <a:buSzPct val="100000"/>
+              <a:buChar char="•"/>
+            </a:pPr>
+            <a:r>
+              <a:rPr lang="en-US" sz="1300" dirty="0">
+                <a:solidFill>
+                  <a:srgbClr val="6A6F76"/>
+                </a:solidFill>
+                <a:latin typeface="맑은 고딕" pitchFamily="34" charset="0"/>
+                <a:ea typeface="맑은 고딕" pitchFamily="34" charset="-122"/>
+                <a:cs typeface="맑은 고딕" pitchFamily="34" charset="-120"/>
+              </a:rPr>
+              <a:t>전국 복지관·시·구청·주민센터 QR 리플렛 비치</a:t>
+            </a:r>
+            <a:endParaRPr lang="en-US" sz="1300" dirty="0"/>
+          </a:p>
+          <a:p>
+            <a:pPr marL="177800" indent="-177800">
+              <a:lnSpc>
+                <a:spcPct val="125000"/>
+              </a:lnSpc>
+              <a:spcAft>
+                <a:spcPts val="700"/>
+              </a:spcAft>
+              <a:buSzPct val="100000"/>
+              <a:buChar char="•"/>
+            </a:pPr>
+            <a:r>
+              <a:rPr lang="en-US" sz="1300" dirty="0">
+                <a:solidFill>
+                  <a:srgbClr val="6A6F76"/>
+                </a:solidFill>
+                <a:latin typeface="맑은 고딕" pitchFamily="34" charset="0"/>
+                <a:ea typeface="맑은 고딕" pitchFamily="34" charset="-122"/>
+                <a:cs typeface="맑은 고딕" pitchFamily="34" charset="-120"/>
+              </a:rPr>
+              <a:t>일선 복지사 대상 전용 상담 도구 무상 지원</a:t>
+            </a:r>
+            <a:endParaRPr lang="en-US" sz="1300" dirty="0"/>
+          </a:p>
+          <a:p>
+            <a:pPr marL="177800" indent="-177800">
+              <a:lnSpc>
+                <a:spcPct val="125000"/>
+              </a:lnSpc>
+              <a:spcAft>
+                <a:spcPts val="700"/>
+              </a:spcAft>
+              <a:buSzPct val="100000"/>
+              <a:buChar char="•"/>
+            </a:pPr>
+            <a:r>
+              <a:rPr lang="en-US" sz="1300" dirty="0">
+                <a:solidFill>
+                  <a:srgbClr val="6A6F76"/>
+                </a:solidFill>
+                <a:latin typeface="맑은 고딕" pitchFamily="34" charset="0"/>
+                <a:ea typeface="맑은 고딕" pitchFamily="34" charset="-122"/>
+                <a:cs typeface="맑은 고딕" pitchFamily="34" charset="-120"/>
+              </a:rPr>
+              <a:t>취약계층 밀착형 신뢰 네트워크 구축</a:t>
+            </a:r>
+            <a:endParaRPr lang="en-US" sz="1300" dirty="0"/>
+          </a:p>
+        </p:txBody>
+      </p:sp>
+      <p:sp>
+        <p:nvSpPr>
+          <p:cNvPr id="7" name="Shape 5"/>
+          <p:cNvSpPr/>
+          <p:nvPr/>
+        </p:nvSpPr>
+        <p:spPr>
+          <a:xfrm>
+            <a:off x="6245352" y="1554480"/>
+            <a:ext cx="5532120" cy="3108960"/>
+          </a:xfrm>
+          <a:prstGeom prst="roundRect">
+            <a:avLst>
+              <a:gd name="adj" fmla="val 3529"/>
+            </a:avLst>
+          </a:prstGeom>
+          <a:solidFill>
+            <a:srgbClr val="FFFFFF"/>
+          </a:solidFill>
+          <a:ln w="12700">
+            <a:solidFill>
+              <a:srgbClr val="DCE4DC"/>
+            </a:solidFill>
+            <a:prstDash val="solid"/>
+          </a:ln>
+        </p:spPr>
+      </p:sp>
+      <p:sp>
+        <p:nvSpPr>
+          <p:cNvPr id="8" name="Text 6"/>
+          <p:cNvSpPr/>
+          <p:nvPr/>
+        </p:nvSpPr>
+        <p:spPr>
+          <a:xfrm>
+            <a:off x="6565392" y="1783080"/>
+            <a:ext cx="4937760" cy="365760"/>
+          </a:xfrm>
+          <a:prstGeom prst="rect">
+            <a:avLst/>
+          </a:prstGeom>
+          <a:noFill/>
+          <a:ln/>
+        </p:spPr>
+        <p:txBody>
+          <a:bodyPr wrap="square" rtlCol="0" anchor="ctr"/>
+          <a:lstStyle/>
+          <a:p>
+            <a:pPr indent="0" marL="0">
+              <a:buNone/>
+            </a:pPr>
+            <a:r>
+              <a:rPr lang="en-US" sz="1300" b="1" dirty="0">
+                <a:solidFill>
+                  <a:srgbClr val="18A058"/>
+                </a:solidFill>
+                <a:latin typeface="맑은 고딕" pitchFamily="34" charset="0"/>
+                <a:ea typeface="맑은 고딕" pitchFamily="34" charset="-122"/>
+                <a:cs typeface="맑은 고딕" pitchFamily="34" charset="-120"/>
+              </a:rPr>
+              <a:t>온라인 SEO</a:t>
+            </a:r>
+            <a:endParaRPr lang="en-US" sz="1300" dirty="0"/>
+          </a:p>
+        </p:txBody>
+      </p:sp>
+      <p:sp>
+        <p:nvSpPr>
+          <p:cNvPr id="9" name="Text 7"/>
+          <p:cNvSpPr/>
+          <p:nvPr/>
+        </p:nvSpPr>
+        <p:spPr>
+          <a:xfrm>
+            <a:off x="6565392" y="2148840"/>
+            <a:ext cx="4937760" cy="457200"/>
+          </a:xfrm>
+          <a:prstGeom prst="rect">
+            <a:avLst/>
+          </a:prstGeom>
+          <a:noFill/>
+          <a:ln/>
+        </p:spPr>
+        <p:txBody>
+          <a:bodyPr wrap="square" rtlCol="0" anchor="ctr"/>
+          <a:lstStyle/>
+          <a:p>
+            <a:pPr indent="0" marL="0">
+              <a:buNone/>
+            </a:pPr>
+            <a:r>
+              <a:rPr lang="en-US" sz="1700" b="1" dirty="0">
+                <a:solidFill>
+                  <a:srgbClr val="1B1C1E"/>
+                </a:solidFill>
+                <a:latin typeface="맑은 고딕" pitchFamily="34" charset="0"/>
+                <a:ea typeface="맑은 고딕" pitchFamily="34" charset="-122"/>
+                <a:cs typeface="맑은 고딕" pitchFamily="34" charset="-120"/>
+              </a:rPr>
+              <a:t>RAG 기반 자연어 키워드 마케팅</a:t>
+            </a:r>
+            <a:endParaRPr lang="en-US" sz="1700" dirty="0"/>
+          </a:p>
+        </p:txBody>
+      </p:sp>
+      <p:sp>
+        <p:nvSpPr>
+          <p:cNvPr id="10" name="Text 8"/>
+          <p:cNvSpPr/>
+          <p:nvPr/>
+        </p:nvSpPr>
+        <p:spPr>
+          <a:xfrm>
+            <a:off x="6565392" y="2697480"/>
+            <a:ext cx="4937760" cy="1828800"/>
+          </a:xfrm>
+          <a:prstGeom prst="rect">
+            <a:avLst/>
+          </a:prstGeom>
+          <a:noFill/>
+          <a:ln/>
+        </p:spPr>
+        <p:txBody>
+          <a:bodyPr wrap="square" rtlCol="0" anchor="ctr"/>
+          <a:lstStyle/>
+          <a:p>
+            <a:pPr marL="177800" indent="-177800">
+              <a:lnSpc>
+                <a:spcPct val="125000"/>
+              </a:lnSpc>
+              <a:spcAft>
+                <a:spcPts val="700"/>
+              </a:spcAft>
+              <a:buSzPct val="100000"/>
+              <a:buChar char="•"/>
+            </a:pPr>
+            <a:r>
+              <a:rPr lang="en-US" sz="1300" dirty="0">
+                <a:solidFill>
+                  <a:srgbClr val="6A6F76"/>
+                </a:solidFill>
+                <a:latin typeface="맑은 고딕" pitchFamily="34" charset="0"/>
+                <a:ea typeface="맑은 고딕" pitchFamily="34" charset="-122"/>
+                <a:cs typeface="맑은 고딕" pitchFamily="34" charset="-120"/>
+              </a:rPr>
+              <a:t>“퇴사 실업급여 조건”, “청년 월세” 등 검색 의도 공략</a:t>
+            </a:r>
+            <a:endParaRPr lang="en-US" sz="1300" dirty="0"/>
+          </a:p>
+          <a:p>
+            <a:pPr marL="177800" indent="-177800">
+              <a:lnSpc>
+                <a:spcPct val="125000"/>
+              </a:lnSpc>
+              <a:spcAft>
+                <a:spcPts val="700"/>
+              </a:spcAft>
+              <a:buSzPct val="100000"/>
+              <a:buChar char="•"/>
+            </a:pPr>
+            <a:r>
+              <a:rPr lang="en-US" sz="1300" dirty="0">
+                <a:solidFill>
+                  <a:srgbClr val="6A6F76"/>
+                </a:solidFill>
+                <a:latin typeface="맑은 고딕" pitchFamily="34" charset="0"/>
+                <a:ea typeface="맑은 고딕" pitchFamily="34" charset="-122"/>
+                <a:cs typeface="맑은 고딕" pitchFamily="34" charset="-120"/>
+              </a:rPr>
+              <a:t>‘쉬운 말 요약’ 콘텐츠의 검색 상단 노출</a:t>
+            </a:r>
+            <a:endParaRPr lang="en-US" sz="1300" dirty="0"/>
+          </a:p>
+          <a:p>
+            <a:pPr marL="177800" indent="-177800">
+              <a:lnSpc>
+                <a:spcPct val="125000"/>
+              </a:lnSpc>
+              <a:spcAft>
+                <a:spcPts val="700"/>
+              </a:spcAft>
+              <a:buSzPct val="100000"/>
+              <a:buChar char="•"/>
+            </a:pPr>
+            <a:r>
+              <a:rPr lang="en-US" sz="1300" dirty="0">
+                <a:solidFill>
+                  <a:srgbClr val="6A6F76"/>
+                </a:solidFill>
+                <a:latin typeface="맑은 고딕" pitchFamily="34" charset="0"/>
+                <a:ea typeface="맑은 고딕" pitchFamily="34" charset="-122"/>
+                <a:cs typeface="맑은 고딕" pitchFamily="34" charset="-120"/>
+              </a:rPr>
+              <a:t>개인화 답변으로 유기적 트래픽 확보</a:t>
+            </a:r>
+            <a:endParaRPr lang="en-US" sz="1300" dirty="0"/>
+          </a:p>
+        </p:txBody>
+      </p:sp>
+      <p:sp>
+        <p:nvSpPr>
+          <p:cNvPr id="11" name="Shape 9"/>
+          <p:cNvSpPr/>
+          <p:nvPr/>
+        </p:nvSpPr>
+        <p:spPr>
+          <a:xfrm>
+            <a:off x="502920" y="4892040"/>
+            <a:ext cx="11183112" cy="868680"/>
+          </a:xfrm>
+          <a:prstGeom prst="roundRect">
+            <a:avLst>
+              <a:gd name="adj" fmla="val 12632"/>
+            </a:avLst>
+          </a:prstGeom>
+          <a:solidFill>
+            <a:srgbClr val="E8F5EC"/>
+          </a:solidFill>
+          <a:ln/>
+        </p:spPr>
+      </p:sp>
+      <p:sp>
+        <p:nvSpPr>
+          <p:cNvPr id="12" name="Text 10"/>
+          <p:cNvSpPr/>
+          <p:nvPr/>
+        </p:nvSpPr>
+        <p:spPr>
+          <a:xfrm>
+            <a:off x="822960" y="4892040"/>
+            <a:ext cx="10515600" cy="868680"/>
+          </a:xfrm>
+          <a:prstGeom prst="rect">
+            <a:avLst/>
+          </a:prstGeom>
+          <a:noFill/>
+          <a:ln/>
+        </p:spPr>
+        <p:txBody>
+          <a:bodyPr wrap="square" rtlCol="0" anchor="ctr"/>
+          <a:lstStyle/>
+          <a:p>
+            <a:pPr indent="0" marL="0">
+              <a:buNone/>
+            </a:pPr>
+            <a:r>
+              <a:rPr lang="en-US" sz="1500" b="1" dirty="0">
+                <a:solidFill>
+                  <a:srgbClr val="0F6B3A"/>
+                </a:solidFill>
+                <a:latin typeface="맑은 고딕" pitchFamily="34" charset="0"/>
+                <a:ea typeface="맑은 고딕" pitchFamily="34" charset="-122"/>
+                <a:cs typeface="맑은 고딕" pitchFamily="34" charset="-120"/>
+              </a:rPr>
+              <a:t>Organic Growth Loop   </a:t>
+            </a:r>
+            <a:pPr indent="0" marL="0">
+              <a:buNone/>
+            </a:pPr>
+            <a:r>
+              <a:rPr lang="en-US" sz="1500" dirty="0">
+                <a:solidFill>
+                  <a:srgbClr val="3A5A47"/>
+                </a:solidFill>
+                <a:latin typeface="맑은 고딕" pitchFamily="34" charset="0"/>
+                <a:ea typeface="맑은 고딕" pitchFamily="34" charset="-122"/>
+                <a:cs typeface="맑은 고딕" pitchFamily="34" charset="-120"/>
+              </a:rPr>
+              <a:t>사용자 검색 → 쉬운 요약 콘텐츠 발견 → 서비스 유입 → 리텐션 강화</a:t>
+            </a:r>
+            <a:endParaRPr lang="en-US" sz="1500" dirty="0"/>
+          </a:p>
+        </p:txBody>
+      </p:sp>
+      <p:sp>
+        <p:nvSpPr>
+          <p:cNvPr id="13" name="Text 11"/>
+          <p:cNvSpPr/>
+          <p:nvPr/>
+        </p:nvSpPr>
+        <p:spPr>
+          <a:xfrm>
+            <a:off x="502920" y="6437376"/>
+            <a:ext cx="6400800" cy="274320"/>
+          </a:xfrm>
+          <a:prstGeom prst="rect">
+            <a:avLst/>
+          </a:prstGeom>
+          <a:noFill/>
+          <a:ln/>
+        </p:spPr>
+        <p:txBody>
+          <a:bodyPr wrap="square" rtlCol="0" anchor="ctr"/>
+          <a:lstStyle/>
+          <a:p>
+            <a:pPr indent="0" marL="0">
+              <a:buNone/>
+            </a:pPr>
+            <a:r>
+              <a:rPr lang="en-US" sz="900" dirty="0">
+                <a:solidFill>
+                  <a:srgbClr val="6A6F76"/>
+                </a:solidFill>
+                <a:latin typeface="맑은 고딕" pitchFamily="34" charset="0"/>
+                <a:ea typeface="맑은 고딕" pitchFamily="34" charset="-122"/>
+                <a:cs typeface="맑은 고딕" pitchFamily="34" charset="-120"/>
+              </a:rPr>
+              <a:t>12 / 14 · 유저 획득 및 마케팅 전략</a:t>
+            </a:r>
+            <a:endParaRPr lang="en-US" sz="900" dirty="0"/>
+          </a:p>
+        </p:txBody>
+      </p:sp>
+      <p:sp>
+        <p:nvSpPr>
+          <p:cNvPr id="14" name="Text 12"/>
+          <p:cNvSpPr/>
+          <p:nvPr/>
+        </p:nvSpPr>
+        <p:spPr>
+          <a:xfrm>
+            <a:off x="5486400" y="6437376"/>
+            <a:ext cx="6199632" cy="274320"/>
+          </a:xfrm>
+          <a:prstGeom prst="rect">
+            <a:avLst/>
+          </a:prstGeom>
+          <a:noFill/>
+          <a:ln/>
+        </p:spPr>
+        <p:txBody>
+          <a:bodyPr wrap="square" rtlCol="0" anchor="ctr"/>
+          <a:lstStyle/>
+          <a:p>
+            <a:pPr algn="r" indent="0" marL="0">
+              <a:buNone/>
+            </a:pPr>
+            <a:r>
+              <a:rPr lang="en-US" sz="900" dirty="0">
+                <a:solidFill>
+                  <a:srgbClr val="6A6F76"/>
+                </a:solidFill>
+                <a:latin typeface="맑은 고딕" pitchFamily="34" charset="0"/>
+                <a:ea typeface="맑은 고딕" pitchFamily="34" charset="-122"/>
+                <a:cs typeface="맑은 고딕" pitchFamily="34" charset="-120"/>
+              </a:rPr>
+              <a:t>AI르네상스</a:t>
+            </a:r>
+            <a:endParaRPr lang="en-US" sz="900" dirty="0"/>
+          </a:p>
+        </p:txBody>
+      </p:sp>
+    </p:spTree>
+  </p:cSld>
+  <p:clrMapOvr>
+    <a:masterClrMapping/>
+  </p:clrMapOvr>
+</p:sld>
+</file>
+
+<file path=ppt/slides/slide13.xml><?xml version="1.0" encoding="utf-8"?>
+<p:sld xmlns:a="http://schemas.openxmlformats.org/drawingml/2006/main" xmlns:r="http://schemas.openxmlformats.org/officeDocument/2006/relationships" xmlns:p="http://schemas.openxmlformats.org/presentationml/2006/main">
+  <p:cSld name="Slide 13">
     <p:bg>
       <p:bgPr>
         <a:solidFill>
@@ -3626,7 +4583,7 @@
         </p:nvSpPr>
         <p:spPr>
           <a:xfrm>
-            <a:off x="640080" y="640080"/>
+            <a:off x="640080" y="1005840"/>
             <a:ext cx="1828800" cy="1097280"/>
           </a:xfrm>
           <a:prstGeom prst="rect">
@@ -3643,15 +4600,267 @@
               <a:buNone/>
             </a:pPr>
             <a:r>
+              <a:rPr lang="en-US" sz="9000" b="1" dirty="0">
+                <a:solidFill>
+                  <a:srgbClr val="5BA77E"/>
+                </a:solidFill>
+                <a:latin typeface="맑은 고딕" pitchFamily="34" charset="0"/>
+                <a:ea typeface="맑은 고딕" pitchFamily="34" charset="-122"/>
+                <a:cs typeface="맑은 고딕" pitchFamily="34" charset="-120"/>
+              </a:rPr>
+              <a:t>“</a:t>
+            </a:r>
+            <a:endParaRPr lang="en-US" sz="9000" dirty="0"/>
+          </a:p>
+        </p:txBody>
+      </p:sp>
+      <p:sp>
+        <p:nvSpPr>
+          <p:cNvPr id="3" name="Text 1"/>
+          <p:cNvSpPr/>
+          <p:nvPr/>
+        </p:nvSpPr>
+        <p:spPr>
+          <a:xfrm>
+            <a:off x="1463040" y="2011680"/>
+            <a:ext cx="9601200" cy="2194560"/>
+          </a:xfrm>
+          <a:prstGeom prst="rect">
+            <a:avLst/>
+          </a:prstGeom>
+          <a:noFill/>
+          <a:ln/>
+        </p:spPr>
+        <p:txBody>
+          <a:bodyPr wrap="square" rtlCol="0" anchor="ctr"/>
+          <a:lstStyle/>
+          <a:p>
+            <a:pPr indent="0" marL="0">
+              <a:lnSpc>
+                <a:spcPct val="140000"/>
+              </a:lnSpc>
+              <a:buNone/>
+            </a:pPr>
+            <a:r>
+              <a:rPr lang="en-US" sz="2500" i="1" dirty="0">
+                <a:solidFill>
+                  <a:srgbClr val="FFFFFF"/>
+                </a:solidFill>
+                <a:latin typeface="맑은 고딕" pitchFamily="34" charset="0"/>
+                <a:ea typeface="맑은 고딕" pitchFamily="34" charset="-122"/>
+                <a:cs typeface="맑은 고딕" pitchFamily="34" charset="-120"/>
+              </a:rPr>
+              <a:t>기술은 가장 힘든 곳에 있는 사람들의 목소리를 제일 먼저 들어야 합니다. 어렵고 복잡한 행정의 언어를, 모두가 차별 없이 누리는 일상의 언어로 완전하게 번역해내겠습니다.</a:t>
+            </a:r>
+            <a:endParaRPr lang="en-US" sz="2500" dirty="0"/>
+          </a:p>
+        </p:txBody>
+      </p:sp>
+      <p:sp>
+        <p:nvSpPr>
+          <p:cNvPr id="4" name="Text 2"/>
+          <p:cNvSpPr/>
+          <p:nvPr/>
+        </p:nvSpPr>
+        <p:spPr>
+          <a:xfrm>
+            <a:off x="1463040" y="4480560"/>
+            <a:ext cx="9601200" cy="457200"/>
+          </a:xfrm>
+          <a:prstGeom prst="rect">
+            <a:avLst/>
+          </a:prstGeom>
+          <a:noFill/>
+          <a:ln/>
+        </p:spPr>
+        <p:txBody>
+          <a:bodyPr wrap="square" rtlCol="0" anchor="ctr"/>
+          <a:lstStyle/>
+          <a:p>
+            <a:pPr indent="0" marL="0">
+              <a:buNone/>
+            </a:pPr>
+            <a:r>
+              <a:rPr lang="en-US" sz="1600" dirty="0">
+                <a:solidFill>
+                  <a:srgbClr val="E8F5EC"/>
+                </a:solidFill>
+                <a:latin typeface="맑은 고딕" pitchFamily="34" charset="0"/>
+                <a:ea typeface="맑은 고딕" pitchFamily="34" charset="-122"/>
+                <a:cs typeface="맑은 고딕" pitchFamily="34" charset="-120"/>
+              </a:rPr>
+              <a:t>— AI르네상스 팀 일동 (이진영 · 정호식 · 김경숙 · 김지선)</a:t>
+            </a:r>
+            <a:endParaRPr lang="en-US" sz="1600" dirty="0"/>
+          </a:p>
+        </p:txBody>
+      </p:sp>
+      <p:sp>
+        <p:nvSpPr>
+          <p:cNvPr id="5" name="Text 3"/>
+          <p:cNvSpPr/>
+          <p:nvPr/>
+        </p:nvSpPr>
+        <p:spPr>
+          <a:xfrm>
+            <a:off x="502920" y="6437376"/>
+            <a:ext cx="6400800" cy="274320"/>
+          </a:xfrm>
+          <a:prstGeom prst="rect">
+            <a:avLst/>
+          </a:prstGeom>
+          <a:noFill/>
+          <a:ln/>
+        </p:spPr>
+        <p:txBody>
+          <a:bodyPr wrap="square" rtlCol="0" anchor="ctr"/>
+          <a:lstStyle/>
+          <a:p>
+            <a:pPr indent="0" marL="0">
+              <a:buNone/>
+            </a:pPr>
+            <a:r>
+              <a:rPr lang="en-US" sz="900" dirty="0">
+                <a:solidFill>
+                  <a:srgbClr val="8FD0AD"/>
+                </a:solidFill>
+                <a:latin typeface="맑은 고딕" pitchFamily="34" charset="0"/>
+                <a:ea typeface="맑은 고딕" pitchFamily="34" charset="-122"/>
+                <a:cs typeface="맑은 고딕" pitchFamily="34" charset="-120"/>
+              </a:rPr>
+              <a:t>프로젝트를 임하는 팀의 가치관</a:t>
+            </a:r>
+            <a:endParaRPr lang="en-US" sz="900" dirty="0"/>
+          </a:p>
+        </p:txBody>
+      </p:sp>
+      <p:sp>
+        <p:nvSpPr>
+          <p:cNvPr id="6" name="Text 4"/>
+          <p:cNvSpPr/>
+          <p:nvPr/>
+        </p:nvSpPr>
+        <p:spPr>
+          <a:xfrm>
+            <a:off x="5486400" y="6437376"/>
+            <a:ext cx="6199632" cy="274320"/>
+          </a:xfrm>
+          <a:prstGeom prst="rect">
+            <a:avLst/>
+          </a:prstGeom>
+          <a:noFill/>
+          <a:ln/>
+        </p:spPr>
+        <p:txBody>
+          <a:bodyPr wrap="square" rtlCol="0" anchor="ctr"/>
+          <a:lstStyle/>
+          <a:p>
+            <a:pPr algn="r" indent="0" marL="0">
+              <a:buNone/>
+            </a:pPr>
+            <a:r>
+              <a:rPr lang="en-US" sz="900" dirty="0">
+                <a:solidFill>
+                  <a:srgbClr val="8FD0AD"/>
+                </a:solidFill>
+                <a:latin typeface="맑은 고딕" pitchFamily="34" charset="0"/>
+                <a:ea typeface="맑은 고딕" pitchFamily="34" charset="-122"/>
+                <a:cs typeface="맑은 고딕" pitchFamily="34" charset="-120"/>
+              </a:rPr>
+              <a:t>13 / 14 · 팀 비전 및 철학</a:t>
+            </a:r>
+            <a:endParaRPr lang="en-US" sz="900" dirty="0"/>
+          </a:p>
+        </p:txBody>
+      </p:sp>
+    </p:spTree>
+  </p:cSld>
+  <p:clrMapOvr>
+    <a:masterClrMapping/>
+  </p:clrMapOvr>
+</p:sld>
+</file>
+
+<file path=ppt/slides/slide14.xml><?xml version="1.0" encoding="utf-8"?>
+<p:sld xmlns:a="http://schemas.openxmlformats.org/drawingml/2006/main" xmlns:r="http://schemas.openxmlformats.org/officeDocument/2006/relationships" xmlns:p="http://schemas.openxmlformats.org/presentationml/2006/main">
+  <p:cSld name="Slide 14">
+    <p:bg>
+      <p:bgPr>
+        <a:solidFill>
+          <a:srgbClr val="0F6B3A"/>
+        </a:solidFill>
+      </p:bgPr>
+    </p:bg>
+    <p:spTree>
+      <p:nvGrpSpPr>
+        <p:cNvPr id="1" name=""/>
+        <p:cNvGrpSpPr/>
+        <p:nvPr/>
+      </p:nvGrpSpPr>
+      <p:grpSpPr>
+        <a:xfrm>
+          <a:off x="0" y="0"/>
+          <a:ext cx="0" cy="0"/>
+          <a:chOff x="0" y="0"/>
+          <a:chExt cx="0" cy="0"/>
+        </a:xfrm>
+      </p:grpSpPr>
+      <p:sp>
+        <p:nvSpPr>
+          <p:cNvPr id="2" name="Shape 0"/>
+          <p:cNvSpPr/>
+          <p:nvPr/>
+        </p:nvSpPr>
+        <p:spPr>
+          <a:xfrm>
+            <a:off x="5074920" y="1371600"/>
+            <a:ext cx="2011680" cy="2011680"/>
+          </a:xfrm>
+          <a:prstGeom prst="roundRect">
+            <a:avLst>
+              <a:gd name="adj" fmla="val 22727"/>
+            </a:avLst>
+          </a:prstGeom>
+          <a:solidFill>
+            <a:srgbClr val="18A058"/>
+          </a:solidFill>
+          <a:ln/>
+        </p:spPr>
+      </p:sp>
+      <p:sp>
+        <p:nvSpPr>
+          <p:cNvPr id="3" name="Text 1"/>
+          <p:cNvSpPr/>
+          <p:nvPr/>
+        </p:nvSpPr>
+        <p:spPr>
+          <a:xfrm>
+            <a:off x="5074920" y="1371600"/>
+            <a:ext cx="2011680" cy="2011680"/>
+          </a:xfrm>
+          <a:prstGeom prst="rect">
+            <a:avLst/>
+          </a:prstGeom>
+          <a:noFill/>
+          <a:ln/>
+        </p:spPr>
+        <p:txBody>
+          <a:bodyPr wrap="square" rtlCol="0" anchor="ctr"/>
+          <a:lstStyle/>
+          <a:p>
+            <a:pPr algn="ctr" indent="0" marL="0">
+              <a:buNone/>
+            </a:pPr>
+            <a:r>
               <a:rPr lang="en-US" sz="8000" b="1" dirty="0">
                 <a:solidFill>
-                  <a:srgbClr val="5BA77E"/>
-                </a:solidFill>
-                <a:latin typeface="맑은 고딕" pitchFamily="34" charset="0"/>
-                <a:ea typeface="맑은 고딕" pitchFamily="34" charset="-122"/>
-                <a:cs typeface="맑은 고딕" pitchFamily="34" charset="-120"/>
-              </a:rPr>
-              <a:t>“</a:t>
+                  <a:srgbClr val="FFFFFF"/>
+                </a:solidFill>
+                <a:latin typeface="맑은 고딕" pitchFamily="34" charset="0"/>
+                <a:ea typeface="맑은 고딕" pitchFamily="34" charset="-122"/>
+                <a:cs typeface="맑은 고딕" pitchFamily="34" charset="-120"/>
+              </a:rPr>
+              <a:t>♥</a:t>
             </a:r>
             <a:endParaRPr lang="en-US" sz="8000" dirty="0"/>
           </a:p>
@@ -3659,33 +4868,30 @@
       </p:sp>
       <p:sp>
         <p:nvSpPr>
-          <p:cNvPr id="3" name="Text 1"/>
-          <p:cNvSpPr/>
-          <p:nvPr/>
-        </p:nvSpPr>
-        <p:spPr>
-          <a:xfrm>
-            <a:off x="1463040" y="1371600"/>
-            <a:ext cx="9601200" cy="2011680"/>
-          </a:xfrm>
-          <a:prstGeom prst="rect">
-            <a:avLst/>
-          </a:prstGeom>
-          <a:noFill/>
-          <a:ln/>
-        </p:spPr>
-        <p:txBody>
-          <a:bodyPr wrap="square" rtlCol="0" anchor="ctr"/>
-          <a:lstStyle/>
-          <a:p>
-            <a:pPr indent="0" marL="0">
-              <a:lnSpc>
-                <a:spcPct val="135000"/>
-              </a:lnSpc>
-              <a:buNone/>
-            </a:pPr>
-            <a:r>
-              <a:rPr lang="en-US" sz="2300" i="1" dirty="0">
+          <p:cNvPr id="4" name="Text 2"/>
+          <p:cNvSpPr/>
+          <p:nvPr/>
+        </p:nvSpPr>
+        <p:spPr>
+          <a:xfrm>
+            <a:off x="822960" y="3566160"/>
+            <a:ext cx="10515600" cy="914400"/>
+          </a:xfrm>
+          <a:prstGeom prst="rect">
+            <a:avLst/>
+          </a:prstGeom>
+          <a:noFill/>
+          <a:ln/>
+        </p:spPr>
+        <p:txBody>
+          <a:bodyPr wrap="square" rtlCol="0" anchor="ctr"/>
+          <a:lstStyle/>
+          <a:p>
+            <a:pPr algn="ctr" indent="0" marL="0">
+              <a:buNone/>
+            </a:pPr>
+            <a:r>
+              <a:rPr lang="en-US" sz="4800" b="1" dirty="0">
                 <a:solidFill>
                   <a:srgbClr val="FFFFFF"/>
                 </a:solidFill>
@@ -3693,38 +4899,38 @@
                 <a:ea typeface="맑은 고딕" pitchFamily="34" charset="-122"/>
                 <a:cs typeface="맑은 고딕" pitchFamily="34" charset="-120"/>
               </a:rPr>
-              <a:t>기술은 가장 힘든 곳에 있는 사람들의 목소리를 제일 먼저 들어야 합니다. 어렵고 복잡한 행정의 언어를, 모두가 차별 없이 누리는 일상의 언어로 완전하게 번역해내겠습니다.</a:t>
-            </a:r>
-            <a:endParaRPr lang="en-US" sz="2300" dirty="0"/>
-          </a:p>
-        </p:txBody>
-      </p:sp>
-      <p:sp>
-        <p:nvSpPr>
-          <p:cNvPr id="4" name="Text 2"/>
-          <p:cNvSpPr/>
-          <p:nvPr/>
-        </p:nvSpPr>
-        <p:spPr>
-          <a:xfrm>
-            <a:off x="1463040" y="3383280"/>
-            <a:ext cx="9601200" cy="457200"/>
-          </a:xfrm>
-          <a:prstGeom prst="rect">
-            <a:avLst/>
-          </a:prstGeom>
-          <a:noFill/>
-          <a:ln/>
-        </p:spPr>
-        <p:txBody>
-          <a:bodyPr wrap="square" rtlCol="0" anchor="ctr"/>
-          <a:lstStyle/>
-          <a:p>
-            <a:pPr indent="0" marL="0">
-              <a:buNone/>
-            </a:pPr>
-            <a:r>
-              <a:rPr lang="en-US" sz="1500" dirty="0">
+              <a:t>Q &amp; A</a:t>
+            </a:r>
+            <a:endParaRPr lang="en-US" sz="4800" dirty="0"/>
+          </a:p>
+        </p:txBody>
+      </p:sp>
+      <p:sp>
+        <p:nvSpPr>
+          <p:cNvPr id="5" name="Text 3"/>
+          <p:cNvSpPr/>
+          <p:nvPr/>
+        </p:nvSpPr>
+        <p:spPr>
+          <a:xfrm>
+            <a:off x="822960" y="4572000"/>
+            <a:ext cx="10515600" cy="365760"/>
+          </a:xfrm>
+          <a:prstGeom prst="rect">
+            <a:avLst/>
+          </a:prstGeom>
+          <a:noFill/>
+          <a:ln/>
+        </p:spPr>
+        <p:txBody>
+          <a:bodyPr wrap="square" rtlCol="0" anchor="ctr"/>
+          <a:lstStyle/>
+          <a:p>
+            <a:pPr algn="ctr" indent="0" marL="0">
+              <a:buNone/>
+            </a:pPr>
+            <a:r>
+              <a:rPr lang="en-US" sz="1600" dirty="0">
                 <a:solidFill>
                   <a:srgbClr val="E8F5EC"/>
                 </a:solidFill>
@@ -3732,48 +4938,9 @@
                 <a:ea typeface="맑은 고딕" pitchFamily="34" charset="-122"/>
                 <a:cs typeface="맑은 고딕" pitchFamily="34" charset="-120"/>
               </a:rPr>
-              <a:t>— AI르네상스 팀 일동 (이진영 · 정호식 · 김경숙 · 김지선)</a:t>
-            </a:r>
-            <a:endParaRPr lang="en-US" sz="1500" dirty="0"/>
-          </a:p>
-        </p:txBody>
-      </p:sp>
-      <p:sp>
-        <p:nvSpPr>
-          <p:cNvPr id="5" name="Text 3"/>
-          <p:cNvSpPr/>
-          <p:nvPr/>
-        </p:nvSpPr>
-        <p:spPr>
-          <a:xfrm>
-            <a:off x="822960" y="4389120"/>
-            <a:ext cx="10515600" cy="822960"/>
-          </a:xfrm>
-          <a:prstGeom prst="rect">
-            <a:avLst/>
-          </a:prstGeom>
-          <a:noFill/>
-          <a:ln/>
-        </p:spPr>
-        <p:txBody>
-          <a:bodyPr wrap="square" rtlCol="0" anchor="ctr"/>
-          <a:lstStyle/>
-          <a:p>
-            <a:pPr indent="0" marL="0">
-              <a:buNone/>
-            </a:pPr>
-            <a:r>
-              <a:rPr lang="en-US" sz="4000" b="1" dirty="0">
-                <a:solidFill>
-                  <a:srgbClr val="FFFFFF"/>
-                </a:solidFill>
-                <a:latin typeface="맑은 고딕" pitchFamily="34" charset="0"/>
-                <a:ea typeface="맑은 고딕" pitchFamily="34" charset="-122"/>
-                <a:cs typeface="맑은 고딕" pitchFamily="34" charset="-120"/>
-              </a:rPr>
-              <a:t>Q &amp; A</a:t>
-            </a:r>
-            <a:endParaRPr lang="en-US" sz="4000" dirty="0"/>
+              <a:t>어려운 복지를 쉽게 해결하는 맞춤형 복지 혜택 알리미, 복지AI</a:t>
+            </a:r>
+            <a:endParaRPr lang="en-US" sz="1600" dirty="0"/>
           </a:p>
         </p:txBody>
       </p:sp>
@@ -3785,53 +4952,32 @@
         </p:nvSpPr>
         <p:spPr>
           <a:xfrm>
-            <a:off x="822960" y="5257800"/>
-            <a:ext cx="10515600" cy="822960"/>
-          </a:xfrm>
-          <a:prstGeom prst="rect">
-            <a:avLst/>
-          </a:prstGeom>
-          <a:noFill/>
-          <a:ln/>
-        </p:spPr>
-        <p:txBody>
-          <a:bodyPr wrap="square" rtlCol="0" anchor="ctr"/>
-          <a:lstStyle/>
-          <a:p>
-            <a:pPr indent="0" marL="0">
-              <a:lnSpc>
-                <a:spcPct val="130000"/>
-              </a:lnSpc>
+            <a:off x="822960" y="5120640"/>
+            <a:ext cx="10515600" cy="365760"/>
+          </a:xfrm>
+          <a:prstGeom prst="rect">
+            <a:avLst/>
+          </a:prstGeom>
+          <a:noFill/>
+          <a:ln/>
+        </p:spPr>
+        <p:txBody>
+          <a:bodyPr wrap="square" rtlCol="0" anchor="ctr"/>
+          <a:lstStyle/>
+          <a:p>
+            <a:pPr algn="ctr" indent="0" marL="0">
               <a:buNone/>
             </a:pPr>
             <a:r>
               <a:rPr lang="en-US" sz="1400" dirty="0">
                 <a:solidFill>
-                  <a:srgbClr val="E8F5EC"/>
-                </a:solidFill>
-                <a:latin typeface="맑은 고딕" pitchFamily="34" charset="0"/>
-                <a:ea typeface="맑은 고딕" pitchFamily="34" charset="-122"/>
-                <a:cs typeface="맑은 고딕" pitchFamily="34" charset="-120"/>
-              </a:rPr>
-              <a:t>어려운 복지를 쉽게 해결하는 맞춤형 복지 혜택 알리미, 복지AI
-</a:t>
-            </a:r>
-            <a:pPr indent="0" marL="0">
-              <a:lnSpc>
-                <a:spcPct val="130000"/>
-              </a:lnSpc>
-              <a:buNone/>
-            </a:pPr>
-            <a:r>
-              <a:rPr lang="en-US" sz="1300" dirty="0">
-                <a:solidFill>
                   <a:srgbClr val="BFE3CC"/>
                 </a:solidFill>
                 <a:latin typeface="맑은 고딕" pitchFamily="34" charset="0"/>
                 <a:ea typeface="맑은 고딕" pitchFamily="34" charset="-122"/>
                 <a:cs typeface="맑은 고딕" pitchFamily="34" charset="-120"/>
               </a:rPr>
-              <a:t>이메일 leeyob@gmail.com    ·    웹앱 데모 https://bokji-ai.vercel.app/</a:t>
+              <a:t>이메일 leeyob@gmail.com      ·      웹앱 데모 https://bokji-ai.vercel.app/</a:t>
             </a:r>
             <a:endParaRPr lang="en-US" sz="1400" dirty="0"/>
           </a:p>
@@ -3878,7 +5024,7 @@
         <p:spPr>
           <a:xfrm>
             <a:off x="822960" y="1828800"/>
-            <a:ext cx="4572000" cy="457200"/>
+            <a:ext cx="5486400" cy="457200"/>
           </a:xfrm>
           <a:prstGeom prst="rect">
             <a:avLst/>
@@ -3956,19 +5102,22 @@
         <p:spPr>
           <a:xfrm>
             <a:off x="822960" y="3566160"/>
-            <a:ext cx="10058400" cy="731520"/>
-          </a:xfrm>
-          <a:prstGeom prst="rect">
-            <a:avLst/>
-          </a:prstGeom>
-          <a:noFill/>
-          <a:ln/>
-        </p:spPr>
-        <p:txBody>
-          <a:bodyPr wrap="square" rtlCol="0" anchor="ctr"/>
-          <a:lstStyle/>
-          <a:p>
-            <a:pPr indent="0" marL="0">
+            <a:ext cx="10332720" cy="822960"/>
+          </a:xfrm>
+          <a:prstGeom prst="rect">
+            <a:avLst/>
+          </a:prstGeom>
+          <a:noFill/>
+          <a:ln/>
+        </p:spPr>
+        <p:txBody>
+          <a:bodyPr wrap="square" rtlCol="0" anchor="ctr"/>
+          <a:lstStyle/>
+          <a:p>
+            <a:pPr indent="0" marL="0">
+              <a:lnSpc>
+                <a:spcPct val="120000"/>
+              </a:lnSpc>
               <a:buNone/>
             </a:pPr>
             <a:r>
@@ -4027,7 +5176,7 @@
         <p:spPr>
           <a:xfrm>
             <a:off x="502920" y="457200"/>
-            <a:ext cx="10972800" cy="640080"/>
+            <a:ext cx="11155680" cy="640080"/>
           </a:xfrm>
           <a:prstGeom prst="rect">
             <a:avLst/>
@@ -4190,7 +5339,7 @@
         </p:nvSpPr>
         <p:spPr>
           <a:xfrm>
-            <a:off x="868680" y="2468880"/>
+            <a:off x="868680" y="2514600"/>
             <a:ext cx="4754880" cy="3017520"/>
           </a:xfrm>
           <a:prstGeom prst="rect">
@@ -4205,7 +5354,7 @@
           <a:p>
             <a:pPr indent="0" marL="0">
               <a:lnSpc>
-                <a:spcPct val="125000"/>
+                <a:spcPct val="130000"/>
               </a:lnSpc>
               <a:buNone/>
             </a:pPr>
@@ -4357,7 +5506,7 @@
         </p:nvSpPr>
         <p:spPr>
           <a:xfrm>
-            <a:off x="6611112" y="2468880"/>
+            <a:off x="6611112" y="2514600"/>
             <a:ext cx="4754880" cy="3017520"/>
           </a:xfrm>
           <a:prstGeom prst="rect">
@@ -4372,7 +5521,7 @@
           <a:p>
             <a:pPr indent="0" marL="0">
               <a:lnSpc>
-                <a:spcPct val="125000"/>
+                <a:spcPct val="130000"/>
               </a:lnSpc>
               <a:buNone/>
             </a:pPr>
@@ -4389,7 +5538,7 @@
             </a:r>
             <a:pPr indent="0" marL="0">
               <a:lnSpc>
-                <a:spcPct val="125000"/>
+                <a:spcPct val="130000"/>
               </a:lnSpc>
               <a:buNone/>
             </a:pPr>
@@ -4406,7 +5555,7 @@
             </a:r>
             <a:pPr indent="0" marL="0">
               <a:lnSpc>
-                <a:spcPct val="125000"/>
+                <a:spcPct val="130000"/>
               </a:lnSpc>
               <a:buNone/>
             </a:pPr>
@@ -4446,7 +5595,7 @@
           <a:bodyPr wrap="square" rtlCol="0" anchor="ctr"/>
           <a:lstStyle/>
           <a:p>
-            <a:pPr algn="l" indent="0" marL="0">
+            <a:pPr indent="0" marL="0">
               <a:buNone/>
             </a:pPr>
             <a:r>
@@ -4458,7 +5607,7 @@
                 <a:ea typeface="맑은 고딕" pitchFamily="34" charset="-122"/>
                 <a:cs typeface="맑은 고딕" pitchFamily="34" charset="-120"/>
               </a:rPr>
-              <a:t>3 / 12 · 기획 배경 및 문제 정의</a:t>
+              <a:t>3 / 14 · 기획 배경 및 문제 정의</a:t>
             </a:r>
             <a:endParaRPr lang="en-US" sz="900" dirty="0"/>
           </a:p>
@@ -4544,7 +5693,7 @@
         <p:spPr>
           <a:xfrm>
             <a:off x="502920" y="457200"/>
-            <a:ext cx="10972800" cy="640080"/>
+            <a:ext cx="11155680" cy="640080"/>
           </a:xfrm>
           <a:prstGeom prst="rect">
             <a:avLst/>
@@ -4568,7 +5717,7 @@
                 <a:ea typeface="맑은 고딕" pitchFamily="34" charset="-122"/>
                 <a:cs typeface="맑은 고딕" pitchFamily="34" charset="-120"/>
               </a:rPr>
-              <a:t>직관적인 UI를 통한 문제 해결</a:t>
+              <a:t>사용자 중심의 직관적 화면 설계</a:t>
             </a:r>
             <a:endParaRPr lang="en-US" sz="3000" dirty="0"/>
           </a:p>
@@ -5310,7 +6459,7 @@
           <a:bodyPr wrap="square" rtlCol="0" anchor="ctr"/>
           <a:lstStyle/>
           <a:p>
-            <a:pPr algn="l" indent="0" marL="0">
+            <a:pPr indent="0" marL="0">
               <a:buNone/>
             </a:pPr>
             <a:r>
@@ -5322,7 +6471,7 @@
                 <a:ea typeface="맑은 고딕" pitchFamily="34" charset="-122"/>
                 <a:cs typeface="맑은 고딕" pitchFamily="34" charset="-120"/>
               </a:rPr>
-              <a:t>4 / 12 · 기획 배경 및 문제 정의</a:t>
+              <a:t>4 / 14 · 기획 배경 및 문제 정의</a:t>
             </a:r>
             <a:endParaRPr lang="en-US" sz="900" dirty="0"/>
           </a:p>
@@ -5408,7 +6557,7 @@
         <p:spPr>
           <a:xfrm>
             <a:off x="822960" y="1828800"/>
-            <a:ext cx="4572000" cy="457200"/>
+            <a:ext cx="5486400" cy="457200"/>
           </a:xfrm>
           <a:prstGeom prst="rect">
             <a:avLst/>
@@ -5486,19 +6635,22 @@
         <p:spPr>
           <a:xfrm>
             <a:off x="822960" y="3566160"/>
-            <a:ext cx="10332720" cy="731520"/>
-          </a:xfrm>
-          <a:prstGeom prst="rect">
-            <a:avLst/>
-          </a:prstGeom>
-          <a:noFill/>
-          <a:ln/>
-        </p:spPr>
-        <p:txBody>
-          <a:bodyPr wrap="square" rtlCol="0" anchor="ctr"/>
-          <a:lstStyle/>
-          <a:p>
-            <a:pPr indent="0" marL="0">
+            <a:ext cx="10332720" cy="822960"/>
+          </a:xfrm>
+          <a:prstGeom prst="rect">
+            <a:avLst/>
+          </a:prstGeom>
+          <a:noFill/>
+          <a:ln/>
+        </p:spPr>
+        <p:txBody>
+          <a:bodyPr wrap="square" rtlCol="0" anchor="ctr"/>
+          <a:lstStyle/>
+          <a:p>
+            <a:pPr indent="0" marL="0">
+              <a:lnSpc>
+                <a:spcPct val="120000"/>
+              </a:lnSpc>
               <a:buNone/>
             </a:pPr>
             <a:r>
@@ -5557,7 +6709,7 @@
         <p:spPr>
           <a:xfrm>
             <a:off x="502920" y="457200"/>
-            <a:ext cx="10972800" cy="640080"/>
+            <a:ext cx="11155680" cy="640080"/>
           </a:xfrm>
           <a:prstGeom prst="rect">
             <a:avLst/>
@@ -6109,7 +7261,7 @@
           <a:bodyPr wrap="square" rtlCol="0" anchor="ctr"/>
           <a:lstStyle/>
           <a:p>
-            <a:pPr algn="l" indent="0" marL="0">
+            <a:pPr indent="0" marL="0">
               <a:buNone/>
             </a:pPr>
             <a:r>
@@ -6121,7 +7273,7 @@
                 <a:ea typeface="맑은 고딕" pitchFamily="34" charset="-122"/>
                 <a:cs typeface="맑은 고딕" pitchFamily="34" charset="-120"/>
               </a:rPr>
-              <a:t>6 / 12 · 핵심 기능 및 기술 구조</a:t>
+              <a:t>6 / 14 · 핵심 기능 및 기술 구조</a:t>
             </a:r>
             <a:endParaRPr lang="en-US" sz="900" dirty="0"/>
           </a:p>
@@ -6207,7 +7359,7 @@
         <p:spPr>
           <a:xfrm>
             <a:off x="502920" y="457200"/>
-            <a:ext cx="10972800" cy="640080"/>
+            <a:ext cx="11155680" cy="640080"/>
           </a:xfrm>
           <a:prstGeom prst="rect">
             <a:avLst/>
@@ -6944,7 +8096,7 @@
           <a:bodyPr wrap="square" rtlCol="0" anchor="ctr"/>
           <a:lstStyle/>
           <a:p>
-            <a:pPr algn="l" indent="0" marL="0">
+            <a:pPr indent="0" marL="0">
               <a:buNone/>
             </a:pPr>
             <a:r>
@@ -6956,7 +8108,7 @@
                 <a:ea typeface="맑은 고딕" pitchFamily="34" charset="-122"/>
                 <a:cs typeface="맑은 고딕" pitchFamily="34" charset="-120"/>
               </a:rPr>
-              <a:t>7 / 12 · 핵심 기능 및 기술 구조</a:t>
+              <a:t>7 / 14 · 핵심 기능 및 기술 구조</a:t>
             </a:r>
             <a:endParaRPr lang="en-US" sz="900" dirty="0"/>
           </a:p>
@@ -7042,7 +8194,7 @@
         <p:spPr>
           <a:xfrm>
             <a:off x="502920" y="457200"/>
-            <a:ext cx="10972800" cy="640080"/>
+            <a:ext cx="11155680" cy="640080"/>
           </a:xfrm>
           <a:prstGeom prst="rect">
             <a:avLst/>
@@ -7066,88 +8218,97 @@
                 <a:ea typeface="맑은 고딕" pitchFamily="34" charset="-122"/>
                 <a:cs typeface="맑은 고딕" pitchFamily="34" charset="-120"/>
               </a:rPr>
-              <a:t>프로젝트 개발 및 서비스 로드맵</a:t>
+              <a:t>복지 서비스 수집 분포 분석</a:t>
             </a:r>
             <a:endParaRPr lang="en-US" sz="3000" dirty="0"/>
           </a:p>
         </p:txBody>
       </p:sp>
-      <p:sp>
-        <p:nvSpPr>
-          <p:cNvPr id="3" name="Shape 1"/>
-          <p:cNvSpPr/>
-          <p:nvPr/>
-        </p:nvSpPr>
-        <p:spPr>
-          <a:xfrm>
-            <a:off x="502920" y="1645920"/>
-            <a:ext cx="2651760" cy="3931920"/>
-          </a:xfrm>
-          <a:prstGeom prst="roundRect">
-            <a:avLst>
-              <a:gd name="adj" fmla="val 4138"/>
-            </a:avLst>
+      <p:graphicFrame>
+        <p:nvGraphicFramePr>
+          <p:cNvPr id="3" name="Chart 0" descr=""/>
+          <p:cNvGraphicFramePr/>
+          <p:nvPr/>
+        </p:nvGraphicFramePr>
+        <p:xfrm>
+          <a:off x="640080" y="1554480"/>
+          <a:ext cx="5486400" cy="4297680"/>
+        </p:xfrm>
+        <a:graphic xmlns:a="http://schemas.openxmlformats.org/drawingml/2006/main">
+          <a:graphicData uri="http://schemas.openxmlformats.org/drawingml/2006/chart">
+            <c:chart xmlns:c="http://schemas.openxmlformats.org/drawingml/2006/chart" r:id="rId1"/>
+          </a:graphicData>
+        </a:graphic>
+      </p:graphicFrame>
+      <p:sp>
+        <p:nvSpPr>
+          <p:cNvPr id="4" name="Text 1"/>
+          <p:cNvSpPr/>
+          <p:nvPr/>
+        </p:nvSpPr>
+        <p:spPr>
+          <a:xfrm>
+            <a:off x="640080" y="3429000"/>
+            <a:ext cx="5486400" cy="548640"/>
+          </a:xfrm>
+          <a:prstGeom prst="rect">
+            <a:avLst/>
+          </a:prstGeom>
+          <a:noFill/>
+          <a:ln/>
+        </p:spPr>
+        <p:txBody>
+          <a:bodyPr wrap="square" rtlCol="0" anchor="ctr"/>
+          <a:lstStyle/>
+          <a:p>
+            <a:pPr algn="ctr" indent="0" marL="0">
+              <a:buNone/>
+            </a:pPr>
+            <a:r>
+              <a:rPr lang="en-US" sz="1800" b="1" dirty="0">
+                <a:solidFill>
+                  <a:srgbClr val="0F6B3A"/>
+                </a:solidFill>
+                <a:latin typeface="맑은 고딕" pitchFamily="34" charset="0"/>
+                <a:ea typeface="맑은 고딕" pitchFamily="34" charset="-122"/>
+                <a:cs typeface="맑은 고딕" pitchFamily="34" charset="-120"/>
+              </a:rPr>
+              <a:t>총 15,981건</a:t>
+            </a:r>
+            <a:endParaRPr lang="en-US" sz="1800" dirty="0"/>
+          </a:p>
+        </p:txBody>
+      </p:sp>
+      <p:sp>
+        <p:nvSpPr>
+          <p:cNvPr id="5" name="Shape 2"/>
+          <p:cNvSpPr/>
+          <p:nvPr/>
+        </p:nvSpPr>
+        <p:spPr>
+          <a:xfrm>
+            <a:off x="6766560" y="2176272"/>
+            <a:ext cx="274320" cy="274320"/>
+          </a:xfrm>
+          <a:prstGeom prst="rect">
+            <a:avLst/>
           </a:prstGeom>
           <a:solidFill>
-            <a:srgbClr val="0F6B3A"/>
+            <a:srgbClr val="18A058"/>
           </a:solidFill>
-          <a:ln w="12700">
-            <a:solidFill>
-              <a:srgbClr val="0F6B3A"/>
-            </a:solidFill>
-            <a:prstDash val="solid"/>
-          </a:ln>
-        </p:spPr>
-      </p:sp>
-      <p:sp>
-        <p:nvSpPr>
-          <p:cNvPr id="4" name="Text 2"/>
-          <p:cNvSpPr/>
-          <p:nvPr/>
-        </p:nvSpPr>
-        <p:spPr>
-          <a:xfrm>
-            <a:off x="731520" y="1874520"/>
-            <a:ext cx="2194560" cy="640080"/>
-          </a:xfrm>
-          <a:prstGeom prst="rect">
-            <a:avLst/>
-          </a:prstGeom>
-          <a:noFill/>
-          <a:ln/>
-        </p:spPr>
-        <p:txBody>
-          <a:bodyPr wrap="square" rtlCol="0" anchor="ctr"/>
-          <a:lstStyle/>
-          <a:p>
-            <a:pPr indent="0" marL="0">
-              <a:buNone/>
-            </a:pPr>
-            <a:r>
-              <a:rPr lang="en-US" sz="2600" b="1" dirty="0">
-                <a:solidFill>
-                  <a:srgbClr val="8FD0AD"/>
-                </a:solidFill>
-                <a:latin typeface="맑은 고딕" pitchFamily="34" charset="0"/>
-                <a:ea typeface="맑은 고딕" pitchFamily="34" charset="-122"/>
-                <a:cs typeface="맑은 고딕" pitchFamily="34" charset="-120"/>
-              </a:rPr>
-              <a:t>Q1</a:t>
-            </a:r>
-            <a:endParaRPr lang="en-US" sz="2600" dirty="0"/>
-          </a:p>
-        </p:txBody>
-      </p:sp>
-      <p:sp>
-        <p:nvSpPr>
-          <p:cNvPr id="5" name="Text 3"/>
-          <p:cNvSpPr/>
-          <p:nvPr/>
-        </p:nvSpPr>
-        <p:spPr>
-          <a:xfrm>
-            <a:off x="731520" y="2560320"/>
-            <a:ext cx="2240280" cy="457200"/>
+          <a:ln/>
+        </p:spPr>
+      </p:sp>
+      <p:sp>
+        <p:nvSpPr>
+          <p:cNvPr id="6" name="Text 3"/>
+          <p:cNvSpPr/>
+          <p:nvPr/>
+        </p:nvSpPr>
+        <p:spPr>
+          <a:xfrm>
+            <a:off x="7223760" y="2103120"/>
+            <a:ext cx="4572000" cy="365760"/>
           </a:xfrm>
           <a:prstGeom prst="rect">
             <a:avLst/>
@@ -7165,13 +8326,13 @@
             <a:r>
               <a:rPr lang="en-US" sz="1600" b="1" dirty="0">
                 <a:solidFill>
-                  <a:srgbClr val="FFFFFF"/>
-                </a:solidFill>
-                <a:latin typeface="맑은 고딕" pitchFamily="34" charset="0"/>
-                <a:ea typeface="맑은 고딕" pitchFamily="34" charset="-122"/>
-                <a:cs typeface="맑은 고딕" pitchFamily="34" charset="-120"/>
-              </a:rPr>
-              <a:t>데이터 기획</a:t>
+                  <a:srgbClr val="1B1C1E"/>
+                </a:solidFill>
+                <a:latin typeface="맑은 고딕" pitchFamily="34" charset="0"/>
+                <a:ea typeface="맑은 고딕" pitchFamily="34" charset="-122"/>
+                <a:cs typeface="맑은 고딕" pitchFamily="34" charset="-120"/>
+              </a:rPr>
+              <a:t>정부24 공공서비스</a:t>
             </a:r>
             <a:endParaRPr lang="en-US" sz="1600" dirty="0"/>
           </a:p>
@@ -7179,14 +8340,249 @@
       </p:sp>
       <p:sp>
         <p:nvSpPr>
-          <p:cNvPr id="6" name="Text 4"/>
-          <p:cNvSpPr/>
-          <p:nvPr/>
-        </p:nvSpPr>
-        <p:spPr>
-          <a:xfrm>
-            <a:off x="731520" y="3108960"/>
-            <a:ext cx="2240280" cy="1828800"/>
+          <p:cNvPr id="7" name="Text 4"/>
+          <p:cNvSpPr/>
+          <p:nvPr/>
+        </p:nvSpPr>
+        <p:spPr>
+          <a:xfrm>
+            <a:off x="7223760" y="2468880"/>
+            <a:ext cx="4572000" cy="365760"/>
+          </a:xfrm>
+          <a:prstGeom prst="rect">
+            <a:avLst/>
+          </a:prstGeom>
+          <a:noFill/>
+          <a:ln/>
+        </p:spPr>
+        <p:txBody>
+          <a:bodyPr wrap="square" rtlCol="0" anchor="ctr"/>
+          <a:lstStyle/>
+          <a:p>
+            <a:pPr indent="0" marL="0">
+              <a:buNone/>
+            </a:pPr>
+            <a:r>
+              <a:rPr lang="en-US" sz="1400" dirty="0">
+                <a:solidFill>
+                  <a:srgbClr val="6A6F76"/>
+                </a:solidFill>
+                <a:latin typeface="맑은 고딕" pitchFamily="34" charset="0"/>
+                <a:ea typeface="맑은 고딕" pitchFamily="34" charset="-122"/>
+                <a:cs typeface="맑은 고딕" pitchFamily="34" charset="-120"/>
+              </a:rPr>
+              <a:t>10,962건 (68.6%)</a:t>
+            </a:r>
+            <a:endParaRPr lang="en-US" sz="1400" dirty="0"/>
+          </a:p>
+        </p:txBody>
+      </p:sp>
+      <p:sp>
+        <p:nvSpPr>
+          <p:cNvPr id="8" name="Shape 5"/>
+          <p:cNvSpPr/>
+          <p:nvPr/>
+        </p:nvSpPr>
+        <p:spPr>
+          <a:xfrm>
+            <a:off x="6766560" y="3090672"/>
+            <a:ext cx="274320" cy="274320"/>
+          </a:xfrm>
+          <a:prstGeom prst="rect">
+            <a:avLst/>
+          </a:prstGeom>
+          <a:solidFill>
+            <a:srgbClr val="5FB88A"/>
+          </a:solidFill>
+          <a:ln/>
+        </p:spPr>
+      </p:sp>
+      <p:sp>
+        <p:nvSpPr>
+          <p:cNvPr id="9" name="Text 6"/>
+          <p:cNvSpPr/>
+          <p:nvPr/>
+        </p:nvSpPr>
+        <p:spPr>
+          <a:xfrm>
+            <a:off x="7223760" y="3017520"/>
+            <a:ext cx="4572000" cy="365760"/>
+          </a:xfrm>
+          <a:prstGeom prst="rect">
+            <a:avLst/>
+          </a:prstGeom>
+          <a:noFill/>
+          <a:ln/>
+        </p:spPr>
+        <p:txBody>
+          <a:bodyPr wrap="square" rtlCol="0" anchor="ctr"/>
+          <a:lstStyle/>
+          <a:p>
+            <a:pPr indent="0" marL="0">
+              <a:buNone/>
+            </a:pPr>
+            <a:r>
+              <a:rPr lang="en-US" sz="1600" b="1" dirty="0">
+                <a:solidFill>
+                  <a:srgbClr val="1B1C1E"/>
+                </a:solidFill>
+                <a:latin typeface="맑은 고딕" pitchFamily="34" charset="0"/>
+                <a:ea typeface="맑은 고딕" pitchFamily="34" charset="-122"/>
+                <a:cs typeface="맑은 고딕" pitchFamily="34" charset="-120"/>
+              </a:rPr>
+              <a:t>복지로 지자체</a:t>
+            </a:r>
+            <a:endParaRPr lang="en-US" sz="1600" dirty="0"/>
+          </a:p>
+        </p:txBody>
+      </p:sp>
+      <p:sp>
+        <p:nvSpPr>
+          <p:cNvPr id="10" name="Text 7"/>
+          <p:cNvSpPr/>
+          <p:nvPr/>
+        </p:nvSpPr>
+        <p:spPr>
+          <a:xfrm>
+            <a:off x="7223760" y="3383280"/>
+            <a:ext cx="4572000" cy="365760"/>
+          </a:xfrm>
+          <a:prstGeom prst="rect">
+            <a:avLst/>
+          </a:prstGeom>
+          <a:noFill/>
+          <a:ln/>
+        </p:spPr>
+        <p:txBody>
+          <a:bodyPr wrap="square" rtlCol="0" anchor="ctr"/>
+          <a:lstStyle/>
+          <a:p>
+            <a:pPr indent="0" marL="0">
+              <a:buNone/>
+            </a:pPr>
+            <a:r>
+              <a:rPr lang="en-US" sz="1400" dirty="0">
+                <a:solidFill>
+                  <a:srgbClr val="6A6F76"/>
+                </a:solidFill>
+                <a:latin typeface="맑은 고딕" pitchFamily="34" charset="0"/>
+                <a:ea typeface="맑은 고딕" pitchFamily="34" charset="-122"/>
+                <a:cs typeface="맑은 고딕" pitchFamily="34" charset="-120"/>
+              </a:rPr>
+              <a:t>4,561건 (28.5%)</a:t>
+            </a:r>
+            <a:endParaRPr lang="en-US" sz="1400" dirty="0"/>
+          </a:p>
+        </p:txBody>
+      </p:sp>
+      <p:sp>
+        <p:nvSpPr>
+          <p:cNvPr id="11" name="Shape 8"/>
+          <p:cNvSpPr/>
+          <p:nvPr/>
+        </p:nvSpPr>
+        <p:spPr>
+          <a:xfrm>
+            <a:off x="6766560" y="4005072"/>
+            <a:ext cx="274320" cy="274320"/>
+          </a:xfrm>
+          <a:prstGeom prst="rect">
+            <a:avLst/>
+          </a:prstGeom>
+          <a:solidFill>
+            <a:srgbClr val="A9D9BF"/>
+          </a:solidFill>
+          <a:ln/>
+        </p:spPr>
+      </p:sp>
+      <p:sp>
+        <p:nvSpPr>
+          <p:cNvPr id="12" name="Text 9"/>
+          <p:cNvSpPr/>
+          <p:nvPr/>
+        </p:nvSpPr>
+        <p:spPr>
+          <a:xfrm>
+            <a:off x="7223760" y="3931920"/>
+            <a:ext cx="4572000" cy="365760"/>
+          </a:xfrm>
+          <a:prstGeom prst="rect">
+            <a:avLst/>
+          </a:prstGeom>
+          <a:noFill/>
+          <a:ln/>
+        </p:spPr>
+        <p:txBody>
+          <a:bodyPr wrap="square" rtlCol="0" anchor="ctr"/>
+          <a:lstStyle/>
+          <a:p>
+            <a:pPr indent="0" marL="0">
+              <a:buNone/>
+            </a:pPr>
+            <a:r>
+              <a:rPr lang="en-US" sz="1600" b="1" dirty="0">
+                <a:solidFill>
+                  <a:srgbClr val="1B1C1E"/>
+                </a:solidFill>
+                <a:latin typeface="맑은 고딕" pitchFamily="34" charset="0"/>
+                <a:ea typeface="맑은 고딕" pitchFamily="34" charset="-122"/>
+                <a:cs typeface="맑은 고딕" pitchFamily="34" charset="-120"/>
+              </a:rPr>
+              <a:t>복지로 중앙부처</a:t>
+            </a:r>
+            <a:endParaRPr lang="en-US" sz="1600" dirty="0"/>
+          </a:p>
+        </p:txBody>
+      </p:sp>
+      <p:sp>
+        <p:nvSpPr>
+          <p:cNvPr id="13" name="Text 10"/>
+          <p:cNvSpPr/>
+          <p:nvPr/>
+        </p:nvSpPr>
+        <p:spPr>
+          <a:xfrm>
+            <a:off x="7223760" y="4297680"/>
+            <a:ext cx="4572000" cy="365760"/>
+          </a:xfrm>
+          <a:prstGeom prst="rect">
+            <a:avLst/>
+          </a:prstGeom>
+          <a:noFill/>
+          <a:ln/>
+        </p:spPr>
+        <p:txBody>
+          <a:bodyPr wrap="square" rtlCol="0" anchor="ctr"/>
+          <a:lstStyle/>
+          <a:p>
+            <a:pPr indent="0" marL="0">
+              <a:buNone/>
+            </a:pPr>
+            <a:r>
+              <a:rPr lang="en-US" sz="1400" dirty="0">
+                <a:solidFill>
+                  <a:srgbClr val="6A6F76"/>
+                </a:solidFill>
+                <a:latin typeface="맑은 고딕" pitchFamily="34" charset="0"/>
+                <a:ea typeface="맑은 고딕" pitchFamily="34" charset="-122"/>
+                <a:cs typeface="맑은 고딕" pitchFamily="34" charset="-120"/>
+              </a:rPr>
+              <a:t>448건 (2.8%)</a:t>
+            </a:r>
+            <a:endParaRPr lang="en-US" sz="1400" dirty="0"/>
+          </a:p>
+        </p:txBody>
+      </p:sp>
+      <p:sp>
+        <p:nvSpPr>
+          <p:cNvPr id="14" name="Text 11"/>
+          <p:cNvSpPr/>
+          <p:nvPr/>
+        </p:nvSpPr>
+        <p:spPr>
+          <a:xfrm>
+            <a:off x="6766560" y="4983480"/>
+            <a:ext cx="4937760" cy="822960"/>
           </a:xfrm>
           <a:prstGeom prst="rect">
             <a:avLst/>
@@ -7200,570 +8596,12 @@
           <a:p>
             <a:pPr indent="0" marL="0">
               <a:lnSpc>
-                <a:spcPct val="120000"/>
+                <a:spcPct val="125000"/>
               </a:lnSpc>
               <a:buNone/>
             </a:pPr>
             <a:r>
-              <a:rPr lang="en-US" sz="1200" dirty="0">
-                <a:solidFill>
-                  <a:srgbClr val="E8F5EC"/>
-                </a:solidFill>
-                <a:latin typeface="맑은 고딕" pitchFamily="34" charset="0"/>
-                <a:ea typeface="맑은 고딕" pitchFamily="34" charset="-122"/>
-                <a:cs typeface="맑은 고딕" pitchFamily="34" charset="-120"/>
-              </a:rPr>
-              <a:t>PRD·TRD 확정, 공공 API 동기화 파이프라인 및 정규화 체계 완비</a:t>
-            </a:r>
-            <a:endParaRPr lang="en-US" sz="1200" dirty="0"/>
-          </a:p>
-        </p:txBody>
-      </p:sp>
-      <p:sp>
-        <p:nvSpPr>
-          <p:cNvPr id="7" name="Text 5"/>
-          <p:cNvSpPr/>
-          <p:nvPr/>
-        </p:nvSpPr>
-        <p:spPr>
-          <a:xfrm>
-            <a:off x="731520" y="5074920"/>
-            <a:ext cx="2240280" cy="320040"/>
-          </a:xfrm>
-          <a:prstGeom prst="rect">
-            <a:avLst/>
-          </a:prstGeom>
-          <a:noFill/>
-          <a:ln/>
-        </p:spPr>
-        <p:txBody>
-          <a:bodyPr wrap="square" rtlCol="0" anchor="ctr"/>
-          <a:lstStyle/>
-          <a:p>
-            <a:pPr indent="0" marL="0">
-              <a:buNone/>
-            </a:pPr>
-            <a:r>
-              <a:rPr lang="en-US" sz="1100" b="1" dirty="0">
-                <a:solidFill>
-                  <a:srgbClr val="8FD0AD"/>
-                </a:solidFill>
-                <a:latin typeface="맑은 고딕" pitchFamily="34" charset="0"/>
-                <a:ea typeface="맑은 고딕" pitchFamily="34" charset="-122"/>
-                <a:cs typeface="맑은 고딕" pitchFamily="34" charset="-120"/>
-              </a:rPr>
-              <a:t>● 구현 완료</a:t>
-            </a:r>
-            <a:endParaRPr lang="en-US" sz="1100" dirty="0"/>
-          </a:p>
-        </p:txBody>
-      </p:sp>
-      <p:sp>
-        <p:nvSpPr>
-          <p:cNvPr id="8" name="Shape 6"/>
-          <p:cNvSpPr/>
-          <p:nvPr/>
-        </p:nvSpPr>
-        <p:spPr>
-          <a:xfrm>
-            <a:off x="3319272" y="1645920"/>
-            <a:ext cx="2651760" cy="3931920"/>
-          </a:xfrm>
-          <a:prstGeom prst="roundRect">
-            <a:avLst>
-              <a:gd name="adj" fmla="val 4138"/>
-            </a:avLst>
-          </a:prstGeom>
-          <a:solidFill>
-            <a:srgbClr val="0F6B3A"/>
-          </a:solidFill>
-          <a:ln w="12700">
-            <a:solidFill>
-              <a:srgbClr val="0F6B3A"/>
-            </a:solidFill>
-            <a:prstDash val="solid"/>
-          </a:ln>
-        </p:spPr>
-      </p:sp>
-      <p:sp>
-        <p:nvSpPr>
-          <p:cNvPr id="9" name="Text 7"/>
-          <p:cNvSpPr/>
-          <p:nvPr/>
-        </p:nvSpPr>
-        <p:spPr>
-          <a:xfrm>
-            <a:off x="3547872" y="1874520"/>
-            <a:ext cx="2194560" cy="640080"/>
-          </a:xfrm>
-          <a:prstGeom prst="rect">
-            <a:avLst/>
-          </a:prstGeom>
-          <a:noFill/>
-          <a:ln/>
-        </p:spPr>
-        <p:txBody>
-          <a:bodyPr wrap="square" rtlCol="0" anchor="ctr"/>
-          <a:lstStyle/>
-          <a:p>
-            <a:pPr indent="0" marL="0">
-              <a:buNone/>
-            </a:pPr>
-            <a:r>
-              <a:rPr lang="en-US" sz="2600" b="1" dirty="0">
-                <a:solidFill>
-                  <a:srgbClr val="8FD0AD"/>
-                </a:solidFill>
-                <a:latin typeface="맑은 고딕" pitchFamily="34" charset="0"/>
-                <a:ea typeface="맑은 고딕" pitchFamily="34" charset="-122"/>
-                <a:cs typeface="맑은 고딕" pitchFamily="34" charset="-120"/>
-              </a:rPr>
-              <a:t>Q2</a:t>
-            </a:r>
-            <a:endParaRPr lang="en-US" sz="2600" dirty="0"/>
-          </a:p>
-        </p:txBody>
-      </p:sp>
-      <p:sp>
-        <p:nvSpPr>
-          <p:cNvPr id="10" name="Text 8"/>
-          <p:cNvSpPr/>
-          <p:nvPr/>
-        </p:nvSpPr>
-        <p:spPr>
-          <a:xfrm>
-            <a:off x="3547872" y="2560320"/>
-            <a:ext cx="2240280" cy="457200"/>
-          </a:xfrm>
-          <a:prstGeom prst="rect">
-            <a:avLst/>
-          </a:prstGeom>
-          <a:noFill/>
-          <a:ln/>
-        </p:spPr>
-        <p:txBody>
-          <a:bodyPr wrap="square" rtlCol="0" anchor="ctr"/>
-          <a:lstStyle/>
-          <a:p>
-            <a:pPr indent="0" marL="0">
-              <a:buNone/>
-            </a:pPr>
-            <a:r>
-              <a:rPr lang="en-US" sz="1600" b="1" dirty="0">
-                <a:solidFill>
-                  <a:srgbClr val="FFFFFF"/>
-                </a:solidFill>
-                <a:latin typeface="맑은 고딕" pitchFamily="34" charset="0"/>
-                <a:ea typeface="맑은 고딕" pitchFamily="34" charset="-122"/>
-                <a:cs typeface="맑은 고딕" pitchFamily="34" charset="-120"/>
-              </a:rPr>
-              <a:t>AI 핵심 설계</a:t>
-            </a:r>
-            <a:endParaRPr lang="en-US" sz="1600" dirty="0"/>
-          </a:p>
-        </p:txBody>
-      </p:sp>
-      <p:sp>
-        <p:nvSpPr>
-          <p:cNvPr id="11" name="Text 9"/>
-          <p:cNvSpPr/>
-          <p:nvPr/>
-        </p:nvSpPr>
-        <p:spPr>
-          <a:xfrm>
-            <a:off x="3547872" y="3108960"/>
-            <a:ext cx="2240280" cy="1828800"/>
-          </a:xfrm>
-          <a:prstGeom prst="rect">
-            <a:avLst/>
-          </a:prstGeom>
-          <a:noFill/>
-          <a:ln/>
-        </p:spPr>
-        <p:txBody>
-          <a:bodyPr wrap="square" rtlCol="0" anchor="ctr"/>
-          <a:lstStyle/>
-          <a:p>
-            <a:pPr indent="0" marL="0">
-              <a:lnSpc>
-                <a:spcPct val="120000"/>
-              </a:lnSpc>
-              <a:buNone/>
-            </a:pPr>
-            <a:r>
-              <a:rPr lang="en-US" sz="1200" dirty="0">
-                <a:solidFill>
-                  <a:srgbClr val="E8F5EC"/>
-                </a:solidFill>
-                <a:latin typeface="맑은 고딕" pitchFamily="34" charset="0"/>
-                <a:ea typeface="맑은 고딕" pitchFamily="34" charset="-122"/>
-                <a:cs typeface="맑은 고딕" pitchFamily="34" charset="-120"/>
-              </a:rPr>
-              <a:t>Gemini LLM 탑재, pgvector RAG 임베딩 및 키워드+벡터 하이브리드 검색 구현</a:t>
-            </a:r>
-            <a:endParaRPr lang="en-US" sz="1200" dirty="0"/>
-          </a:p>
-        </p:txBody>
-      </p:sp>
-      <p:sp>
-        <p:nvSpPr>
-          <p:cNvPr id="12" name="Text 10"/>
-          <p:cNvSpPr/>
-          <p:nvPr/>
-        </p:nvSpPr>
-        <p:spPr>
-          <a:xfrm>
-            <a:off x="3547872" y="5074920"/>
-            <a:ext cx="2240280" cy="320040"/>
-          </a:xfrm>
-          <a:prstGeom prst="rect">
-            <a:avLst/>
-          </a:prstGeom>
-          <a:noFill/>
-          <a:ln/>
-        </p:spPr>
-        <p:txBody>
-          <a:bodyPr wrap="square" rtlCol="0" anchor="ctr"/>
-          <a:lstStyle/>
-          <a:p>
-            <a:pPr indent="0" marL="0">
-              <a:buNone/>
-            </a:pPr>
-            <a:r>
-              <a:rPr lang="en-US" sz="1100" b="1" dirty="0">
-                <a:solidFill>
-                  <a:srgbClr val="8FD0AD"/>
-                </a:solidFill>
-                <a:latin typeface="맑은 고딕" pitchFamily="34" charset="0"/>
-                <a:ea typeface="맑은 고딕" pitchFamily="34" charset="-122"/>
-                <a:cs typeface="맑은 고딕" pitchFamily="34" charset="-120"/>
-              </a:rPr>
-              <a:t>● 구현 완료</a:t>
-            </a:r>
-            <a:endParaRPr lang="en-US" sz="1100" dirty="0"/>
-          </a:p>
-        </p:txBody>
-      </p:sp>
-      <p:sp>
-        <p:nvSpPr>
-          <p:cNvPr id="13" name="Shape 11"/>
-          <p:cNvSpPr/>
-          <p:nvPr/>
-        </p:nvSpPr>
-        <p:spPr>
-          <a:xfrm>
-            <a:off x="6135624" y="1645920"/>
-            <a:ext cx="2651760" cy="3931920"/>
-          </a:xfrm>
-          <a:prstGeom prst="roundRect">
-            <a:avLst>
-              <a:gd name="adj" fmla="val 4138"/>
-            </a:avLst>
-          </a:prstGeom>
-          <a:solidFill>
-            <a:srgbClr val="0F6B3A"/>
-          </a:solidFill>
-          <a:ln w="12700">
-            <a:solidFill>
-              <a:srgbClr val="0F6B3A"/>
-            </a:solidFill>
-            <a:prstDash val="solid"/>
-          </a:ln>
-        </p:spPr>
-      </p:sp>
-      <p:sp>
-        <p:nvSpPr>
-          <p:cNvPr id="14" name="Text 12"/>
-          <p:cNvSpPr/>
-          <p:nvPr/>
-        </p:nvSpPr>
-        <p:spPr>
-          <a:xfrm>
-            <a:off x="6364224" y="1874520"/>
-            <a:ext cx="2194560" cy="640080"/>
-          </a:xfrm>
-          <a:prstGeom prst="rect">
-            <a:avLst/>
-          </a:prstGeom>
-          <a:noFill/>
-          <a:ln/>
-        </p:spPr>
-        <p:txBody>
-          <a:bodyPr wrap="square" rtlCol="0" anchor="ctr"/>
-          <a:lstStyle/>
-          <a:p>
-            <a:pPr indent="0" marL="0">
-              <a:buNone/>
-            </a:pPr>
-            <a:r>
-              <a:rPr lang="en-US" sz="2600" b="1" dirty="0">
-                <a:solidFill>
-                  <a:srgbClr val="8FD0AD"/>
-                </a:solidFill>
-                <a:latin typeface="맑은 고딕" pitchFamily="34" charset="0"/>
-                <a:ea typeface="맑은 고딕" pitchFamily="34" charset="-122"/>
-                <a:cs typeface="맑은 고딕" pitchFamily="34" charset="-120"/>
-              </a:rPr>
-              <a:t>Q3</a:t>
-            </a:r>
-            <a:endParaRPr lang="en-US" sz="2600" dirty="0"/>
-          </a:p>
-        </p:txBody>
-      </p:sp>
-      <p:sp>
-        <p:nvSpPr>
-          <p:cNvPr id="15" name="Text 13"/>
-          <p:cNvSpPr/>
-          <p:nvPr/>
-        </p:nvSpPr>
-        <p:spPr>
-          <a:xfrm>
-            <a:off x="6364224" y="2560320"/>
-            <a:ext cx="2240280" cy="457200"/>
-          </a:xfrm>
-          <a:prstGeom prst="rect">
-            <a:avLst/>
-          </a:prstGeom>
-          <a:noFill/>
-          <a:ln/>
-        </p:spPr>
-        <p:txBody>
-          <a:bodyPr wrap="square" rtlCol="0" anchor="ctr"/>
-          <a:lstStyle/>
-          <a:p>
-            <a:pPr indent="0" marL="0">
-              <a:buNone/>
-            </a:pPr>
-            <a:r>
-              <a:rPr lang="en-US" sz="1600" b="1" dirty="0">
-                <a:solidFill>
-                  <a:srgbClr val="FFFFFF"/>
-                </a:solidFill>
-                <a:latin typeface="맑은 고딕" pitchFamily="34" charset="0"/>
-                <a:ea typeface="맑은 고딕" pitchFamily="34" charset="-122"/>
-                <a:cs typeface="맑은 고딕" pitchFamily="34" charset="-120"/>
-              </a:rPr>
-              <a:t>MVP 런칭</a:t>
-            </a:r>
-            <a:endParaRPr lang="en-US" sz="1600" dirty="0"/>
-          </a:p>
-        </p:txBody>
-      </p:sp>
-      <p:sp>
-        <p:nvSpPr>
-          <p:cNvPr id="16" name="Text 14"/>
-          <p:cNvSpPr/>
-          <p:nvPr/>
-        </p:nvSpPr>
-        <p:spPr>
-          <a:xfrm>
-            <a:off x="6364224" y="3108960"/>
-            <a:ext cx="2240280" cy="1828800"/>
-          </a:xfrm>
-          <a:prstGeom prst="rect">
-            <a:avLst/>
-          </a:prstGeom>
-          <a:noFill/>
-          <a:ln/>
-        </p:spPr>
-        <p:txBody>
-          <a:bodyPr wrap="square" rtlCol="0" anchor="ctr"/>
-          <a:lstStyle/>
-          <a:p>
-            <a:pPr indent="0" marL="0">
-              <a:lnSpc>
-                <a:spcPct val="120000"/>
-              </a:lnSpc>
-              <a:buNone/>
-            </a:pPr>
-            <a:r>
-              <a:rPr lang="en-US" sz="1200" dirty="0">
-                <a:solidFill>
-                  <a:srgbClr val="E8F5EC"/>
-                </a:solidFill>
-                <a:latin typeface="맑은 고딕" pitchFamily="34" charset="0"/>
-                <a:ea typeface="맑은 고딕" pitchFamily="34" charset="-122"/>
-                <a:cs typeface="맑은 고딕" pitchFamily="34" charset="-120"/>
-              </a:rPr>
-              <a:t>반응형 웹앱(Vercel) 배포, 대화형 매칭 채팅·상세 카드·앱 알림 연동</a:t>
-            </a:r>
-            <a:endParaRPr lang="en-US" sz="1200" dirty="0"/>
-          </a:p>
-        </p:txBody>
-      </p:sp>
-      <p:sp>
-        <p:nvSpPr>
-          <p:cNvPr id="17" name="Text 15"/>
-          <p:cNvSpPr/>
-          <p:nvPr/>
-        </p:nvSpPr>
-        <p:spPr>
-          <a:xfrm>
-            <a:off x="6364224" y="5074920"/>
-            <a:ext cx="2240280" cy="320040"/>
-          </a:xfrm>
-          <a:prstGeom prst="rect">
-            <a:avLst/>
-          </a:prstGeom>
-          <a:noFill/>
-          <a:ln/>
-        </p:spPr>
-        <p:txBody>
-          <a:bodyPr wrap="square" rtlCol="0" anchor="ctr"/>
-          <a:lstStyle/>
-          <a:p>
-            <a:pPr indent="0" marL="0">
-              <a:buNone/>
-            </a:pPr>
-            <a:r>
-              <a:rPr lang="en-US" sz="1100" b="1" dirty="0">
-                <a:solidFill>
-                  <a:srgbClr val="8FD0AD"/>
-                </a:solidFill>
-                <a:latin typeface="맑은 고딕" pitchFamily="34" charset="0"/>
-                <a:ea typeface="맑은 고딕" pitchFamily="34" charset="-122"/>
-                <a:cs typeface="맑은 고딕" pitchFamily="34" charset="-120"/>
-              </a:rPr>
-              <a:t>● 구현 완료</a:t>
-            </a:r>
-            <a:endParaRPr lang="en-US" sz="1100" dirty="0"/>
-          </a:p>
-        </p:txBody>
-      </p:sp>
-      <p:sp>
-        <p:nvSpPr>
-          <p:cNvPr id="18" name="Shape 16"/>
-          <p:cNvSpPr/>
-          <p:nvPr/>
-        </p:nvSpPr>
-        <p:spPr>
-          <a:xfrm>
-            <a:off x="8951976" y="1645920"/>
-            <a:ext cx="2651760" cy="3931920"/>
-          </a:xfrm>
-          <a:prstGeom prst="roundRect">
-            <a:avLst>
-              <a:gd name="adj" fmla="val 4138"/>
-            </a:avLst>
-          </a:prstGeom>
-          <a:solidFill>
-            <a:srgbClr val="FFFFFF"/>
-          </a:solidFill>
-          <a:ln w="12700">
-            <a:solidFill>
-              <a:srgbClr val="DCE4DC"/>
-            </a:solidFill>
-            <a:prstDash val="solid"/>
-          </a:ln>
-        </p:spPr>
-      </p:sp>
-      <p:sp>
-        <p:nvSpPr>
-          <p:cNvPr id="19" name="Text 17"/>
-          <p:cNvSpPr/>
-          <p:nvPr/>
-        </p:nvSpPr>
-        <p:spPr>
-          <a:xfrm>
-            <a:off x="9180576" y="1874520"/>
-            <a:ext cx="2194560" cy="640080"/>
-          </a:xfrm>
-          <a:prstGeom prst="rect">
-            <a:avLst/>
-          </a:prstGeom>
-          <a:noFill/>
-          <a:ln/>
-        </p:spPr>
-        <p:txBody>
-          <a:bodyPr wrap="square" rtlCol="0" anchor="ctr"/>
-          <a:lstStyle/>
-          <a:p>
-            <a:pPr indent="0" marL="0">
-              <a:buNone/>
-            </a:pPr>
-            <a:r>
-              <a:rPr lang="en-US" sz="2600" b="1" dirty="0">
-                <a:solidFill>
-                  <a:srgbClr val="18A058"/>
-                </a:solidFill>
-                <a:latin typeface="맑은 고딕" pitchFamily="34" charset="0"/>
-                <a:ea typeface="맑은 고딕" pitchFamily="34" charset="-122"/>
-                <a:cs typeface="맑은 고딕" pitchFamily="34" charset="-120"/>
-              </a:rPr>
-              <a:t>Q4</a:t>
-            </a:r>
-            <a:endParaRPr lang="en-US" sz="2600" dirty="0"/>
-          </a:p>
-        </p:txBody>
-      </p:sp>
-      <p:sp>
-        <p:nvSpPr>
-          <p:cNvPr id="20" name="Text 18"/>
-          <p:cNvSpPr/>
-          <p:nvPr/>
-        </p:nvSpPr>
-        <p:spPr>
-          <a:xfrm>
-            <a:off x="9180576" y="2560320"/>
-            <a:ext cx="2240280" cy="457200"/>
-          </a:xfrm>
-          <a:prstGeom prst="rect">
-            <a:avLst/>
-          </a:prstGeom>
-          <a:noFill/>
-          <a:ln/>
-        </p:spPr>
-        <p:txBody>
-          <a:bodyPr wrap="square" rtlCol="0" anchor="ctr"/>
-          <a:lstStyle/>
-          <a:p>
-            <a:pPr indent="0" marL="0">
-              <a:buNone/>
-            </a:pPr>
-            <a:r>
-              <a:rPr lang="en-US" sz="1600" b="1" dirty="0">
-                <a:solidFill>
-                  <a:srgbClr val="1B1C1E"/>
-                </a:solidFill>
-                <a:latin typeface="맑은 고딕" pitchFamily="34" charset="0"/>
-                <a:ea typeface="맑은 고딕" pitchFamily="34" charset="-122"/>
-                <a:cs typeface="맑은 고딕" pitchFamily="34" charset="-120"/>
-              </a:rPr>
-              <a:t>기능 고도화</a:t>
-            </a:r>
-            <a:endParaRPr lang="en-US" sz="1600" dirty="0"/>
-          </a:p>
-        </p:txBody>
-      </p:sp>
-      <p:sp>
-        <p:nvSpPr>
-          <p:cNvPr id="21" name="Text 19"/>
-          <p:cNvSpPr/>
-          <p:nvPr/>
-        </p:nvSpPr>
-        <p:spPr>
-          <a:xfrm>
-            <a:off x="9180576" y="3108960"/>
-            <a:ext cx="2240280" cy="1828800"/>
-          </a:xfrm>
-          <a:prstGeom prst="rect">
-            <a:avLst/>
-          </a:prstGeom>
-          <a:noFill/>
-          <a:ln/>
-        </p:spPr>
-        <p:txBody>
-          <a:bodyPr wrap="square" rtlCol="0" anchor="ctr"/>
-          <a:lstStyle/>
-          <a:p>
-            <a:pPr indent="0" marL="0">
-              <a:lnSpc>
-                <a:spcPct val="120000"/>
-              </a:lnSpc>
-              <a:buNone/>
-            </a:pPr>
-            <a:r>
-              <a:rPr lang="en-US" sz="1200" dirty="0">
+              <a:rPr lang="en-US" sz="1300" i="1" dirty="0">
                 <a:solidFill>
                   <a:srgbClr val="6A6F76"/>
                 </a:solidFill>
@@ -7771,54 +8609,15 @@
                 <a:ea typeface="맑은 고딕" pitchFamily="34" charset="-122"/>
                 <a:cs typeface="맑은 고딕" pitchFamily="34" charset="-120"/>
               </a:rPr>
-              <a:t>PWA·카카오 알림톡 연동, 공공 마이데이터 기반 소득·자격 자동 파싱</a:t>
-            </a:r>
-            <a:endParaRPr lang="en-US" sz="1200" dirty="0"/>
-          </a:p>
-        </p:txBody>
-      </p:sp>
-      <p:sp>
-        <p:nvSpPr>
-          <p:cNvPr id="22" name="Text 20"/>
-          <p:cNvSpPr/>
-          <p:nvPr/>
-        </p:nvSpPr>
-        <p:spPr>
-          <a:xfrm>
-            <a:off x="9180576" y="5074920"/>
-            <a:ext cx="2240280" cy="320040"/>
-          </a:xfrm>
-          <a:prstGeom prst="rect">
-            <a:avLst/>
-          </a:prstGeom>
-          <a:noFill/>
-          <a:ln/>
-        </p:spPr>
-        <p:txBody>
-          <a:bodyPr wrap="square" rtlCol="0" anchor="ctr"/>
-          <a:lstStyle/>
-          <a:p>
-            <a:pPr indent="0" marL="0">
-              <a:buNone/>
-            </a:pPr>
-            <a:r>
-              <a:rPr lang="en-US" sz="1100" b="1" dirty="0">
-                <a:solidFill>
-                  <a:srgbClr val="6A6F76"/>
-                </a:solidFill>
-                <a:latin typeface="맑은 고딕" pitchFamily="34" charset="0"/>
-                <a:ea typeface="맑은 고딕" pitchFamily="34" charset="-122"/>
-                <a:cs typeface="맑은 고딕" pitchFamily="34" charset="-120"/>
-              </a:rPr>
-              <a:t>○ 예정</a:t>
-            </a:r>
-            <a:endParaRPr lang="en-US" sz="1100" dirty="0"/>
-          </a:p>
-        </p:txBody>
-      </p:sp>
-      <p:sp>
-        <p:nvSpPr>
-          <p:cNvPr id="23" name="Text 21"/>
+              <a:t>정부24가 전체의 약 2/3를 차지하며, 복지로 지자체가 ‘우리 동네’ 밀착형 혜택을 보강합니다.</a:t>
+            </a:r>
+            <a:endParaRPr lang="en-US" sz="1300" dirty="0"/>
+          </a:p>
+        </p:txBody>
+      </p:sp>
+      <p:sp>
+        <p:nvSpPr>
+          <p:cNvPr id="15" name="Text 12"/>
           <p:cNvSpPr/>
           <p:nvPr/>
         </p:nvSpPr>
@@ -7837,7 +8636,7 @@
           <a:bodyPr wrap="square" rtlCol="0" anchor="ctr"/>
           <a:lstStyle/>
           <a:p>
-            <a:pPr algn="l" indent="0" marL="0">
+            <a:pPr indent="0" marL="0">
               <a:buNone/>
             </a:pPr>
             <a:r>
@@ -7849,7 +8648,7 @@
                 <a:ea typeface="맑은 고딕" pitchFamily="34" charset="-122"/>
                 <a:cs typeface="맑은 고딕" pitchFamily="34" charset="-120"/>
               </a:rPr>
-              <a:t>8 / 12 · 기술 경쟁력 및 로드맵</a:t>
+              <a:t>8 / 14 · 핵심 기능 및 기술 구조</a:t>
             </a:r>
             <a:endParaRPr lang="en-US" sz="900" dirty="0"/>
           </a:p>
@@ -7857,7 +8656,7 @@
       </p:sp>
       <p:sp>
         <p:nvSpPr>
-          <p:cNvPr id="24" name="Text 22"/>
+          <p:cNvPr id="16" name="Text 13"/>
           <p:cNvSpPr/>
           <p:nvPr/>
         </p:nvSpPr>
@@ -7935,7 +8734,7 @@
         <p:spPr>
           <a:xfrm>
             <a:off x="502920" y="457200"/>
-            <a:ext cx="10972800" cy="640080"/>
+            <a:ext cx="11155680" cy="640080"/>
           </a:xfrm>
           <a:prstGeom prst="rect">
             <a:avLst/>
@@ -7959,7 +8758,7 @@
                 <a:ea typeface="맑은 고딕" pitchFamily="34" charset="-122"/>
                 <a:cs typeface="맑은 고딕" pitchFamily="34" charset="-120"/>
               </a:rPr>
-              <a:t>검색 지연 없는 실시간 하이브리드 RAG</a:t>
+              <a:t>프로젝트 개발 및 서비스 로드맵</a:t>
             </a:r>
             <a:endParaRPr lang="en-US" sz="3000" dirty="0"/>
           </a:p>
@@ -7973,18 +8772,23 @@
         </p:nvSpPr>
         <p:spPr>
           <a:xfrm>
-            <a:off x="502920" y="1554480"/>
-            <a:ext cx="4023360" cy="4206240"/>
+            <a:off x="502920" y="1645920"/>
+            <a:ext cx="2651760" cy="3931920"/>
           </a:xfrm>
           <a:prstGeom prst="roundRect">
             <a:avLst>
-              <a:gd name="adj" fmla="val 2727"/>
+              <a:gd name="adj" fmla="val 4138"/>
             </a:avLst>
           </a:prstGeom>
           <a:solidFill>
             <a:srgbClr val="0F6B3A"/>
           </a:solidFill>
-          <a:ln/>
+          <a:ln w="12700">
+            <a:solidFill>
+              <a:srgbClr val="0F6B3A"/>
+            </a:solidFill>
+            <a:prstDash val="solid"/>
+          </a:ln>
         </p:spPr>
       </p:sp>
       <p:sp>
@@ -7995,24 +8799,63 @@
         </p:nvSpPr>
         <p:spPr>
           <a:xfrm>
-            <a:off x="640080" y="2194560"/>
-            <a:ext cx="3749040" cy="1097280"/>
-          </a:xfrm>
-          <a:prstGeom prst="rect">
-            <a:avLst/>
-          </a:prstGeom>
-          <a:noFill/>
-          <a:ln/>
-        </p:spPr>
-        <p:txBody>
-          <a:bodyPr wrap="square" rtlCol="0" anchor="ctr"/>
-          <a:lstStyle/>
-          <a:p>
-            <a:pPr algn="ctr" indent="0" marL="0">
-              <a:buNone/>
-            </a:pPr>
-            <a:r>
-              <a:rPr lang="en-US" sz="5600" b="1" dirty="0">
+            <a:off x="731520" y="1874520"/>
+            <a:ext cx="2194560" cy="640080"/>
+          </a:xfrm>
+          <a:prstGeom prst="rect">
+            <a:avLst/>
+          </a:prstGeom>
+          <a:noFill/>
+          <a:ln/>
+        </p:spPr>
+        <p:txBody>
+          <a:bodyPr wrap="square" rtlCol="0" anchor="ctr"/>
+          <a:lstStyle/>
+          <a:p>
+            <a:pPr indent="0" marL="0">
+              <a:buNone/>
+            </a:pPr>
+            <a:r>
+              <a:rPr lang="en-US" sz="2600" b="1" dirty="0">
+                <a:solidFill>
+                  <a:srgbClr val="8FD0AD"/>
+                </a:solidFill>
+                <a:latin typeface="맑은 고딕" pitchFamily="34" charset="0"/>
+                <a:ea typeface="맑은 고딕" pitchFamily="34" charset="-122"/>
+                <a:cs typeface="맑은 고딕" pitchFamily="34" charset="-120"/>
+              </a:rPr>
+              <a:t>Q1</a:t>
+            </a:r>
+            <a:endParaRPr lang="en-US" sz="2600" dirty="0"/>
+          </a:p>
+        </p:txBody>
+      </p:sp>
+      <p:sp>
+        <p:nvSpPr>
+          <p:cNvPr id="5" name="Text 3"/>
+          <p:cNvSpPr/>
+          <p:nvPr/>
+        </p:nvSpPr>
+        <p:spPr>
+          <a:xfrm>
+            <a:off x="731520" y="2560320"/>
+            <a:ext cx="2240280" cy="457200"/>
+          </a:xfrm>
+          <a:prstGeom prst="rect">
+            <a:avLst/>
+          </a:prstGeom>
+          <a:noFill/>
+          <a:ln/>
+        </p:spPr>
+        <p:txBody>
+          <a:bodyPr wrap="square" rtlCol="0" anchor="ctr"/>
+          <a:lstStyle/>
+          <a:p>
+            <a:pPr indent="0" marL="0">
+              <a:buNone/>
+            </a:pPr>
+            <a:r>
+              <a:rPr lang="en-US" sz="1600" b="1" dirty="0">
                 <a:solidFill>
                   <a:srgbClr val="FFFFFF"/>
                 </a:solidFill>
@@ -8020,41 +8863,41 @@
                 <a:ea typeface="맑은 고딕" pitchFamily="34" charset="-122"/>
                 <a:cs typeface="맑은 고딕" pitchFamily="34" charset="-120"/>
               </a:rPr>
-              <a:t>15,981</a:t>
-            </a:r>
-            <a:endParaRPr lang="en-US" sz="5600" dirty="0"/>
-          </a:p>
-        </p:txBody>
-      </p:sp>
-      <p:sp>
-        <p:nvSpPr>
-          <p:cNvPr id="5" name="Text 3"/>
-          <p:cNvSpPr/>
-          <p:nvPr/>
-        </p:nvSpPr>
-        <p:spPr>
-          <a:xfrm>
-            <a:off x="640080" y="3383280"/>
-            <a:ext cx="3749040" cy="914400"/>
-          </a:xfrm>
-          <a:prstGeom prst="rect">
-            <a:avLst/>
-          </a:prstGeom>
-          <a:noFill/>
-          <a:ln/>
-        </p:spPr>
-        <p:txBody>
-          <a:bodyPr wrap="square" rtlCol="0" anchor="ctr"/>
-          <a:lstStyle/>
-          <a:p>
-            <a:pPr algn="ctr" indent="0" marL="0">
+              <a:t>데이터 기획</a:t>
+            </a:r>
+            <a:endParaRPr lang="en-US" sz="1600" dirty="0"/>
+          </a:p>
+        </p:txBody>
+      </p:sp>
+      <p:sp>
+        <p:nvSpPr>
+          <p:cNvPr id="6" name="Text 4"/>
+          <p:cNvSpPr/>
+          <p:nvPr/>
+        </p:nvSpPr>
+        <p:spPr>
+          <a:xfrm>
+            <a:off x="731520" y="3108960"/>
+            <a:ext cx="2240280" cy="1828800"/>
+          </a:xfrm>
+          <a:prstGeom prst="rect">
+            <a:avLst/>
+          </a:prstGeom>
+          <a:noFill/>
+          <a:ln/>
+        </p:spPr>
+        <p:txBody>
+          <a:bodyPr wrap="square" rtlCol="0" anchor="ctr"/>
+          <a:lstStyle/>
+          <a:p>
+            <a:pPr indent="0" marL="0">
               <a:lnSpc>
                 <a:spcPct val="120000"/>
               </a:lnSpc>
               <a:buNone/>
             </a:pPr>
             <a:r>
-              <a:rPr lang="en-US" sz="1400" dirty="0">
+              <a:rPr lang="en-US" sz="1200" dirty="0">
                 <a:solidFill>
                   <a:srgbClr val="E8F5EC"/>
                 </a:solidFill>
@@ -8062,19 +8905,185 @@
                 <a:ea typeface="맑은 고딕" pitchFamily="34" charset="-122"/>
                 <a:cs typeface="맑은 고딕" pitchFamily="34" charset="-120"/>
               </a:rPr>
-              <a:t>수집·정규화·임베딩 완료된 혜택 수</a:t>
-            </a:r>
-            <a:endParaRPr lang="en-US" sz="1400" dirty="0"/>
-          </a:p>
-          <a:p>
-            <a:pPr algn="ctr" indent="0" marL="0">
+              <a:t>PRD·TRD 확정, 공공 API 동기화 파이프라인 및 정규화 체계 완비</a:t>
+            </a:r>
+            <a:endParaRPr lang="en-US" sz="1200" dirty="0"/>
+          </a:p>
+        </p:txBody>
+      </p:sp>
+      <p:sp>
+        <p:nvSpPr>
+          <p:cNvPr id="7" name="Text 5"/>
+          <p:cNvSpPr/>
+          <p:nvPr/>
+        </p:nvSpPr>
+        <p:spPr>
+          <a:xfrm>
+            <a:off x="731520" y="5074920"/>
+            <a:ext cx="2240280" cy="320040"/>
+          </a:xfrm>
+          <a:prstGeom prst="rect">
+            <a:avLst/>
+          </a:prstGeom>
+          <a:noFill/>
+          <a:ln/>
+        </p:spPr>
+        <p:txBody>
+          <a:bodyPr wrap="square" rtlCol="0" anchor="ctr"/>
+          <a:lstStyle/>
+          <a:p>
+            <a:pPr indent="0" marL="0">
+              <a:buNone/>
+            </a:pPr>
+            <a:r>
+              <a:rPr lang="en-US" sz="1100" b="1" dirty="0">
+                <a:solidFill>
+                  <a:srgbClr val="8FD0AD"/>
+                </a:solidFill>
+                <a:latin typeface="맑은 고딕" pitchFamily="34" charset="0"/>
+                <a:ea typeface="맑은 고딕" pitchFamily="34" charset="-122"/>
+                <a:cs typeface="맑은 고딕" pitchFamily="34" charset="-120"/>
+              </a:rPr>
+              <a:t>● 구현 완료</a:t>
+            </a:r>
+            <a:endParaRPr lang="en-US" sz="1100" dirty="0"/>
+          </a:p>
+        </p:txBody>
+      </p:sp>
+      <p:sp>
+        <p:nvSpPr>
+          <p:cNvPr id="8" name="Shape 6"/>
+          <p:cNvSpPr/>
+          <p:nvPr/>
+        </p:nvSpPr>
+        <p:spPr>
+          <a:xfrm>
+            <a:off x="3319272" y="1645920"/>
+            <a:ext cx="2651760" cy="3931920"/>
+          </a:xfrm>
+          <a:prstGeom prst="roundRect">
+            <a:avLst>
+              <a:gd name="adj" fmla="val 4138"/>
+            </a:avLst>
+          </a:prstGeom>
+          <a:solidFill>
+            <a:srgbClr val="0F6B3A"/>
+          </a:solidFill>
+          <a:ln w="12700">
+            <a:solidFill>
+              <a:srgbClr val="0F6B3A"/>
+            </a:solidFill>
+            <a:prstDash val="solid"/>
+          </a:ln>
+        </p:spPr>
+      </p:sp>
+      <p:sp>
+        <p:nvSpPr>
+          <p:cNvPr id="9" name="Text 7"/>
+          <p:cNvSpPr/>
+          <p:nvPr/>
+        </p:nvSpPr>
+        <p:spPr>
+          <a:xfrm>
+            <a:off x="3547872" y="1874520"/>
+            <a:ext cx="2194560" cy="640080"/>
+          </a:xfrm>
+          <a:prstGeom prst="rect">
+            <a:avLst/>
+          </a:prstGeom>
+          <a:noFill/>
+          <a:ln/>
+        </p:spPr>
+        <p:txBody>
+          <a:bodyPr wrap="square" rtlCol="0" anchor="ctr"/>
+          <a:lstStyle/>
+          <a:p>
+            <a:pPr indent="0" marL="0">
+              <a:buNone/>
+            </a:pPr>
+            <a:r>
+              <a:rPr lang="en-US" sz="2600" b="1" dirty="0">
+                <a:solidFill>
+                  <a:srgbClr val="8FD0AD"/>
+                </a:solidFill>
+                <a:latin typeface="맑은 고딕" pitchFamily="34" charset="0"/>
+                <a:ea typeface="맑은 고딕" pitchFamily="34" charset="-122"/>
+                <a:cs typeface="맑은 고딕" pitchFamily="34" charset="-120"/>
+              </a:rPr>
+              <a:t>Q2</a:t>
+            </a:r>
+            <a:endParaRPr lang="en-US" sz="2600" dirty="0"/>
+          </a:p>
+        </p:txBody>
+      </p:sp>
+      <p:sp>
+        <p:nvSpPr>
+          <p:cNvPr id="10" name="Text 8"/>
+          <p:cNvSpPr/>
+          <p:nvPr/>
+        </p:nvSpPr>
+        <p:spPr>
+          <a:xfrm>
+            <a:off x="3547872" y="2560320"/>
+            <a:ext cx="2240280" cy="457200"/>
+          </a:xfrm>
+          <a:prstGeom prst="rect">
+            <a:avLst/>
+          </a:prstGeom>
+          <a:noFill/>
+          <a:ln/>
+        </p:spPr>
+        <p:txBody>
+          <a:bodyPr wrap="square" rtlCol="0" anchor="ctr"/>
+          <a:lstStyle/>
+          <a:p>
+            <a:pPr indent="0" marL="0">
+              <a:buNone/>
+            </a:pPr>
+            <a:r>
+              <a:rPr lang="en-US" sz="1600" b="1" dirty="0">
+                <a:solidFill>
+                  <a:srgbClr val="FFFFFF"/>
+                </a:solidFill>
+                <a:latin typeface="맑은 고딕" pitchFamily="34" charset="0"/>
+                <a:ea typeface="맑은 고딕" pitchFamily="34" charset="-122"/>
+                <a:cs typeface="맑은 고딕" pitchFamily="34" charset="-120"/>
+              </a:rPr>
+              <a:t>AI 핵심 설계</a:t>
+            </a:r>
+            <a:endParaRPr lang="en-US" sz="1600" dirty="0"/>
+          </a:p>
+        </p:txBody>
+      </p:sp>
+      <p:sp>
+        <p:nvSpPr>
+          <p:cNvPr id="11" name="Text 9"/>
+          <p:cNvSpPr/>
+          <p:nvPr/>
+        </p:nvSpPr>
+        <p:spPr>
+          <a:xfrm>
+            <a:off x="3547872" y="3108960"/>
+            <a:ext cx="2240280" cy="1828800"/>
+          </a:xfrm>
+          <a:prstGeom prst="rect">
+            <a:avLst/>
+          </a:prstGeom>
+          <a:noFill/>
+          <a:ln/>
+        </p:spPr>
+        <p:txBody>
+          <a:bodyPr wrap="square" rtlCol="0" anchor="ctr"/>
+          <a:lstStyle/>
+          <a:p>
+            <a:pPr indent="0" marL="0">
               <a:lnSpc>
                 <a:spcPct val="120000"/>
               </a:lnSpc>
               <a:buNone/>
             </a:pPr>
             <a:r>
-              <a:rPr lang="en-US" sz="1400" dirty="0">
+              <a:rPr lang="en-US" sz="1200" dirty="0">
                 <a:solidFill>
                   <a:srgbClr val="E8F5EC"/>
                 </a:solidFill>
@@ -8082,22 +9091,166 @@
                 <a:ea typeface="맑은 고딕" pitchFamily="34" charset="-122"/>
                 <a:cs typeface="맑은 고딕" pitchFamily="34" charset="-120"/>
               </a:rPr>
-              <a:t>(벡터 임베딩 100% 적재)</a:t>
-            </a:r>
-            <a:endParaRPr lang="en-US" sz="1400" dirty="0"/>
-          </a:p>
-        </p:txBody>
-      </p:sp>
-      <p:sp>
-        <p:nvSpPr>
-          <p:cNvPr id="6" name="Text 4"/>
-          <p:cNvSpPr/>
-          <p:nvPr/>
-        </p:nvSpPr>
-        <p:spPr>
-          <a:xfrm>
-            <a:off x="4846320" y="1600200"/>
-            <a:ext cx="6858000" cy="1554480"/>
+              <a:t>Gemini LLM 탑재, pgvector RAG 임베딩 및 키워드+벡터 하이브리드 검색 구현</a:t>
+            </a:r>
+            <a:endParaRPr lang="en-US" sz="1200" dirty="0"/>
+          </a:p>
+        </p:txBody>
+      </p:sp>
+      <p:sp>
+        <p:nvSpPr>
+          <p:cNvPr id="12" name="Text 10"/>
+          <p:cNvSpPr/>
+          <p:nvPr/>
+        </p:nvSpPr>
+        <p:spPr>
+          <a:xfrm>
+            <a:off x="3547872" y="5074920"/>
+            <a:ext cx="2240280" cy="320040"/>
+          </a:xfrm>
+          <a:prstGeom prst="rect">
+            <a:avLst/>
+          </a:prstGeom>
+          <a:noFill/>
+          <a:ln/>
+        </p:spPr>
+        <p:txBody>
+          <a:bodyPr wrap="square" rtlCol="0" anchor="ctr"/>
+          <a:lstStyle/>
+          <a:p>
+            <a:pPr indent="0" marL="0">
+              <a:buNone/>
+            </a:pPr>
+            <a:r>
+              <a:rPr lang="en-US" sz="1100" b="1" dirty="0">
+                <a:solidFill>
+                  <a:srgbClr val="8FD0AD"/>
+                </a:solidFill>
+                <a:latin typeface="맑은 고딕" pitchFamily="34" charset="0"/>
+                <a:ea typeface="맑은 고딕" pitchFamily="34" charset="-122"/>
+                <a:cs typeface="맑은 고딕" pitchFamily="34" charset="-120"/>
+              </a:rPr>
+              <a:t>● 구현 완료</a:t>
+            </a:r>
+            <a:endParaRPr lang="en-US" sz="1100" dirty="0"/>
+          </a:p>
+        </p:txBody>
+      </p:sp>
+      <p:sp>
+        <p:nvSpPr>
+          <p:cNvPr id="13" name="Shape 11"/>
+          <p:cNvSpPr/>
+          <p:nvPr/>
+        </p:nvSpPr>
+        <p:spPr>
+          <a:xfrm>
+            <a:off x="6135624" y="1645920"/>
+            <a:ext cx="2651760" cy="3931920"/>
+          </a:xfrm>
+          <a:prstGeom prst="roundRect">
+            <a:avLst>
+              <a:gd name="adj" fmla="val 4138"/>
+            </a:avLst>
+          </a:prstGeom>
+          <a:solidFill>
+            <a:srgbClr val="0F6B3A"/>
+          </a:solidFill>
+          <a:ln w="12700">
+            <a:solidFill>
+              <a:srgbClr val="0F6B3A"/>
+            </a:solidFill>
+            <a:prstDash val="solid"/>
+          </a:ln>
+        </p:spPr>
+      </p:sp>
+      <p:sp>
+        <p:nvSpPr>
+          <p:cNvPr id="14" name="Text 12"/>
+          <p:cNvSpPr/>
+          <p:nvPr/>
+        </p:nvSpPr>
+        <p:spPr>
+          <a:xfrm>
+            <a:off x="6364224" y="1874520"/>
+            <a:ext cx="2194560" cy="640080"/>
+          </a:xfrm>
+          <a:prstGeom prst="rect">
+            <a:avLst/>
+          </a:prstGeom>
+          <a:noFill/>
+          <a:ln/>
+        </p:spPr>
+        <p:txBody>
+          <a:bodyPr wrap="square" rtlCol="0" anchor="ctr"/>
+          <a:lstStyle/>
+          <a:p>
+            <a:pPr indent="0" marL="0">
+              <a:buNone/>
+            </a:pPr>
+            <a:r>
+              <a:rPr lang="en-US" sz="2600" b="1" dirty="0">
+                <a:solidFill>
+                  <a:srgbClr val="8FD0AD"/>
+                </a:solidFill>
+                <a:latin typeface="맑은 고딕" pitchFamily="34" charset="0"/>
+                <a:ea typeface="맑은 고딕" pitchFamily="34" charset="-122"/>
+                <a:cs typeface="맑은 고딕" pitchFamily="34" charset="-120"/>
+              </a:rPr>
+              <a:t>Q3</a:t>
+            </a:r>
+            <a:endParaRPr lang="en-US" sz="2600" dirty="0"/>
+          </a:p>
+        </p:txBody>
+      </p:sp>
+      <p:sp>
+        <p:nvSpPr>
+          <p:cNvPr id="15" name="Text 13"/>
+          <p:cNvSpPr/>
+          <p:nvPr/>
+        </p:nvSpPr>
+        <p:spPr>
+          <a:xfrm>
+            <a:off x="6364224" y="2560320"/>
+            <a:ext cx="2240280" cy="457200"/>
+          </a:xfrm>
+          <a:prstGeom prst="rect">
+            <a:avLst/>
+          </a:prstGeom>
+          <a:noFill/>
+          <a:ln/>
+        </p:spPr>
+        <p:txBody>
+          <a:bodyPr wrap="square" rtlCol="0" anchor="ctr"/>
+          <a:lstStyle/>
+          <a:p>
+            <a:pPr indent="0" marL="0">
+              <a:buNone/>
+            </a:pPr>
+            <a:r>
+              <a:rPr lang="en-US" sz="1600" b="1" dirty="0">
+                <a:solidFill>
+                  <a:srgbClr val="FFFFFF"/>
+                </a:solidFill>
+                <a:latin typeface="맑은 고딕" pitchFamily="34" charset="0"/>
+                <a:ea typeface="맑은 고딕" pitchFamily="34" charset="-122"/>
+                <a:cs typeface="맑은 고딕" pitchFamily="34" charset="-120"/>
+              </a:rPr>
+              <a:t>MVP 런칭</a:t>
+            </a:r>
+            <a:endParaRPr lang="en-US" sz="1600" dirty="0"/>
+          </a:p>
+        </p:txBody>
+      </p:sp>
+      <p:sp>
+        <p:nvSpPr>
+          <p:cNvPr id="16" name="Text 14"/>
+          <p:cNvSpPr/>
+          <p:nvPr/>
+        </p:nvSpPr>
+        <p:spPr>
+          <a:xfrm>
+            <a:off x="6364224" y="3108960"/>
+            <a:ext cx="2240280" cy="1828800"/>
           </a:xfrm>
           <a:prstGeom prst="rect">
             <a:avLst/>
@@ -8111,12 +9264,198 @@
           <a:p>
             <a:pPr indent="0" marL="0">
               <a:lnSpc>
-                <a:spcPct val="130000"/>
+                <a:spcPct val="120000"/>
               </a:lnSpc>
               <a:buNone/>
             </a:pPr>
             <a:r>
-              <a:rPr lang="en-US" sz="1500" dirty="0">
+              <a:rPr lang="en-US" sz="1200" dirty="0">
+                <a:solidFill>
+                  <a:srgbClr val="E8F5EC"/>
+                </a:solidFill>
+                <a:latin typeface="맑은 고딕" pitchFamily="34" charset="0"/>
+                <a:ea typeface="맑은 고딕" pitchFamily="34" charset="-122"/>
+                <a:cs typeface="맑은 고딕" pitchFamily="34" charset="-120"/>
+              </a:rPr>
+              <a:t>반응형 웹앱(Vercel) 배포, 대화형 매칭 채팅·상세 카드·앱 알림 연동</a:t>
+            </a:r>
+            <a:endParaRPr lang="en-US" sz="1200" dirty="0"/>
+          </a:p>
+        </p:txBody>
+      </p:sp>
+      <p:sp>
+        <p:nvSpPr>
+          <p:cNvPr id="17" name="Text 15"/>
+          <p:cNvSpPr/>
+          <p:nvPr/>
+        </p:nvSpPr>
+        <p:spPr>
+          <a:xfrm>
+            <a:off x="6364224" y="5074920"/>
+            <a:ext cx="2240280" cy="320040"/>
+          </a:xfrm>
+          <a:prstGeom prst="rect">
+            <a:avLst/>
+          </a:prstGeom>
+          <a:noFill/>
+          <a:ln/>
+        </p:spPr>
+        <p:txBody>
+          <a:bodyPr wrap="square" rtlCol="0" anchor="ctr"/>
+          <a:lstStyle/>
+          <a:p>
+            <a:pPr indent="0" marL="0">
+              <a:buNone/>
+            </a:pPr>
+            <a:r>
+              <a:rPr lang="en-US" sz="1100" b="1" dirty="0">
+                <a:solidFill>
+                  <a:srgbClr val="8FD0AD"/>
+                </a:solidFill>
+                <a:latin typeface="맑은 고딕" pitchFamily="34" charset="0"/>
+                <a:ea typeface="맑은 고딕" pitchFamily="34" charset="-122"/>
+                <a:cs typeface="맑은 고딕" pitchFamily="34" charset="-120"/>
+              </a:rPr>
+              <a:t>● 구현 완료</a:t>
+            </a:r>
+            <a:endParaRPr lang="en-US" sz="1100" dirty="0"/>
+          </a:p>
+        </p:txBody>
+      </p:sp>
+      <p:sp>
+        <p:nvSpPr>
+          <p:cNvPr id="18" name="Shape 16"/>
+          <p:cNvSpPr/>
+          <p:nvPr/>
+        </p:nvSpPr>
+        <p:spPr>
+          <a:xfrm>
+            <a:off x="8951976" y="1645920"/>
+            <a:ext cx="2651760" cy="3931920"/>
+          </a:xfrm>
+          <a:prstGeom prst="roundRect">
+            <a:avLst>
+              <a:gd name="adj" fmla="val 4138"/>
+            </a:avLst>
+          </a:prstGeom>
+          <a:solidFill>
+            <a:srgbClr val="FFFFFF"/>
+          </a:solidFill>
+          <a:ln w="12700">
+            <a:solidFill>
+              <a:srgbClr val="DCE4DC"/>
+            </a:solidFill>
+            <a:prstDash val="solid"/>
+          </a:ln>
+        </p:spPr>
+      </p:sp>
+      <p:sp>
+        <p:nvSpPr>
+          <p:cNvPr id="19" name="Text 17"/>
+          <p:cNvSpPr/>
+          <p:nvPr/>
+        </p:nvSpPr>
+        <p:spPr>
+          <a:xfrm>
+            <a:off x="9180576" y="1874520"/>
+            <a:ext cx="2194560" cy="640080"/>
+          </a:xfrm>
+          <a:prstGeom prst="rect">
+            <a:avLst/>
+          </a:prstGeom>
+          <a:noFill/>
+          <a:ln/>
+        </p:spPr>
+        <p:txBody>
+          <a:bodyPr wrap="square" rtlCol="0" anchor="ctr"/>
+          <a:lstStyle/>
+          <a:p>
+            <a:pPr indent="0" marL="0">
+              <a:buNone/>
+            </a:pPr>
+            <a:r>
+              <a:rPr lang="en-US" sz="2600" b="1" dirty="0">
+                <a:solidFill>
+                  <a:srgbClr val="18A058"/>
+                </a:solidFill>
+                <a:latin typeface="맑은 고딕" pitchFamily="34" charset="0"/>
+                <a:ea typeface="맑은 고딕" pitchFamily="34" charset="-122"/>
+                <a:cs typeface="맑은 고딕" pitchFamily="34" charset="-120"/>
+              </a:rPr>
+              <a:t>Q4</a:t>
+            </a:r>
+            <a:endParaRPr lang="en-US" sz="2600" dirty="0"/>
+          </a:p>
+        </p:txBody>
+      </p:sp>
+      <p:sp>
+        <p:nvSpPr>
+          <p:cNvPr id="20" name="Text 18"/>
+          <p:cNvSpPr/>
+          <p:nvPr/>
+        </p:nvSpPr>
+        <p:spPr>
+          <a:xfrm>
+            <a:off x="9180576" y="2560320"/>
+            <a:ext cx="2240280" cy="457200"/>
+          </a:xfrm>
+          <a:prstGeom prst="rect">
+            <a:avLst/>
+          </a:prstGeom>
+          <a:noFill/>
+          <a:ln/>
+        </p:spPr>
+        <p:txBody>
+          <a:bodyPr wrap="square" rtlCol="0" anchor="ctr"/>
+          <a:lstStyle/>
+          <a:p>
+            <a:pPr indent="0" marL="0">
+              <a:buNone/>
+            </a:pPr>
+            <a:r>
+              <a:rPr lang="en-US" sz="1600" b="1" dirty="0">
+                <a:solidFill>
+                  <a:srgbClr val="1B1C1E"/>
+                </a:solidFill>
+                <a:latin typeface="맑은 고딕" pitchFamily="34" charset="0"/>
+                <a:ea typeface="맑은 고딕" pitchFamily="34" charset="-122"/>
+                <a:cs typeface="맑은 고딕" pitchFamily="34" charset="-120"/>
+              </a:rPr>
+              <a:t>기능 고도화</a:t>
+            </a:r>
+            <a:endParaRPr lang="en-US" sz="1600" dirty="0"/>
+          </a:p>
+        </p:txBody>
+      </p:sp>
+      <p:sp>
+        <p:nvSpPr>
+          <p:cNvPr id="21" name="Text 19"/>
+          <p:cNvSpPr/>
+          <p:nvPr/>
+        </p:nvSpPr>
+        <p:spPr>
+          <a:xfrm>
+            <a:off x="9180576" y="3108960"/>
+            <a:ext cx="2240280" cy="1828800"/>
+          </a:xfrm>
+          <a:prstGeom prst="rect">
+            <a:avLst/>
+          </a:prstGeom>
+          <a:noFill/>
+          <a:ln/>
+        </p:spPr>
+        <p:txBody>
+          <a:bodyPr wrap="square" rtlCol="0" anchor="ctr"/>
+          <a:lstStyle/>
+          <a:p>
+            <a:pPr indent="0" marL="0">
+              <a:lnSpc>
+                <a:spcPct val="120000"/>
+              </a:lnSpc>
+              <a:buNone/>
+            </a:pPr>
+            <a:r>
+              <a:rPr lang="en-US" sz="1200" dirty="0">
                 <a:solidFill>
                   <a:srgbClr val="6A6F76"/>
                 </a:solidFill>
@@ -8124,78 +9463,38 @@
                 <a:ea typeface="맑은 고딕" pitchFamily="34" charset="-122"/>
                 <a:cs typeface="맑은 고딕" pitchFamily="34" charset="-120"/>
               </a:rPr>
-              <a:t>사용자 입력 시점에 느린 외부 공공 API를 매번 호출하지 않습니다. 매일 새벽 자동 동기화·전처리된 통합 DB 내부에서 pgvector 하이브리드 인덱싱으로 즉시 조회하여, 수 초 내에 정확한 상황 해석 상담 결과를 출력합니다.</a:t>
-            </a:r>
-            <a:endParaRPr lang="en-US" sz="1500" dirty="0"/>
-          </a:p>
-        </p:txBody>
-      </p:sp>
-      <p:sp>
-        <p:nvSpPr>
-          <p:cNvPr id="7" name="Shape 5"/>
-          <p:cNvSpPr/>
-          <p:nvPr/>
-        </p:nvSpPr>
-        <p:spPr>
-          <a:xfrm>
-            <a:off x="4846320" y="3429000"/>
-            <a:ext cx="164592" cy="164592"/>
-          </a:xfrm>
-          <a:prstGeom prst="ellipse">
-            <a:avLst/>
-          </a:prstGeom>
-          <a:solidFill>
-            <a:srgbClr val="18A058"/>
-          </a:solidFill>
-          <a:ln/>
-        </p:spPr>
-      </p:sp>
-      <p:sp>
-        <p:nvSpPr>
-          <p:cNvPr id="8" name="Text 6"/>
-          <p:cNvSpPr/>
-          <p:nvPr/>
-        </p:nvSpPr>
-        <p:spPr>
-          <a:xfrm>
-            <a:off x="5166360" y="3383280"/>
-            <a:ext cx="6492240" cy="731520"/>
-          </a:xfrm>
-          <a:prstGeom prst="rect">
-            <a:avLst/>
-          </a:prstGeom>
-          <a:noFill/>
-          <a:ln/>
-        </p:spPr>
-        <p:txBody>
-          <a:bodyPr wrap="square" rtlCol="0" anchor="ctr"/>
-          <a:lstStyle/>
-          <a:p>
-            <a:pPr indent="0" marL="0">
-              <a:lnSpc>
-                <a:spcPct val="110000"/>
-              </a:lnSpc>
-              <a:buNone/>
-            </a:pPr>
-            <a:r>
-              <a:rPr lang="en-US" sz="1350" b="1" dirty="0">
-                <a:solidFill>
-                  <a:srgbClr val="1B1C1E"/>
-                </a:solidFill>
-                <a:latin typeface="맑은 고딕" pitchFamily="34" charset="0"/>
-                <a:ea typeface="맑은 고딕" pitchFamily="34" charset="-122"/>
-                <a:cs typeface="맑은 고딕" pitchFamily="34" charset="-120"/>
-              </a:rPr>
-              <a:t>키워드 + 벡터 하이브리드(RRF)  </a:t>
-            </a:r>
-            <a:pPr indent="0" marL="0">
-              <a:lnSpc>
-                <a:spcPct val="110000"/>
-              </a:lnSpc>
-              <a:buNone/>
-            </a:pPr>
-            <a:r>
-              <a:rPr lang="en-US" sz="1350" dirty="0">
+              <a:t>PWA·카카오 알림톡 연동, 공공 마이데이터 기반 소득·자격 자동 파싱</a:t>
+            </a:r>
+            <a:endParaRPr lang="en-US" sz="1200" dirty="0"/>
+          </a:p>
+        </p:txBody>
+      </p:sp>
+      <p:sp>
+        <p:nvSpPr>
+          <p:cNvPr id="22" name="Text 20"/>
+          <p:cNvSpPr/>
+          <p:nvPr/>
+        </p:nvSpPr>
+        <p:spPr>
+          <a:xfrm>
+            <a:off x="9180576" y="5074920"/>
+            <a:ext cx="2240280" cy="320040"/>
+          </a:xfrm>
+          <a:prstGeom prst="rect">
+            <a:avLst/>
+          </a:prstGeom>
+          <a:noFill/>
+          <a:ln/>
+        </p:spPr>
+        <p:txBody>
+          <a:bodyPr wrap="square" rtlCol="0" anchor="ctr"/>
+          <a:lstStyle/>
+          <a:p>
+            <a:pPr indent="0" marL="0">
+              <a:buNone/>
+            </a:pPr>
+            <a:r>
+              <a:rPr lang="en-US" sz="1100" b="1" dirty="0">
                 <a:solidFill>
                   <a:srgbClr val="6A6F76"/>
                 </a:solidFill>
@@ -8203,173 +9502,15 @@
                 <a:ea typeface="맑은 고딕" pitchFamily="34" charset="-122"/>
                 <a:cs typeface="맑은 고딕" pitchFamily="34" charset="-120"/>
               </a:rPr>
-              <a:t>정확 일치와 의미 검색을 결합해 사전에 없는 일상어도 매칭</a:t>
-            </a:r>
-            <a:endParaRPr lang="en-US" sz="1350" dirty="0"/>
-          </a:p>
-        </p:txBody>
-      </p:sp>
-      <p:sp>
-        <p:nvSpPr>
-          <p:cNvPr id="9" name="Shape 7"/>
-          <p:cNvSpPr/>
-          <p:nvPr/>
-        </p:nvSpPr>
-        <p:spPr>
-          <a:xfrm>
-            <a:off x="4846320" y="4251960"/>
-            <a:ext cx="164592" cy="164592"/>
-          </a:xfrm>
-          <a:prstGeom prst="ellipse">
-            <a:avLst/>
-          </a:prstGeom>
-          <a:solidFill>
-            <a:srgbClr val="18A058"/>
-          </a:solidFill>
-          <a:ln/>
-        </p:spPr>
-      </p:sp>
-      <p:sp>
-        <p:nvSpPr>
-          <p:cNvPr id="10" name="Text 8"/>
-          <p:cNvSpPr/>
-          <p:nvPr/>
-        </p:nvSpPr>
-        <p:spPr>
-          <a:xfrm>
-            <a:off x="5166360" y="4206240"/>
-            <a:ext cx="6492240" cy="731520"/>
-          </a:xfrm>
-          <a:prstGeom prst="rect">
-            <a:avLst/>
-          </a:prstGeom>
-          <a:noFill/>
-          <a:ln/>
-        </p:spPr>
-        <p:txBody>
-          <a:bodyPr wrap="square" rtlCol="0" anchor="ctr"/>
-          <a:lstStyle/>
-          <a:p>
-            <a:pPr indent="0" marL="0">
-              <a:lnSpc>
-                <a:spcPct val="110000"/>
-              </a:lnSpc>
-              <a:buNone/>
-            </a:pPr>
-            <a:r>
-              <a:rPr lang="en-US" sz="1350" b="1" dirty="0">
-                <a:solidFill>
-                  <a:srgbClr val="1B1C1E"/>
-                </a:solidFill>
-                <a:latin typeface="맑은 고딕" pitchFamily="34" charset="0"/>
-                <a:ea typeface="맑은 고딕" pitchFamily="34" charset="-122"/>
-                <a:cs typeface="맑은 고딕" pitchFamily="34" charset="-120"/>
-              </a:rPr>
-              <a:t>매일 자동 갱신 · 무료 운영  </a:t>
-            </a:r>
-            <a:pPr indent="0" marL="0">
-              <a:lnSpc>
-                <a:spcPct val="110000"/>
-              </a:lnSpc>
-              <a:buNone/>
-            </a:pPr>
-            <a:r>
-              <a:rPr lang="en-US" sz="1350" dirty="0">
-                <a:solidFill>
-                  <a:srgbClr val="6A6F76"/>
-                </a:solidFill>
-                <a:latin typeface="맑은 고딕" pitchFamily="34" charset="0"/>
-                <a:ea typeface="맑은 고딕" pitchFamily="34" charset="-122"/>
-                <a:cs typeface="맑은 고딕" pitchFamily="34" charset="-120"/>
-              </a:rPr>
-              <a:t>GitHub Actions로 매일 새벽 수집 + 임베딩을 자동 실행</a:t>
-            </a:r>
-            <a:endParaRPr lang="en-US" sz="1350" dirty="0"/>
-          </a:p>
-        </p:txBody>
-      </p:sp>
-      <p:sp>
-        <p:nvSpPr>
-          <p:cNvPr id="11" name="Shape 9"/>
-          <p:cNvSpPr/>
-          <p:nvPr/>
-        </p:nvSpPr>
-        <p:spPr>
-          <a:xfrm>
-            <a:off x="4846320" y="5074920"/>
-            <a:ext cx="164592" cy="164592"/>
-          </a:xfrm>
-          <a:prstGeom prst="ellipse">
-            <a:avLst/>
-          </a:prstGeom>
-          <a:solidFill>
-            <a:srgbClr val="18A058"/>
-          </a:solidFill>
-          <a:ln/>
-        </p:spPr>
-      </p:sp>
-      <p:sp>
-        <p:nvSpPr>
-          <p:cNvPr id="12" name="Text 10"/>
-          <p:cNvSpPr/>
-          <p:nvPr/>
-        </p:nvSpPr>
-        <p:spPr>
-          <a:xfrm>
-            <a:off x="5166360" y="5029200"/>
-            <a:ext cx="6492240" cy="731520"/>
-          </a:xfrm>
-          <a:prstGeom prst="rect">
-            <a:avLst/>
-          </a:prstGeom>
-          <a:noFill/>
-          <a:ln/>
-        </p:spPr>
-        <p:txBody>
-          <a:bodyPr wrap="square" rtlCol="0" anchor="ctr"/>
-          <a:lstStyle/>
-          <a:p>
-            <a:pPr indent="0" marL="0">
-              <a:lnSpc>
-                <a:spcPct val="110000"/>
-              </a:lnSpc>
-              <a:buNone/>
-            </a:pPr>
-            <a:r>
-              <a:rPr lang="en-US" sz="1350" b="1" dirty="0">
-                <a:solidFill>
-                  <a:srgbClr val="1B1C1E"/>
-                </a:solidFill>
-                <a:latin typeface="맑은 고딕" pitchFamily="34" charset="0"/>
-                <a:ea typeface="맑은 고딕" pitchFamily="34" charset="-122"/>
-                <a:cs typeface="맑은 고딕" pitchFamily="34" charset="-120"/>
-              </a:rPr>
-              <a:t>로그인 없는 다중 사용자  </a:t>
-            </a:r>
-            <a:pPr indent="0" marL="0">
-              <a:lnSpc>
-                <a:spcPct val="110000"/>
-              </a:lnSpc>
-              <a:buNone/>
-            </a:pPr>
-            <a:r>
-              <a:rPr lang="en-US" sz="1350" dirty="0">
-                <a:solidFill>
-                  <a:srgbClr val="6A6F76"/>
-                </a:solidFill>
-                <a:latin typeface="맑은 고딕" pitchFamily="34" charset="0"/>
-                <a:ea typeface="맑은 고딕" pitchFamily="34" charset="-122"/>
-                <a:cs typeface="맑은 고딕" pitchFamily="34" charset="-120"/>
-              </a:rPr>
-              <a:t>기기별 계정으로 여러 사용자가 동시에 각자 데이터 사용(Supabase)</a:t>
-            </a:r>
-            <a:endParaRPr lang="en-US" sz="1350" dirty="0"/>
-          </a:p>
-        </p:txBody>
-      </p:sp>
-      <p:sp>
-        <p:nvSpPr>
-          <p:cNvPr id="13" name="Text 11"/>
+              <a:t>○ 예정</a:t>
+            </a:r>
+            <a:endParaRPr lang="en-US" sz="1100" dirty="0"/>
+          </a:p>
+        </p:txBody>
+      </p:sp>
+      <p:sp>
+        <p:nvSpPr>
+          <p:cNvPr id="23" name="Text 21"/>
           <p:cNvSpPr/>
           <p:nvPr/>
         </p:nvSpPr>
@@ -8388,7 +9529,7 @@
           <a:bodyPr wrap="square" rtlCol="0" anchor="ctr"/>
           <a:lstStyle/>
           <a:p>
-            <a:pPr algn="l" indent="0" marL="0">
+            <a:pPr indent="0" marL="0">
               <a:buNone/>
             </a:pPr>
             <a:r>
@@ -8400,7 +9541,7 @@
                 <a:ea typeface="맑은 고딕" pitchFamily="34" charset="-122"/>
                 <a:cs typeface="맑은 고딕" pitchFamily="34" charset="-120"/>
               </a:rPr>
-              <a:t>9 / 12 · 기술 경쟁력 및 로드맵</a:t>
+              <a:t>9 / 14 · 향후 서비스 전망</a:t>
             </a:r>
             <a:endParaRPr lang="en-US" sz="900" dirty="0"/>
           </a:p>
@@ -8408,7 +9549,7 @@
       </p:sp>
       <p:sp>
         <p:nvSpPr>
-          <p:cNvPr id="14" name="Text 12"/>
+          <p:cNvPr id="24" name="Text 22"/>
           <p:cNvSpPr/>
           <p:nvPr/>
         </p:nvSpPr>
